--- a/docs/Stanford_vs_ECGFounder_6page.pptx
+++ b/docs/Stanford_vs_ECGFounder_6page.pptx
@@ -11,9 +11,10 @@
     <p:sldId id="259" r:id="rId5"/>
     <p:sldId id="260" r:id="rId6"/>
     <p:sldId id="261" r:id="rId7"/>
+    <p:sldId id="262" r:id="rId8"/>
   </p:sldIdLst>
   <p:notesMasterIdLst>
-    <p:notesMasterId r:id="rId8"/>
+    <p:notesMasterId r:id="rId9"/>
   </p:notesMasterIdLst>
   <p:sldSz cx="12192000" cy="6858000"/>
   <p:notesSz cx="6858000" cy="12192000"/>
@@ -971,6 +972,94 @@
             <a:fld id="{F7021451-1387-4CA6-816F-3879F97B5CBC}" type="slidenum">
               <a:rPr lang="en-US"/>
               <a:t>6</a:t>
+            </a:fld>
+            <a:endParaRPr lang="en-US"/>
+          </a:p>
+        </p:txBody>
+      </p:sp>
+    </p:spTree>
+    <p:extLst>
+      <p:ext uri="{BB962C8B-B14F-4D97-AF65-F5344CB8AC3E}">
+        <p14:creationId xmlns:p14="http://schemas.microsoft.com/office/powerpoint/2010/main" val="1024086991"/>
+      </p:ext>
+    </p:extLst>
+  </p:cSld>
+  <p:clrMapOvr>
+    <a:masterClrMapping/>
+  </p:clrMapOvr>
+</p:notes>
+</file>
+
+<file path=ppt/notesSlides/notesSlide7.xml><?xml version="1.0" encoding="utf-8"?>
+<p:notes xmlns:a="http://schemas.openxmlformats.org/drawingml/2006/main" xmlns:r="http://schemas.openxmlformats.org/officeDocument/2006/relationships" xmlns:p="http://schemas.openxmlformats.org/presentationml/2006/main">
+  <p:cSld>
+    <p:spTree>
+      <p:nvGrpSpPr>
+        <p:cNvPr id="1" name=""/>
+        <p:cNvGrpSpPr/>
+        <p:nvPr/>
+      </p:nvGrpSpPr>
+      <p:grpSpPr>
+        <a:xfrm>
+          <a:off x="0" y="0"/>
+          <a:ext cx="0" cy="0"/>
+          <a:chOff x="0" y="0"/>
+          <a:chExt cx="0" cy="0"/>
+        </a:xfrm>
+      </p:grpSpPr>
+      <p:sp>
+        <p:nvSpPr>
+          <p:cNvPr id="2" name="Slide Image Placeholder 1"/>
+          <p:cNvSpPr>
+            <a:spLocks noGrp="1" noRot="1" noChangeAspect="1"/>
+          </p:cNvSpPr>
+          <p:nvPr>
+            <p:ph type="sldImg"/>
+          </p:nvPr>
+        </p:nvSpPr>
+        <p:spPr/>
+      </p:sp>
+      <p:sp>
+        <p:nvSpPr>
+          <p:cNvPr id="3" name="Notes Placeholder 2"/>
+          <p:cNvSpPr>
+            <a:spLocks noGrp="1"/>
+          </p:cNvSpPr>
+          <p:nvPr>
+            <p:ph type="body" idx="1"/>
+          </p:nvPr>
+        </p:nvSpPr>
+        <p:spPr/>
+        <p:txBody>
+          <a:bodyPr/>
+          <a:lstStyle/>
+          <a:p>
+            <a:r>
+              <a:rPr lang="en-US" dirty="0"/>
+              <a:t/>
+            </a:r>
+            <a:endParaRPr lang="en-US" dirty="0"/>
+          </a:p>
+        </p:txBody>
+      </p:sp>
+      <p:sp>
+        <p:nvSpPr>
+          <p:cNvPr id="4" name="Slide Number Placeholder 3"/>
+          <p:cNvSpPr>
+            <a:spLocks noGrp="1"/>
+          </p:cNvSpPr>
+          <p:nvPr>
+            <p:ph type="sldNum" sz="quarter" idx="10"/>
+          </p:nvPr>
+        </p:nvSpPr>
+        <p:spPr/>
+        <p:txBody>
+          <a:bodyPr/>
+          <a:lstStyle/>
+          <a:p>
+            <a:fld id="{F7021451-1387-4CA6-816F-3879F97B5CBC}" type="slidenum">
+              <a:rPr lang="en-US"/>
+              <a:t>7</a:t>
             </a:fld>
             <a:endParaRPr lang="en-US"/>
           </a:p>
@@ -4141,6 +4230,206 @@
                   </a:tcPr>
                 </a:tc>
               </a:tr>
+              <a:tr h="475488">
+                <a:tc>
+                  <a:txBody>
+                    <a:bodyPr/>
+                    <a:lstStyle/>
+                    <a:p>
+                      <a:pPr indent="0" marL="0">
+                        <a:buNone/>
+                      </a:pPr>
+                      <a:r>
+                        <a:rPr lang="en-US" sz="1300" b="1" dirty="0">
+                          <a:solidFill>
+                            <a:srgbClr val="21295C"/>
+                          </a:solidFill>
+                          <a:latin typeface="Calibri" pitchFamily="34" charset="0"/>
+                          <a:ea typeface="Calibri" pitchFamily="34" charset="-122"/>
+                          <a:cs typeface="Calibri" pitchFamily="34" charset="-120"/>
+                        </a:rPr>
+                        <a:t>Cross-dataset labels</a:t>
+                      </a:r>
+                      <a:endParaRPr lang="en-US" sz="1300" dirty="0">
+                        <a:latin typeface="Calibri" charset="0"/>
+                        <a:ea typeface="Calibri" charset="0"/>
+                        <a:cs typeface="Calibri" charset="0"/>
+                      </a:endParaRPr>
+                    </a:p>
+                  </a:txBody>
+                  <a:tcPr marL="63500" marR="63500" marT="63500" marB="63500" anchor="ctr">
+                    <a:lnL w="6350" cap="flat" cmpd="sng" algn="ctr">
+                      <a:solidFill>
+                        <a:srgbClr val="D6DEE6"/>
+                      </a:solidFill>
+                      <a:prstDash val="solid"/>
+                      <a:round/>
+                      <a:headEnd type="none" w="med" len="med"/>
+                      <a:tailEnd type="none" w="med" len="med"/>
+                    </a:lnL>
+                    <a:lnR w="6350" cap="flat" cmpd="sng" algn="ctr">
+                      <a:solidFill>
+                        <a:srgbClr val="D6DEE6"/>
+                      </a:solidFill>
+                      <a:prstDash val="solid"/>
+                      <a:round/>
+                      <a:headEnd type="none" w="med" len="med"/>
+                      <a:tailEnd type="none" w="med" len="med"/>
+                    </a:lnR>
+                    <a:lnT w="6350" cap="flat" cmpd="sng" algn="ctr">
+                      <a:solidFill>
+                        <a:srgbClr val="D6DEE6"/>
+                      </a:solidFill>
+                      <a:prstDash val="solid"/>
+                      <a:round/>
+                      <a:headEnd type="none" w="med" len="med"/>
+                      <a:tailEnd type="none" w="med" len="med"/>
+                    </a:lnT>
+                    <a:lnB w="6350" cap="flat" cmpd="sng" algn="ctr">
+                      <a:solidFill>
+                        <a:srgbClr val="D6DEE6"/>
+                      </a:solidFill>
+                      <a:prstDash val="solid"/>
+                      <a:round/>
+                      <a:headEnd type="none" w="med" len="med"/>
+                      <a:tailEnd type="none" w="med" len="med"/>
+                    </a:lnB>
+                    <a:solidFill>
+                      <a:srgbClr val="F4F7FA"/>
+                    </a:solidFill>
+                  </a:tcPr>
+                </a:tc>
+                <a:tc>
+                  <a:txBody>
+                    <a:bodyPr/>
+                    <a:lstStyle/>
+                    <a:p>
+                      <a:pPr indent="0" marL="0">
+                        <a:buNone/>
+                      </a:pPr>
+                      <a:r>
+                        <a:rPr lang="en-US" sz="1300" b="1" dirty="0">
+                          <a:solidFill>
+                            <a:srgbClr val="1A2233"/>
+                          </a:solidFill>
+                          <a:latin typeface="Calibri" pitchFamily="34" charset="0"/>
+                          <a:ea typeface="Calibri" pitchFamily="34" charset="-122"/>
+                          <a:cs typeface="Calibri" pitchFamily="34" charset="-120"/>
+                        </a:rPr>
+                        <a:t>per-dataset; retrain or hand-map</a:t>
+                      </a:r>
+                      <a:endParaRPr lang="en-US" sz="1300" dirty="0">
+                        <a:latin typeface="Calibri" charset="0"/>
+                        <a:ea typeface="Calibri" charset="0"/>
+                        <a:cs typeface="Calibri" charset="0"/>
+                      </a:endParaRPr>
+                    </a:p>
+                  </a:txBody>
+                  <a:tcPr marL="63500" marR="63500" marT="63500" marB="63500" anchor="ctr">
+                    <a:lnL w="6350" cap="flat" cmpd="sng" algn="ctr">
+                      <a:solidFill>
+                        <a:srgbClr val="D6DEE6"/>
+                      </a:solidFill>
+                      <a:prstDash val="solid"/>
+                      <a:round/>
+                      <a:headEnd type="none" w="med" len="med"/>
+                      <a:tailEnd type="none" w="med" len="med"/>
+                    </a:lnL>
+                    <a:lnR w="6350" cap="flat" cmpd="sng" algn="ctr">
+                      <a:solidFill>
+                        <a:srgbClr val="D6DEE6"/>
+                      </a:solidFill>
+                      <a:prstDash val="solid"/>
+                      <a:round/>
+                      <a:headEnd type="none" w="med" len="med"/>
+                      <a:tailEnd type="none" w="med" len="med"/>
+                    </a:lnR>
+                    <a:lnT w="6350" cap="flat" cmpd="sng" algn="ctr">
+                      <a:solidFill>
+                        <a:srgbClr val="D6DEE6"/>
+                      </a:solidFill>
+                      <a:prstDash val="solid"/>
+                      <a:round/>
+                      <a:headEnd type="none" w="med" len="med"/>
+                      <a:tailEnd type="none" w="med" len="med"/>
+                    </a:lnT>
+                    <a:lnB w="6350" cap="flat" cmpd="sng" algn="ctr">
+                      <a:solidFill>
+                        <a:srgbClr val="D6DEE6"/>
+                      </a:solidFill>
+                      <a:prstDash val="solid"/>
+                      <a:round/>
+                      <a:headEnd type="none" w="med" len="med"/>
+                      <a:tailEnd type="none" w="med" len="med"/>
+                    </a:lnB>
+                  </a:tcPr>
+                </a:tc>
+                <a:tc>
+                  <a:txBody>
+                    <a:bodyPr/>
+                    <a:lstStyle/>
+                    <a:p>
+                      <a:pPr indent="0" marL="0">
+                        <a:buNone/>
+                      </a:pPr>
+                      <a:r>
+                        <a:rPr lang="en-US" sz="1300" b="1" dirty="0">
+                          <a:solidFill>
+                            <a:srgbClr val="1A2233"/>
+                          </a:solidFill>
+                          <a:latin typeface="Calibri" pitchFamily="34" charset="0"/>
+                          <a:ea typeface="Calibri" pitchFamily="34" charset="-122"/>
+                          <a:cs typeface="Calibri" pitchFamily="34" charset="-120"/>
+                        </a:rPr>
+                        <a:t>fixed 150-space; central map</a:t>
+                      </a:r>
+                      <a:endParaRPr lang="en-US" sz="1300" dirty="0">
+                        <a:latin typeface="Calibri" charset="0"/>
+                        <a:ea typeface="Calibri" charset="0"/>
+                        <a:cs typeface="Calibri" charset="0"/>
+                      </a:endParaRPr>
+                    </a:p>
+                  </a:txBody>
+                  <a:tcPr marL="63500" marR="63500" marT="63500" marB="63500" anchor="ctr">
+                    <a:lnL w="6350" cap="flat" cmpd="sng" algn="ctr">
+                      <a:solidFill>
+                        <a:srgbClr val="D6DEE6"/>
+                      </a:solidFill>
+                      <a:prstDash val="solid"/>
+                      <a:round/>
+                      <a:headEnd type="none" w="med" len="med"/>
+                      <a:tailEnd type="none" w="med" len="med"/>
+                    </a:lnL>
+                    <a:lnR w="6350" cap="flat" cmpd="sng" algn="ctr">
+                      <a:solidFill>
+                        <a:srgbClr val="D6DEE6"/>
+                      </a:solidFill>
+                      <a:prstDash val="solid"/>
+                      <a:round/>
+                      <a:headEnd type="none" w="med" len="med"/>
+                      <a:tailEnd type="none" w="med" len="med"/>
+                    </a:lnR>
+                    <a:lnT w="6350" cap="flat" cmpd="sng" algn="ctr">
+                      <a:solidFill>
+                        <a:srgbClr val="D6DEE6"/>
+                      </a:solidFill>
+                      <a:prstDash val="solid"/>
+                      <a:round/>
+                      <a:headEnd type="none" w="med" len="med"/>
+                      <a:tailEnd type="none" w="med" len="med"/>
+                    </a:lnT>
+                    <a:lnB w="6350" cap="flat" cmpd="sng" algn="ctr">
+                      <a:solidFill>
+                        <a:srgbClr val="D6DEE6"/>
+                      </a:solidFill>
+                      <a:prstDash val="solid"/>
+                      <a:round/>
+                      <a:headEnd type="none" w="med" len="med"/>
+                      <a:tailEnd type="none" w="med" len="med"/>
+                    </a:lnB>
+                  </a:tcPr>
+                </a:tc>
+              </a:tr>
             </a:tbl>
           </a:graphicData>
         </a:graphic>
@@ -4210,7 +4499,7 @@
                 <a:ea typeface="Calibri" pitchFamily="34" charset="-122"/>
                 <a:cs typeface="Calibri" pitchFamily="34" charset="-120"/>
               </a:rPr>
-              <a:t>BOTH RUN ON MIT-BIH, IN DIFFERENT SETTINGS</a:t>
+              <a:t>NO SHARED ONTOLOGY VS ONE FIXED VOCABULARY</a:t>
             </a:r>
             <a:endParaRPr lang="en-US" sz="1200" dirty="0"/>
           </a:p>
@@ -4249,7 +4538,7 @@
                 <a:ea typeface="Georgia" pitchFamily="34" charset="-122"/>
                 <a:cs typeface="Georgia" pitchFamily="34" charset="-120"/>
               </a:rPr>
-              <a:t>Head-to-head: MIT-BIH</a:t>
+              <a:t>Label handling across databases</a:t>
             </a:r>
             <a:endParaRPr lang="en-US" sz="3000" dirty="0"/>
           </a:p>
@@ -4264,15 +4553,397 @@
         <p:spPr>
           <a:xfrm>
             <a:off x="548640" y="1691640"/>
-            <a:ext cx="5257800" cy="2148840"/>
+            <a:ext cx="5257800" cy="3657600"/>
           </a:xfrm>
           <a:prstGeom prst="rect">
             <a:avLst/>
           </a:prstGeom>
           <a:solidFill>
-            <a:srgbClr val="F4F7FA"/>
+            <a:srgbClr val="FFFFFF"/>
           </a:solidFill>
-          <a:ln w="12700">
+          <a:ln w="19050">
+            <a:solidFill>
+              <a:srgbClr val="065A82"/>
+            </a:solidFill>
+            <a:prstDash val="solid"/>
+          </a:ln>
+        </p:spPr>
+      </p:sp>
+      <p:sp>
+        <p:nvSpPr>
+          <p:cNvPr id="5" name="Text 3"/>
+          <p:cNvSpPr/>
+          <p:nvPr/>
+        </p:nvSpPr>
+        <p:spPr>
+          <a:xfrm>
+            <a:off x="868680" y="1920240"/>
+            <a:ext cx="4754880" cy="502920"/>
+          </a:xfrm>
+          <a:prstGeom prst="rect">
+            <a:avLst/>
+          </a:prstGeom>
+          <a:noFill/>
+          <a:ln/>
+        </p:spPr>
+        <p:txBody>
+          <a:bodyPr wrap="square" lIns="0" tIns="0" rIns="0" bIns="0" rtlCol="0" anchor="ctr"/>
+          <a:lstStyle/>
+          <a:p>
+            <a:pPr indent="0" marL="0">
+              <a:buNone/>
+            </a:pPr>
+            <a:r>
+              <a:rPr lang="en-US" sz="1800" b="1" dirty="0">
+                <a:solidFill>
+                  <a:srgbClr val="065A82"/>
+                </a:solidFill>
+                <a:latin typeface="Georgia" pitchFamily="34" charset="0"/>
+                <a:ea typeface="Georgia" pitchFamily="34" charset="-122"/>
+                <a:cs typeface="Georgia" pitchFamily="34" charset="-120"/>
+              </a:rPr>
+              <a:t>Stanford - no global label space</a:t>
+            </a:r>
+            <a:endParaRPr lang="en-US" sz="1800" dirty="0"/>
+          </a:p>
+        </p:txBody>
+      </p:sp>
+      <p:sp>
+        <p:nvSpPr>
+          <p:cNvPr id="6" name="Text 4"/>
+          <p:cNvSpPr/>
+          <p:nvPr/>
+        </p:nvSpPr>
+        <p:spPr>
+          <a:xfrm>
+            <a:off x="868680" y="2560320"/>
+            <a:ext cx="4709160" cy="2651760"/>
+          </a:xfrm>
+          <a:prstGeom prst="rect">
+            <a:avLst/>
+          </a:prstGeom>
+          <a:noFill/>
+          <a:ln/>
+        </p:spPr>
+        <p:txBody>
+          <a:bodyPr wrap="square" lIns="0" tIns="0" rIns="0" bIns="0" rtlCol="0" anchor="ctr"/>
+          <a:lstStyle/>
+          <a:p>
+            <a:pPr marL="342900" indent="-342900">
+              <a:lnSpc>
+                <a:spcPct val="125000"/>
+              </a:lnSpc>
+              <a:buSzPct val="100000"/>
+              <a:buChar char="•"/>
+            </a:pPr>
+            <a:r>
+              <a:rPr lang="en-US" sz="1350" dirty="0">
+                <a:solidFill>
+                  <a:srgbClr val="1A2233"/>
+                </a:solidFill>
+                <a:latin typeface="Calibri" pitchFamily="34" charset="0"/>
+                <a:ea typeface="Calibri" pitchFamily="34" charset="-122"/>
+                <a:cs typeface="Calibri" pitchFamily="34" charset="-120"/>
+              </a:rPr>
+              <a:t>Each checkpoint's classes auto-derived from its training data</a:t>
+            </a:r>
+            <a:endParaRPr lang="en-US" sz="1350" dirty="0"/>
+          </a:p>
+          <a:p>
+            <a:pPr marL="342900" indent="-342900">
+              <a:lnSpc>
+                <a:spcPct val="125000"/>
+              </a:lnSpc>
+              <a:buSzPct val="100000"/>
+              <a:buChar char="•"/>
+            </a:pPr>
+            <a:r>
+              <a:rPr lang="en-US" sz="1350" dirty="0">
+                <a:solidFill>
+                  <a:srgbClr val="1A2233"/>
+                </a:solidFill>
+                <a:latin typeface="Calibri" pitchFamily="34" charset="0"/>
+                <a:ea typeface="Calibri" pitchFamily="34" charset="-122"/>
+                <a:cs typeface="Calibri" pitchFamily="34" charset="-120"/>
+              </a:rPr>
+              <a:t>cinc17 -&gt; A / N / O / ~     mitdb -&gt; SINUS / BIGEMINY / TRIGEMINY / VT</a:t>
+            </a:r>
+            <a:endParaRPr lang="en-US" sz="1350" dirty="0"/>
+          </a:p>
+          <a:p>
+            <a:pPr marL="342900" indent="-342900">
+              <a:lnSpc>
+                <a:spcPct val="125000"/>
+              </a:lnSpc>
+              <a:buSzPct val="100000"/>
+              <a:buChar char="•"/>
+            </a:pPr>
+            <a:r>
+              <a:rPr lang="en-US" sz="1350" dirty="0">
+                <a:solidFill>
+                  <a:srgbClr val="1A2233"/>
+                </a:solidFill>
+                <a:latin typeface="Calibri" pitchFamily="34" charset="0"/>
+                <a:ea typeface="Calibri" pitchFamily="34" charset="-122"/>
+                <a:cs typeface="Calibri" pitchFamily="34" charset="-120"/>
+              </a:rPr>
+              <a:t>New database = RETRAIN (new checkpoint) OR HAND-MAP</a:t>
+            </a:r>
+            <a:endParaRPr lang="en-US" sz="1350" dirty="0"/>
+          </a:p>
+          <a:p>
+            <a:pPr marL="342900" indent="-342900">
+              <a:lnSpc>
+                <a:spcPct val="125000"/>
+              </a:lnSpc>
+              <a:buSzPct val="100000"/>
+              <a:buChar char="•"/>
+            </a:pPr>
+            <a:r>
+              <a:rPr lang="en-US" sz="1350" dirty="0">
+                <a:solidFill>
+                  <a:srgbClr val="1A2233"/>
+                </a:solidFill>
+                <a:latin typeface="Calibri" pitchFamily="34" charset="0"/>
+                <a:ea typeface="Calibri" pitchFamily="34" charset="-122"/>
+                <a:cs typeface="Calibri" pitchFamily="34" charset="-120"/>
+              </a:rPr>
+              <a:t>Hand-map = per-script LABEL_MAP dict, lossy, not centralized</a:t>
+            </a:r>
+            <a:endParaRPr lang="en-US" sz="1350" dirty="0"/>
+          </a:p>
+          <a:p>
+            <a:pPr marL="342900" indent="-342900">
+              <a:lnSpc>
+                <a:spcPct val="125000"/>
+              </a:lnSpc>
+              <a:buSzPct val="100000"/>
+              <a:buChar char="•"/>
+            </a:pPr>
+            <a:r>
+              <a:rPr lang="en-US" sz="1350" dirty="0">
+                <a:solidFill>
+                  <a:srgbClr val="1A2233"/>
+                </a:solidFill>
+                <a:latin typeface="Calibri" pitchFamily="34" charset="0"/>
+                <a:ea typeface="Calibri" pitchFamily="34" charset="-122"/>
+                <a:cs typeface="Calibri" pitchFamily="34" charset="-120"/>
+              </a:rPr>
+              <a:t>No reusable, enforced cross-dataset mapping</a:t>
+            </a:r>
+            <a:endParaRPr lang="en-US" sz="1350" dirty="0"/>
+          </a:p>
+        </p:txBody>
+      </p:sp>
+      <p:sp>
+        <p:nvSpPr>
+          <p:cNvPr id="7" name="Shape 5"/>
+          <p:cNvSpPr/>
+          <p:nvPr/>
+        </p:nvSpPr>
+        <p:spPr>
+          <a:xfrm>
+            <a:off x="6355080" y="1691640"/>
+            <a:ext cx="5257800" cy="3657600"/>
+          </a:xfrm>
+          <a:prstGeom prst="rect">
+            <a:avLst/>
+          </a:prstGeom>
+          <a:solidFill>
+            <a:srgbClr val="FFFFFF"/>
+          </a:solidFill>
+          <a:ln w="19050">
+            <a:solidFill>
+              <a:srgbClr val="1C7293"/>
+            </a:solidFill>
+            <a:prstDash val="solid"/>
+          </a:ln>
+        </p:spPr>
+      </p:sp>
+      <p:sp>
+        <p:nvSpPr>
+          <p:cNvPr id="8" name="Text 6"/>
+          <p:cNvSpPr/>
+          <p:nvPr/>
+        </p:nvSpPr>
+        <p:spPr>
+          <a:xfrm>
+            <a:off x="6675120" y="1920240"/>
+            <a:ext cx="4754880" cy="502920"/>
+          </a:xfrm>
+          <a:prstGeom prst="rect">
+            <a:avLst/>
+          </a:prstGeom>
+          <a:noFill/>
+          <a:ln/>
+        </p:spPr>
+        <p:txBody>
+          <a:bodyPr wrap="square" lIns="0" tIns="0" rIns="0" bIns="0" rtlCol="0" anchor="ctr"/>
+          <a:lstStyle/>
+          <a:p>
+            <a:pPr indent="0" marL="0">
+              <a:buNone/>
+            </a:pPr>
+            <a:r>
+              <a:rPr lang="en-US" sz="1800" b="1" dirty="0">
+                <a:solidFill>
+                  <a:srgbClr val="1C7293"/>
+                </a:solidFill>
+                <a:latin typeface="Georgia" pitchFamily="34" charset="0"/>
+                <a:ea typeface="Georgia" pitchFamily="34" charset="-122"/>
+                <a:cs typeface="Georgia" pitchFamily="34" charset="-120"/>
+              </a:rPr>
+              <a:t>ECGFounder - one fixed vocabulary</a:t>
+            </a:r>
+            <a:endParaRPr lang="en-US" sz="1800" dirty="0"/>
+          </a:p>
+        </p:txBody>
+      </p:sp>
+      <p:sp>
+        <p:nvSpPr>
+          <p:cNvPr id="9" name="Text 7"/>
+          <p:cNvSpPr/>
+          <p:nvPr/>
+        </p:nvSpPr>
+        <p:spPr>
+          <a:xfrm>
+            <a:off x="6675120" y="2560320"/>
+            <a:ext cx="4709160" cy="2651760"/>
+          </a:xfrm>
+          <a:prstGeom prst="rect">
+            <a:avLst/>
+          </a:prstGeom>
+          <a:noFill/>
+          <a:ln/>
+        </p:spPr>
+        <p:txBody>
+          <a:bodyPr wrap="square" lIns="0" tIns="0" rIns="0" bIns="0" rtlCol="0" anchor="ctr"/>
+          <a:lstStyle/>
+          <a:p>
+            <a:pPr marL="342900" indent="-342900">
+              <a:lnSpc>
+                <a:spcPct val="125000"/>
+              </a:lnSpc>
+              <a:buSzPct val="100000"/>
+              <a:buChar char="•"/>
+            </a:pPr>
+            <a:r>
+              <a:rPr lang="en-US" sz="1350" dirty="0">
+                <a:solidFill>
+                  <a:srgbClr val="1A2233"/>
+                </a:solidFill>
+                <a:latin typeface="Calibri" pitchFamily="34" charset="0"/>
+                <a:ea typeface="Calibri" pitchFamily="34" charset="-122"/>
+                <a:cs typeface="Calibri" pitchFamily="34" charset="-120"/>
+              </a:rPr>
+              <a:t>One fixed 150-label space, pinned once (tasks.txt)</a:t>
+            </a:r>
+            <a:endParaRPr lang="en-US" sz="1350" dirty="0"/>
+          </a:p>
+          <a:p>
+            <a:pPr marL="342900" indent="-342900">
+              <a:lnSpc>
+                <a:spcPct val="125000"/>
+              </a:lnSpc>
+              <a:buSzPct val="100000"/>
+              <a:buChar char="•"/>
+            </a:pPr>
+            <a:r>
+              <a:rPr lang="en-US" sz="1350" dirty="0">
+                <a:solidFill>
+                  <a:srgbClr val="1A2233"/>
+                </a:solidFill>
+                <a:latin typeface="Calibri" pitchFamily="34" charset="0"/>
+                <a:ea typeface="Calibri" pitchFamily="34" charset="-122"/>
+                <a:cs typeface="Calibri" pitchFamily="34" charset="-120"/>
+              </a:rPr>
+              <a:t>Every dataset mapped INTO that space, not the reverse</a:t>
+            </a:r>
+            <a:endParaRPr lang="en-US" sz="1350" dirty="0"/>
+          </a:p>
+          <a:p>
+            <a:pPr marL="342900" indent="-342900">
+              <a:lnSpc>
+                <a:spcPct val="125000"/>
+              </a:lnSpc>
+              <a:buSzPct val="100000"/>
+              <a:buChar char="•"/>
+            </a:pPr>
+            <a:r>
+              <a:rPr lang="en-US" sz="1350" dirty="0">
+                <a:solidFill>
+                  <a:srgbClr val="1A2233"/>
+                </a:solidFill>
+                <a:latin typeface="Calibri" pitchFamily="34" charset="0"/>
+                <a:ea typeface="Calibri" pitchFamily="34" charset="-122"/>
+                <a:cs typeface="Calibri" pitchFamily="34" charset="-120"/>
+              </a:rPr>
+              <a:t>Centralized label_config + GLOBAL_LABEL_MAP.md (single source)</a:t>
+            </a:r>
+            <a:endParaRPr lang="en-US" sz="1350" dirty="0"/>
+          </a:p>
+          <a:p>
+            <a:pPr marL="342900" indent="-342900">
+              <a:lnSpc>
+                <a:spcPct val="125000"/>
+              </a:lnSpc>
+              <a:buSzPct val="100000"/>
+              <a:buChar char="•"/>
+            </a:pPr>
+            <a:r>
+              <a:rPr lang="en-US" sz="1350" dirty="0">
+                <a:solidFill>
+                  <a:srgbClr val="1A2233"/>
+                </a:solidFill>
+                <a:latin typeface="Calibri" pitchFamily="34" charset="0"/>
+                <a:ea typeface="Calibri" pitchFamily="34" charset="-122"/>
+                <a:cs typeface="Calibri" pitchFamily="34" charset="-120"/>
+              </a:rPr>
+              <a:t>Import-time enforced - fails to load on drift</a:t>
+            </a:r>
+            <a:endParaRPr lang="en-US" sz="1350" dirty="0"/>
+          </a:p>
+          <a:p>
+            <a:pPr marL="342900" indent="-342900">
+              <a:lnSpc>
+                <a:spcPct val="125000"/>
+              </a:lnSpc>
+              <a:buSzPct val="100000"/>
+              <a:buChar char="•"/>
+            </a:pPr>
+            <a:r>
+              <a:rPr lang="en-US" sz="1350" dirty="0">
+                <a:solidFill>
+                  <a:srgbClr val="1A2233"/>
+                </a:solidFill>
+                <a:latin typeface="Calibri" pitchFamily="34" charset="0"/>
+                <a:ea typeface="Calibri" pitchFamily="34" charset="-122"/>
+                <a:cs typeface="Calibri" pitchFamily="34" charset="-120"/>
+              </a:rPr>
+              <a:t>New database = a mapping entry, backbone untouched</a:t>
+            </a:r>
+            <a:endParaRPr lang="en-US" sz="1350" dirty="0"/>
+          </a:p>
+        </p:txBody>
+      </p:sp>
+      <p:sp>
+        <p:nvSpPr>
+          <p:cNvPr id="10" name="Shape 8"/>
+          <p:cNvSpPr/>
+          <p:nvPr/>
+        </p:nvSpPr>
+        <p:spPr>
+          <a:xfrm>
+            <a:off x="548640" y="5532120"/>
+            <a:ext cx="11064240" cy="868680"/>
+          </a:xfrm>
+          <a:prstGeom prst="rect">
+            <a:avLst/>
+          </a:prstGeom>
+          <a:solidFill>
+            <a:srgbClr val="EEF3F6"/>
+          </a:solidFill>
+          <a:ln w="6350">
             <a:solidFill>
               <a:srgbClr val="D6DEE6"/>
             </a:solidFill>
@@ -4282,34 +4953,14 @@
       </p:sp>
       <p:sp>
         <p:nvSpPr>
-          <p:cNvPr id="5" name="Shape 3"/>
+          <p:cNvPr id="11" name="Text 9"/>
           <p:cNvSpPr/>
           <p:nvPr/>
         </p:nvSpPr>
         <p:spPr>
           <a:xfrm>
-            <a:off x="548640" y="1691640"/>
-            <a:ext cx="5257800" cy="118872"/>
-          </a:xfrm>
-          <a:prstGeom prst="rect">
-            <a:avLst/>
-          </a:prstGeom>
-          <a:solidFill>
-            <a:srgbClr val="065A82"/>
-          </a:solidFill>
-          <a:ln/>
-        </p:spPr>
-      </p:sp>
-      <p:sp>
-        <p:nvSpPr>
-          <p:cNvPr id="6" name="Text 4"/>
-          <p:cNvSpPr/>
-          <p:nvPr/>
-        </p:nvSpPr>
-        <p:spPr>
-          <a:xfrm>
-            <a:off x="868680" y="1874520"/>
-            <a:ext cx="4663440" cy="365760"/>
+            <a:off x="777240" y="5650992"/>
+            <a:ext cx="10607040" cy="640080"/>
           </a:xfrm>
           <a:prstGeom prst="rect">
             <a:avLst/>
@@ -4325,108 +4976,21 @@
               <a:buNone/>
             </a:pPr>
             <a:r>
-              <a:rPr lang="en-US" sz="1600" b="1" dirty="0">
-                <a:solidFill>
-                  <a:srgbClr val="065A82"/>
-                </a:solidFill>
-                <a:latin typeface="Georgia" pitchFamily="34" charset="0"/>
-                <a:ea typeface="Georgia" pitchFamily="34" charset="-122"/>
-                <a:cs typeface="Georgia" pitchFamily="34" charset="-120"/>
-              </a:rPr>
-              <a:t>Stanford 1D-ResNet</a:t>
-            </a:r>
-            <a:endParaRPr lang="en-US" sz="1600" dirty="0"/>
-          </a:p>
-        </p:txBody>
-      </p:sp>
-      <p:sp>
-        <p:nvSpPr>
-          <p:cNvPr id="7" name="Text 5"/>
-          <p:cNvSpPr/>
-          <p:nvPr/>
-        </p:nvSpPr>
-        <p:spPr>
-          <a:xfrm>
-            <a:off x="822960" y="2240280"/>
-            <a:ext cx="2011680" cy="1005840"/>
-          </a:xfrm>
-          <a:prstGeom prst="rect">
-            <a:avLst/>
-          </a:prstGeom>
-          <a:noFill/>
-          <a:ln/>
-        </p:spPr>
-        <p:txBody>
-          <a:bodyPr wrap="square" lIns="0" tIns="0" rIns="0" bIns="0" rtlCol="0" anchor="ctr"/>
-          <a:lstStyle/>
-          <a:p>
-            <a:pPr indent="0" marL="0">
-              <a:buNone/>
-            </a:pPr>
-            <a:r>
-              <a:rPr lang="en-US" sz="4400" b="1" dirty="0">
-                <a:solidFill>
-                  <a:srgbClr val="1A2233"/>
-                </a:solidFill>
-                <a:latin typeface="Georgia" pitchFamily="34" charset="0"/>
-                <a:ea typeface="Georgia" pitchFamily="34" charset="-122"/>
-                <a:cs typeface="Georgia" pitchFamily="34" charset="-120"/>
-              </a:rPr>
-              <a:t>~1.00</a:t>
-            </a:r>
-            <a:endParaRPr lang="en-US" sz="4400" dirty="0"/>
-          </a:p>
-        </p:txBody>
-      </p:sp>
-      <p:sp>
-        <p:nvSpPr>
-          <p:cNvPr id="8" name="Text 6"/>
-          <p:cNvSpPr/>
-          <p:nvPr/>
-        </p:nvSpPr>
-        <p:spPr>
-          <a:xfrm>
-            <a:off x="2880360" y="2258568"/>
-            <a:ext cx="2743200" cy="1325880"/>
-          </a:xfrm>
-          <a:prstGeom prst="rect">
-            <a:avLst/>
-          </a:prstGeom>
-          <a:noFill/>
-          <a:ln/>
-        </p:spPr>
-        <p:txBody>
-          <a:bodyPr wrap="square" lIns="0" tIns="0" rIns="0" bIns="0" rtlCol="0" anchor="ctr"/>
-          <a:lstStyle/>
-          <a:p>
-            <a:pPr indent="0" marL="0">
-              <a:lnSpc>
-                <a:spcPct val="115000"/>
-              </a:lnSpc>
-              <a:buNone/>
-            </a:pPr>
-            <a:r>
-              <a:rPr lang="en-US" sz="1200" dirty="0">
-                <a:solidFill>
-                  <a:srgbClr val="1A2233"/>
+              <a:rPr lang="en-US" sz="1350" b="1" dirty="0">
+                <a:solidFill>
+                  <a:srgbClr val="21295C"/>
                 </a:solidFill>
                 <a:latin typeface="Calibri" pitchFamily="34" charset="0"/>
                 <a:ea typeface="Calibri" pitchFamily="34" charset="-122"/>
                 <a:cs typeface="Calibri" pitchFamily="34" charset="-120"/>
               </a:rPr>
-              <a:t>accuracy on dev_split</a:t>
-            </a:r>
-            <a:endParaRPr lang="en-US" sz="1200" dirty="0"/>
-          </a:p>
-          <a:p>
+              <a:t>Takeaway:  </a:t>
+            </a:r>
             <a:pPr indent="0" marL="0">
-              <a:lnSpc>
-                <a:spcPct val="115000"/>
-              </a:lnSpc>
               <a:buNone/>
             </a:pPr>
             <a:r>
-              <a:rPr lang="en-US" sz="1200" dirty="0">
+              <a:rPr lang="en-US" sz="1350" dirty="0">
                 <a:solidFill>
                   <a:srgbClr val="1A2233"/>
                 </a:solidFill>
@@ -4434,438 +4998,9 @@
                 <a:ea typeface="Calibri" pitchFamily="34" charset="-122"/>
                 <a:cs typeface="Calibri" pitchFamily="34" charset="-120"/>
               </a:rPr>
-              <a:t>SINUS F1 1.00 (n=1597)</a:t>
-            </a:r>
-            <a:endParaRPr lang="en-US" sz="1200" dirty="0"/>
-          </a:p>
-          <a:p>
-            <a:pPr indent="0" marL="0">
-              <a:lnSpc>
-                <a:spcPct val="115000"/>
-              </a:lnSpc>
-              <a:buNone/>
-            </a:pPr>
-            <a:r>
-              <a:rPr lang="en-US" sz="1200" dirty="0">
-                <a:solidFill>
-                  <a:srgbClr val="1A2233"/>
-                </a:solidFill>
-                <a:latin typeface="Calibri" pitchFamily="34" charset="0"/>
-                <a:ea typeface="Calibri" pitchFamily="34" charset="-122"/>
-                <a:cs typeface="Calibri" pitchFamily="34" charset="-120"/>
-              </a:rPr>
-              <a:t>BIGEMINY F1 0.96 (n=41)</a:t>
-            </a:r>
-            <a:endParaRPr lang="en-US" sz="1200" dirty="0"/>
-          </a:p>
-        </p:txBody>
-      </p:sp>
-      <p:sp>
-        <p:nvSpPr>
-          <p:cNvPr id="9" name="Text 7"/>
-          <p:cNvSpPr/>
-          <p:nvPr/>
-        </p:nvSpPr>
-        <p:spPr>
-          <a:xfrm>
-            <a:off x="868680" y="3520440"/>
-            <a:ext cx="4663440" cy="274320"/>
-          </a:xfrm>
-          <a:prstGeom prst="rect">
-            <a:avLst/>
-          </a:prstGeom>
-          <a:noFill/>
-          <a:ln/>
-        </p:spPr>
-        <p:txBody>
-          <a:bodyPr wrap="square" lIns="0" tIns="0" rIns="0" bIns="0" rtlCol="0" anchor="ctr"/>
-          <a:lstStyle/>
-          <a:p>
-            <a:pPr indent="0" marL="0">
-              <a:buNone/>
-            </a:pPr>
-            <a:r>
-              <a:rPr lang="en-US" sz="1100" b="1" i="1" dirty="0">
-                <a:solidFill>
-                  <a:srgbClr val="065A82"/>
-                </a:solidFill>
-                <a:latin typeface="Calibri" pitchFamily="34" charset="0"/>
-                <a:ea typeface="Calibri" pitchFamily="34" charset="-122"/>
-                <a:cs typeface="Calibri" pitchFamily="34" charset="-120"/>
-              </a:rPr>
-              <a:t>TRAINED ON MIT-BIH (in-distribution)</a:t>
-            </a:r>
-            <a:endParaRPr lang="en-US" sz="1100" dirty="0"/>
-          </a:p>
-        </p:txBody>
-      </p:sp>
-      <p:sp>
-        <p:nvSpPr>
-          <p:cNvPr id="10" name="Shape 8"/>
-          <p:cNvSpPr/>
-          <p:nvPr/>
-        </p:nvSpPr>
-        <p:spPr>
-          <a:xfrm>
-            <a:off x="6355080" y="1691640"/>
-            <a:ext cx="5257800" cy="2148840"/>
-          </a:xfrm>
-          <a:prstGeom prst="rect">
-            <a:avLst/>
-          </a:prstGeom>
-          <a:solidFill>
-            <a:srgbClr val="F4F7FA"/>
-          </a:solidFill>
-          <a:ln w="12700">
-            <a:solidFill>
-              <a:srgbClr val="D6DEE6"/>
-            </a:solidFill>
-            <a:prstDash val="solid"/>
-          </a:ln>
-        </p:spPr>
-      </p:sp>
-      <p:sp>
-        <p:nvSpPr>
-          <p:cNvPr id="11" name="Shape 9"/>
-          <p:cNvSpPr/>
-          <p:nvPr/>
-        </p:nvSpPr>
-        <p:spPr>
-          <a:xfrm>
-            <a:off x="6355080" y="1691640"/>
-            <a:ext cx="5257800" cy="118872"/>
-          </a:xfrm>
-          <a:prstGeom prst="rect">
-            <a:avLst/>
-          </a:prstGeom>
-          <a:solidFill>
-            <a:srgbClr val="1C7293"/>
-          </a:solidFill>
-          <a:ln/>
-        </p:spPr>
-      </p:sp>
-      <p:sp>
-        <p:nvSpPr>
-          <p:cNvPr id="12" name="Text 10"/>
-          <p:cNvSpPr/>
-          <p:nvPr/>
-        </p:nvSpPr>
-        <p:spPr>
-          <a:xfrm>
-            <a:off x="6675120" y="1874520"/>
-            <a:ext cx="4663440" cy="365760"/>
-          </a:xfrm>
-          <a:prstGeom prst="rect">
-            <a:avLst/>
-          </a:prstGeom>
-          <a:noFill/>
-          <a:ln/>
-        </p:spPr>
-        <p:txBody>
-          <a:bodyPr wrap="square" lIns="0" tIns="0" rIns="0" bIns="0" rtlCol="0" anchor="ctr"/>
-          <a:lstStyle/>
-          <a:p>
-            <a:pPr indent="0" marL="0">
-              <a:buNone/>
-            </a:pPr>
-            <a:r>
-              <a:rPr lang="en-US" sz="1600" b="1" dirty="0">
-                <a:solidFill>
-                  <a:srgbClr val="1C7293"/>
-                </a:solidFill>
-                <a:latin typeface="Georgia" pitchFamily="34" charset="0"/>
-                <a:ea typeface="Georgia" pitchFamily="34" charset="-122"/>
-                <a:cs typeface="Georgia" pitchFamily="34" charset="-120"/>
-              </a:rPr>
-              <a:t>ECGFounder (zero-shot)</a:t>
-            </a:r>
-            <a:endParaRPr lang="en-US" sz="1600" dirty="0"/>
-          </a:p>
-        </p:txBody>
-      </p:sp>
-      <p:sp>
-        <p:nvSpPr>
-          <p:cNvPr id="13" name="Text 11"/>
-          <p:cNvSpPr/>
-          <p:nvPr/>
-        </p:nvSpPr>
-        <p:spPr>
-          <a:xfrm>
-            <a:off x="6629400" y="2240280"/>
-            <a:ext cx="2011680" cy="1005840"/>
-          </a:xfrm>
-          <a:prstGeom prst="rect">
-            <a:avLst/>
-          </a:prstGeom>
-          <a:noFill/>
-          <a:ln/>
-        </p:spPr>
-        <p:txBody>
-          <a:bodyPr wrap="square" lIns="0" tIns="0" rIns="0" bIns="0" rtlCol="0" anchor="ctr"/>
-          <a:lstStyle/>
-          <a:p>
-            <a:pPr indent="0" marL="0">
-              <a:buNone/>
-            </a:pPr>
-            <a:r>
-              <a:rPr lang="en-US" sz="4400" b="1" dirty="0">
-                <a:solidFill>
-                  <a:srgbClr val="1A2233"/>
-                </a:solidFill>
-                <a:latin typeface="Georgia" pitchFamily="34" charset="0"/>
-                <a:ea typeface="Georgia" pitchFamily="34" charset="-122"/>
-                <a:cs typeface="Georgia" pitchFamily="34" charset="-120"/>
-              </a:rPr>
-              <a:t>0.95</a:t>
-            </a:r>
-            <a:endParaRPr lang="en-US" sz="4400" dirty="0"/>
-          </a:p>
-        </p:txBody>
-      </p:sp>
-      <p:sp>
-        <p:nvSpPr>
-          <p:cNvPr id="14" name="Text 12"/>
-          <p:cNvSpPr/>
-          <p:nvPr/>
-        </p:nvSpPr>
-        <p:spPr>
-          <a:xfrm>
-            <a:off x="8686800" y="2258568"/>
-            <a:ext cx="2743200" cy="1325880"/>
-          </a:xfrm>
-          <a:prstGeom prst="rect">
-            <a:avLst/>
-          </a:prstGeom>
-          <a:noFill/>
-          <a:ln/>
-        </p:spPr>
-        <p:txBody>
-          <a:bodyPr wrap="square" lIns="0" tIns="0" rIns="0" bIns="0" rtlCol="0" anchor="ctr"/>
-          <a:lstStyle/>
-          <a:p>
-            <a:pPr indent="0" marL="0">
-              <a:lnSpc>
-                <a:spcPct val="115000"/>
-              </a:lnSpc>
-              <a:buNone/>
-            </a:pPr>
-            <a:r>
-              <a:rPr lang="en-US" sz="1200" dirty="0">
-                <a:solidFill>
-                  <a:srgbClr val="1A2233"/>
-                </a:solidFill>
-                <a:latin typeface="Calibri" pitchFamily="34" charset="0"/>
-                <a:ea typeface="Calibri" pitchFamily="34" charset="-122"/>
-                <a:cs typeface="Calibri" pitchFamily="34" charset="-120"/>
-              </a:rPr>
-              <a:t>AFib  ROC 0.95 / F1 0.86</a:t>
-            </a:r>
-            <a:endParaRPr lang="en-US" sz="1200" dirty="0"/>
-          </a:p>
-          <a:p>
-            <a:pPr indent="0" marL="0">
-              <a:lnSpc>
-                <a:spcPct val="115000"/>
-              </a:lnSpc>
-              <a:buNone/>
-            </a:pPr>
-            <a:r>
-              <a:rPr lang="en-US" sz="1200" dirty="0">
-                <a:solidFill>
-                  <a:srgbClr val="1A2233"/>
-                </a:solidFill>
-                <a:latin typeface="Calibri" pitchFamily="34" charset="0"/>
-                <a:ea typeface="Calibri" pitchFamily="34" charset="-122"/>
-                <a:cs typeface="Calibri" pitchFamily="34" charset="-120"/>
-              </a:rPr>
-              <a:t>PVC   ROC 0.94 / F1 0.72</a:t>
-            </a:r>
-            <a:endParaRPr lang="en-US" sz="1200" dirty="0"/>
-          </a:p>
-          <a:p>
-            <a:pPr indent="0" marL="0">
-              <a:lnSpc>
-                <a:spcPct val="115000"/>
-              </a:lnSpc>
-              <a:buNone/>
-            </a:pPr>
-            <a:r>
-              <a:rPr lang="en-US" sz="1200" dirty="0">
-                <a:solidFill>
-                  <a:srgbClr val="1A2233"/>
-                </a:solidFill>
-                <a:latin typeface="Calibri" pitchFamily="34" charset="0"/>
-                <a:ea typeface="Calibri" pitchFamily="34" charset="-122"/>
-                <a:cs typeface="Calibri" pitchFamily="34" charset="-120"/>
-              </a:rPr>
-              <a:t>NSR   ROC 0.84 / F1 0.78</a:t>
-            </a:r>
-            <a:endParaRPr lang="en-US" sz="1200" dirty="0"/>
-          </a:p>
-        </p:txBody>
-      </p:sp>
-      <p:sp>
-        <p:nvSpPr>
-          <p:cNvPr id="15" name="Text 13"/>
-          <p:cNvSpPr/>
-          <p:nvPr/>
-        </p:nvSpPr>
-        <p:spPr>
-          <a:xfrm>
-            <a:off x="6675120" y="3520440"/>
-            <a:ext cx="4663440" cy="274320"/>
-          </a:xfrm>
-          <a:prstGeom prst="rect">
-            <a:avLst/>
-          </a:prstGeom>
-          <a:noFill/>
-          <a:ln/>
-        </p:spPr>
-        <p:txBody>
-          <a:bodyPr wrap="square" lIns="0" tIns="0" rIns="0" bIns="0" rtlCol="0" anchor="ctr"/>
-          <a:lstStyle/>
-          <a:p>
-            <a:pPr indent="0" marL="0">
-              <a:buNone/>
-            </a:pPr>
-            <a:r>
-              <a:rPr lang="en-US" sz="1100" b="1" i="1" dirty="0">
-                <a:solidFill>
-                  <a:srgbClr val="1C7293"/>
-                </a:solidFill>
-                <a:latin typeface="Calibri" pitchFamily="34" charset="0"/>
-                <a:ea typeface="Calibri" pitchFamily="34" charset="-122"/>
-                <a:cs typeface="Calibri" pitchFamily="34" charset="-120"/>
-              </a:rPr>
-              <a:t>NEVER trained on MIT-BIH (transfer)</a:t>
-            </a:r>
-            <a:endParaRPr lang="en-US" sz="1100" dirty="0"/>
-          </a:p>
-        </p:txBody>
-      </p:sp>
-      <p:sp>
-        <p:nvSpPr>
-          <p:cNvPr id="16" name="Shape 14"/>
-          <p:cNvSpPr/>
-          <p:nvPr/>
-        </p:nvSpPr>
-        <p:spPr>
-          <a:xfrm>
-            <a:off x="548640" y="4160520"/>
-            <a:ext cx="11064240" cy="1828800"/>
-          </a:xfrm>
-          <a:prstGeom prst="rect">
-            <a:avLst/>
-          </a:prstGeom>
-          <a:solidFill>
-            <a:srgbClr val="FBF3E2"/>
-          </a:solidFill>
-          <a:ln w="19050">
-            <a:solidFill>
-              <a:srgbClr val="C8862A"/>
-            </a:solidFill>
-            <a:prstDash val="solid"/>
-          </a:ln>
-        </p:spPr>
-      </p:sp>
-      <p:sp>
-        <p:nvSpPr>
-          <p:cNvPr id="17" name="Shape 15"/>
-          <p:cNvSpPr/>
-          <p:nvPr/>
-        </p:nvSpPr>
-        <p:spPr>
-          <a:xfrm>
-            <a:off x="548640" y="4160520"/>
-            <a:ext cx="118872" cy="1828800"/>
-          </a:xfrm>
-          <a:prstGeom prst="rect">
-            <a:avLst/>
-          </a:prstGeom>
-          <a:solidFill>
-            <a:srgbClr val="C8862A"/>
-          </a:solidFill>
-          <a:ln/>
-        </p:spPr>
-      </p:sp>
-      <p:sp>
-        <p:nvSpPr>
-          <p:cNvPr id="18" name="Text 16"/>
-          <p:cNvSpPr/>
-          <p:nvPr/>
-        </p:nvSpPr>
-        <p:spPr>
-          <a:xfrm>
-            <a:off x="868680" y="4297680"/>
-            <a:ext cx="10607040" cy="365760"/>
-          </a:xfrm>
-          <a:prstGeom prst="rect">
-            <a:avLst/>
-          </a:prstGeom>
-          <a:noFill/>
-          <a:ln/>
-        </p:spPr>
-        <p:txBody>
-          <a:bodyPr wrap="square" lIns="0" tIns="0" rIns="0" bIns="0" rtlCol="0" anchor="ctr"/>
-          <a:lstStyle/>
-          <a:p>
-            <a:pPr indent="0" marL="0">
-              <a:buNone/>
-            </a:pPr>
-            <a:r>
-              <a:rPr lang="en-US" sz="1600" b="1" dirty="0">
-                <a:solidFill>
-                  <a:srgbClr val="8A5E16"/>
-                </a:solidFill>
-                <a:latin typeface="Georgia" pitchFamily="34" charset="0"/>
-                <a:ea typeface="Georgia" pitchFamily="34" charset="-122"/>
-                <a:cs typeface="Georgia" pitchFamily="34" charset="-120"/>
-              </a:rPr>
-              <a:t>Not 'Stanford beats ECGFounder'</a:t>
-            </a:r>
-            <a:endParaRPr lang="en-US" sz="1600" dirty="0"/>
-          </a:p>
-        </p:txBody>
-      </p:sp>
-      <p:sp>
-        <p:nvSpPr>
-          <p:cNvPr id="19" name="Text 17"/>
-          <p:cNvSpPr/>
-          <p:nvPr/>
-        </p:nvSpPr>
-        <p:spPr>
-          <a:xfrm>
-            <a:off x="868680" y="4709160"/>
-            <a:ext cx="10515600" cy="1188720"/>
-          </a:xfrm>
-          <a:prstGeom prst="rect">
-            <a:avLst/>
-          </a:prstGeom>
-          <a:noFill/>
-          <a:ln/>
-        </p:spPr>
-        <p:txBody>
-          <a:bodyPr wrap="square" lIns="0" tIns="0" rIns="0" bIns="0" rtlCol="0" anchor="ctr"/>
-          <a:lstStyle/>
-          <a:p>
-            <a:pPr indent="0" marL="0">
-              <a:lnSpc>
-                <a:spcPct val="115000"/>
-              </a:lnSpc>
-              <a:buNone/>
-            </a:pPr>
-            <a:r>
-              <a:rPr lang="en-US" sz="1250" dirty="0">
-                <a:solidFill>
-                  <a:srgbClr val="1A2233"/>
-                </a:solidFill>
-                <a:latin typeface="Calibri" pitchFamily="34" charset="0"/>
-                <a:ea typeface="Calibri" pitchFamily="34" charset="-122"/>
-                <a:cs typeface="Calibri" pitchFamily="34" charset="-120"/>
-              </a:rPr>
-              <a:t>Stanford was trained ON MIT-BIH, so ~100% on a held-out split of the same (97% SINUS) dataset is in-distribution fit. ECGFounder's numbers are zero-shot transfer to an unseen dataset. Label spaces (4 exclusive vs 150 multi-label) and granularity (per-segment vs per-record) also differ.</a:t>
-            </a:r>
-            <a:endParaRPr lang="en-US" sz="1250" dirty="0"/>
+              <a:t>Stanford ties one model to one dataset's labels (retrain or hand-map per DB); ECGFounder's fixed vocabulary + centralized mapping is the foundation-model advantage for multi-dataset work.</a:t>
+            </a:r>
+            <a:endParaRPr lang="en-US" sz="1350" dirty="0"/>
           </a:p>
         </p:txBody>
       </p:sp>
@@ -4880,6 +5015,730 @@
 <file path=ppt/slides/slide6.xml><?xml version="1.0" encoding="utf-8"?>
 <p:sld xmlns:a="http://schemas.openxmlformats.org/drawingml/2006/main" xmlns:r="http://schemas.openxmlformats.org/officeDocument/2006/relationships" xmlns:p="http://schemas.openxmlformats.org/presentationml/2006/main">
   <p:cSld name="Slide 6">
+    <p:bg>
+      <p:bgPr>
+        <a:solidFill>
+          <a:srgbClr val="FFFFFF"/>
+        </a:solidFill>
+      </p:bgPr>
+    </p:bg>
+    <p:spTree>
+      <p:nvGrpSpPr>
+        <p:cNvPr id="1" name=""/>
+        <p:cNvGrpSpPr/>
+        <p:nvPr/>
+      </p:nvGrpSpPr>
+      <p:grpSpPr>
+        <a:xfrm>
+          <a:off x="0" y="0"/>
+          <a:ext cx="0" cy="0"/>
+          <a:chOff x="0" y="0"/>
+          <a:chExt cx="0" cy="0"/>
+        </a:xfrm>
+      </p:grpSpPr>
+      <p:sp>
+        <p:nvSpPr>
+          <p:cNvPr id="2" name="Text 0"/>
+          <p:cNvSpPr/>
+          <p:nvPr/>
+        </p:nvSpPr>
+        <p:spPr>
+          <a:xfrm>
+            <a:off x="548640" y="384048"/>
+            <a:ext cx="11064240" cy="274320"/>
+          </a:xfrm>
+          <a:prstGeom prst="rect">
+            <a:avLst/>
+          </a:prstGeom>
+          <a:noFill/>
+          <a:ln/>
+        </p:spPr>
+        <p:txBody>
+          <a:bodyPr wrap="square" lIns="0" tIns="0" rIns="0" bIns="0" rtlCol="0" anchor="ctr"/>
+          <a:lstStyle/>
+          <a:p>
+            <a:pPr indent="0" marL="0">
+              <a:buNone/>
+            </a:pPr>
+            <a:r>
+              <a:rPr lang="en-US" sz="1200" b="1" spc="300" kern="0" dirty="0">
+                <a:solidFill>
+                  <a:srgbClr val="065A82"/>
+                </a:solidFill>
+                <a:latin typeface="Calibri" pitchFamily="34" charset="0"/>
+                <a:ea typeface="Calibri" pitchFamily="34" charset="-122"/>
+                <a:cs typeface="Calibri" pitchFamily="34" charset="-120"/>
+              </a:rPr>
+              <a:t>BOTH RUN ON MIT-BIH, IN DIFFERENT SETTINGS</a:t>
+            </a:r>
+            <a:endParaRPr lang="en-US" sz="1200" dirty="0"/>
+          </a:p>
+        </p:txBody>
+      </p:sp>
+      <p:sp>
+        <p:nvSpPr>
+          <p:cNvPr id="3" name="Text 1"/>
+          <p:cNvSpPr/>
+          <p:nvPr/>
+        </p:nvSpPr>
+        <p:spPr>
+          <a:xfrm>
+            <a:off x="548640" y="640080"/>
+            <a:ext cx="11064240" cy="731520"/>
+          </a:xfrm>
+          <a:prstGeom prst="rect">
+            <a:avLst/>
+          </a:prstGeom>
+          <a:noFill/>
+          <a:ln/>
+        </p:spPr>
+        <p:txBody>
+          <a:bodyPr wrap="square" lIns="0" tIns="0" rIns="0" bIns="0" rtlCol="0" anchor="ctr"/>
+          <a:lstStyle/>
+          <a:p>
+            <a:pPr indent="0" marL="0">
+              <a:buNone/>
+            </a:pPr>
+            <a:r>
+              <a:rPr lang="en-US" sz="3000" b="1" dirty="0">
+                <a:solidFill>
+                  <a:srgbClr val="1A2233"/>
+                </a:solidFill>
+                <a:latin typeface="Georgia" pitchFamily="34" charset="0"/>
+                <a:ea typeface="Georgia" pitchFamily="34" charset="-122"/>
+                <a:cs typeface="Georgia" pitchFamily="34" charset="-120"/>
+              </a:rPr>
+              <a:t>Head-to-head: MIT-BIH</a:t>
+            </a:r>
+            <a:endParaRPr lang="en-US" sz="3000" dirty="0"/>
+          </a:p>
+        </p:txBody>
+      </p:sp>
+      <p:sp>
+        <p:nvSpPr>
+          <p:cNvPr id="4" name="Shape 2"/>
+          <p:cNvSpPr/>
+          <p:nvPr/>
+        </p:nvSpPr>
+        <p:spPr>
+          <a:xfrm>
+            <a:off x="548640" y="1691640"/>
+            <a:ext cx="5257800" cy="2148840"/>
+          </a:xfrm>
+          <a:prstGeom prst="rect">
+            <a:avLst/>
+          </a:prstGeom>
+          <a:solidFill>
+            <a:srgbClr val="F4F7FA"/>
+          </a:solidFill>
+          <a:ln w="12700">
+            <a:solidFill>
+              <a:srgbClr val="D6DEE6"/>
+            </a:solidFill>
+            <a:prstDash val="solid"/>
+          </a:ln>
+        </p:spPr>
+      </p:sp>
+      <p:sp>
+        <p:nvSpPr>
+          <p:cNvPr id="5" name="Shape 3"/>
+          <p:cNvSpPr/>
+          <p:nvPr/>
+        </p:nvSpPr>
+        <p:spPr>
+          <a:xfrm>
+            <a:off x="548640" y="1691640"/>
+            <a:ext cx="5257800" cy="118872"/>
+          </a:xfrm>
+          <a:prstGeom prst="rect">
+            <a:avLst/>
+          </a:prstGeom>
+          <a:solidFill>
+            <a:srgbClr val="065A82"/>
+          </a:solidFill>
+          <a:ln/>
+        </p:spPr>
+      </p:sp>
+      <p:sp>
+        <p:nvSpPr>
+          <p:cNvPr id="6" name="Text 4"/>
+          <p:cNvSpPr/>
+          <p:nvPr/>
+        </p:nvSpPr>
+        <p:spPr>
+          <a:xfrm>
+            <a:off x="868680" y="1874520"/>
+            <a:ext cx="4663440" cy="365760"/>
+          </a:xfrm>
+          <a:prstGeom prst="rect">
+            <a:avLst/>
+          </a:prstGeom>
+          <a:noFill/>
+          <a:ln/>
+        </p:spPr>
+        <p:txBody>
+          <a:bodyPr wrap="square" lIns="0" tIns="0" rIns="0" bIns="0" rtlCol="0" anchor="ctr"/>
+          <a:lstStyle/>
+          <a:p>
+            <a:pPr indent="0" marL="0">
+              <a:buNone/>
+            </a:pPr>
+            <a:r>
+              <a:rPr lang="en-US" sz="1600" b="1" dirty="0">
+                <a:solidFill>
+                  <a:srgbClr val="065A82"/>
+                </a:solidFill>
+                <a:latin typeface="Georgia" pitchFamily="34" charset="0"/>
+                <a:ea typeface="Georgia" pitchFamily="34" charset="-122"/>
+                <a:cs typeface="Georgia" pitchFamily="34" charset="-120"/>
+              </a:rPr>
+              <a:t>Stanford 1D-ResNet</a:t>
+            </a:r>
+            <a:endParaRPr lang="en-US" sz="1600" dirty="0"/>
+          </a:p>
+        </p:txBody>
+      </p:sp>
+      <p:sp>
+        <p:nvSpPr>
+          <p:cNvPr id="7" name="Text 5"/>
+          <p:cNvSpPr/>
+          <p:nvPr/>
+        </p:nvSpPr>
+        <p:spPr>
+          <a:xfrm>
+            <a:off x="822960" y="2240280"/>
+            <a:ext cx="2011680" cy="1005840"/>
+          </a:xfrm>
+          <a:prstGeom prst="rect">
+            <a:avLst/>
+          </a:prstGeom>
+          <a:noFill/>
+          <a:ln/>
+        </p:spPr>
+        <p:txBody>
+          <a:bodyPr wrap="square" lIns="0" tIns="0" rIns="0" bIns="0" rtlCol="0" anchor="ctr"/>
+          <a:lstStyle/>
+          <a:p>
+            <a:pPr indent="0" marL="0">
+              <a:buNone/>
+            </a:pPr>
+            <a:r>
+              <a:rPr lang="en-US" sz="4400" b="1" dirty="0">
+                <a:solidFill>
+                  <a:srgbClr val="1A2233"/>
+                </a:solidFill>
+                <a:latin typeface="Georgia" pitchFamily="34" charset="0"/>
+                <a:ea typeface="Georgia" pitchFamily="34" charset="-122"/>
+                <a:cs typeface="Georgia" pitchFamily="34" charset="-120"/>
+              </a:rPr>
+              <a:t>~1.00</a:t>
+            </a:r>
+            <a:endParaRPr lang="en-US" sz="4400" dirty="0"/>
+          </a:p>
+        </p:txBody>
+      </p:sp>
+      <p:sp>
+        <p:nvSpPr>
+          <p:cNvPr id="8" name="Text 6"/>
+          <p:cNvSpPr/>
+          <p:nvPr/>
+        </p:nvSpPr>
+        <p:spPr>
+          <a:xfrm>
+            <a:off x="2880360" y="2258568"/>
+            <a:ext cx="2743200" cy="1325880"/>
+          </a:xfrm>
+          <a:prstGeom prst="rect">
+            <a:avLst/>
+          </a:prstGeom>
+          <a:noFill/>
+          <a:ln/>
+        </p:spPr>
+        <p:txBody>
+          <a:bodyPr wrap="square" lIns="0" tIns="0" rIns="0" bIns="0" rtlCol="0" anchor="ctr"/>
+          <a:lstStyle/>
+          <a:p>
+            <a:pPr indent="0" marL="0">
+              <a:lnSpc>
+                <a:spcPct val="115000"/>
+              </a:lnSpc>
+              <a:buNone/>
+            </a:pPr>
+            <a:r>
+              <a:rPr lang="en-US" sz="1200" dirty="0">
+                <a:solidFill>
+                  <a:srgbClr val="1A2233"/>
+                </a:solidFill>
+                <a:latin typeface="Calibri" pitchFamily="34" charset="0"/>
+                <a:ea typeface="Calibri" pitchFamily="34" charset="-122"/>
+                <a:cs typeface="Calibri" pitchFamily="34" charset="-120"/>
+              </a:rPr>
+              <a:t>accuracy on dev_split</a:t>
+            </a:r>
+            <a:endParaRPr lang="en-US" sz="1200" dirty="0"/>
+          </a:p>
+          <a:p>
+            <a:pPr indent="0" marL="0">
+              <a:lnSpc>
+                <a:spcPct val="115000"/>
+              </a:lnSpc>
+              <a:buNone/>
+            </a:pPr>
+            <a:r>
+              <a:rPr lang="en-US" sz="1200" dirty="0">
+                <a:solidFill>
+                  <a:srgbClr val="1A2233"/>
+                </a:solidFill>
+                <a:latin typeface="Calibri" pitchFamily="34" charset="0"/>
+                <a:ea typeface="Calibri" pitchFamily="34" charset="-122"/>
+                <a:cs typeface="Calibri" pitchFamily="34" charset="-120"/>
+              </a:rPr>
+              <a:t>SINUS F1 1.00 (n=1597)</a:t>
+            </a:r>
+            <a:endParaRPr lang="en-US" sz="1200" dirty="0"/>
+          </a:p>
+          <a:p>
+            <a:pPr indent="0" marL="0">
+              <a:lnSpc>
+                <a:spcPct val="115000"/>
+              </a:lnSpc>
+              <a:buNone/>
+            </a:pPr>
+            <a:r>
+              <a:rPr lang="en-US" sz="1200" dirty="0">
+                <a:solidFill>
+                  <a:srgbClr val="1A2233"/>
+                </a:solidFill>
+                <a:latin typeface="Calibri" pitchFamily="34" charset="0"/>
+                <a:ea typeface="Calibri" pitchFamily="34" charset="-122"/>
+                <a:cs typeface="Calibri" pitchFamily="34" charset="-120"/>
+              </a:rPr>
+              <a:t>BIGEMINY F1 0.96 (n=41)</a:t>
+            </a:r>
+            <a:endParaRPr lang="en-US" sz="1200" dirty="0"/>
+          </a:p>
+        </p:txBody>
+      </p:sp>
+      <p:sp>
+        <p:nvSpPr>
+          <p:cNvPr id="9" name="Text 7"/>
+          <p:cNvSpPr/>
+          <p:nvPr/>
+        </p:nvSpPr>
+        <p:spPr>
+          <a:xfrm>
+            <a:off x="868680" y="3520440"/>
+            <a:ext cx="4663440" cy="274320"/>
+          </a:xfrm>
+          <a:prstGeom prst="rect">
+            <a:avLst/>
+          </a:prstGeom>
+          <a:noFill/>
+          <a:ln/>
+        </p:spPr>
+        <p:txBody>
+          <a:bodyPr wrap="square" lIns="0" tIns="0" rIns="0" bIns="0" rtlCol="0" anchor="ctr"/>
+          <a:lstStyle/>
+          <a:p>
+            <a:pPr indent="0" marL="0">
+              <a:buNone/>
+            </a:pPr>
+            <a:r>
+              <a:rPr lang="en-US" sz="1100" b="1" i="1" dirty="0">
+                <a:solidFill>
+                  <a:srgbClr val="065A82"/>
+                </a:solidFill>
+                <a:latin typeface="Calibri" pitchFamily="34" charset="0"/>
+                <a:ea typeface="Calibri" pitchFamily="34" charset="-122"/>
+                <a:cs typeface="Calibri" pitchFamily="34" charset="-120"/>
+              </a:rPr>
+              <a:t>TRAINED ON MIT-BIH (in-distribution)</a:t>
+            </a:r>
+            <a:endParaRPr lang="en-US" sz="1100" dirty="0"/>
+          </a:p>
+        </p:txBody>
+      </p:sp>
+      <p:sp>
+        <p:nvSpPr>
+          <p:cNvPr id="10" name="Shape 8"/>
+          <p:cNvSpPr/>
+          <p:nvPr/>
+        </p:nvSpPr>
+        <p:spPr>
+          <a:xfrm>
+            <a:off x="6355080" y="1691640"/>
+            <a:ext cx="5257800" cy="2148840"/>
+          </a:xfrm>
+          <a:prstGeom prst="rect">
+            <a:avLst/>
+          </a:prstGeom>
+          <a:solidFill>
+            <a:srgbClr val="F4F7FA"/>
+          </a:solidFill>
+          <a:ln w="12700">
+            <a:solidFill>
+              <a:srgbClr val="D6DEE6"/>
+            </a:solidFill>
+            <a:prstDash val="solid"/>
+          </a:ln>
+        </p:spPr>
+      </p:sp>
+      <p:sp>
+        <p:nvSpPr>
+          <p:cNvPr id="11" name="Shape 9"/>
+          <p:cNvSpPr/>
+          <p:nvPr/>
+        </p:nvSpPr>
+        <p:spPr>
+          <a:xfrm>
+            <a:off x="6355080" y="1691640"/>
+            <a:ext cx="5257800" cy="118872"/>
+          </a:xfrm>
+          <a:prstGeom prst="rect">
+            <a:avLst/>
+          </a:prstGeom>
+          <a:solidFill>
+            <a:srgbClr val="1C7293"/>
+          </a:solidFill>
+          <a:ln/>
+        </p:spPr>
+      </p:sp>
+      <p:sp>
+        <p:nvSpPr>
+          <p:cNvPr id="12" name="Text 10"/>
+          <p:cNvSpPr/>
+          <p:nvPr/>
+        </p:nvSpPr>
+        <p:spPr>
+          <a:xfrm>
+            <a:off x="6675120" y="1874520"/>
+            <a:ext cx="4663440" cy="365760"/>
+          </a:xfrm>
+          <a:prstGeom prst="rect">
+            <a:avLst/>
+          </a:prstGeom>
+          <a:noFill/>
+          <a:ln/>
+        </p:spPr>
+        <p:txBody>
+          <a:bodyPr wrap="square" lIns="0" tIns="0" rIns="0" bIns="0" rtlCol="0" anchor="ctr"/>
+          <a:lstStyle/>
+          <a:p>
+            <a:pPr indent="0" marL="0">
+              <a:buNone/>
+            </a:pPr>
+            <a:r>
+              <a:rPr lang="en-US" sz="1600" b="1" dirty="0">
+                <a:solidFill>
+                  <a:srgbClr val="1C7293"/>
+                </a:solidFill>
+                <a:latin typeface="Georgia" pitchFamily="34" charset="0"/>
+                <a:ea typeface="Georgia" pitchFamily="34" charset="-122"/>
+                <a:cs typeface="Georgia" pitchFamily="34" charset="-120"/>
+              </a:rPr>
+              <a:t>ECGFounder (zero-shot)</a:t>
+            </a:r>
+            <a:endParaRPr lang="en-US" sz="1600" dirty="0"/>
+          </a:p>
+        </p:txBody>
+      </p:sp>
+      <p:sp>
+        <p:nvSpPr>
+          <p:cNvPr id="13" name="Text 11"/>
+          <p:cNvSpPr/>
+          <p:nvPr/>
+        </p:nvSpPr>
+        <p:spPr>
+          <a:xfrm>
+            <a:off x="6629400" y="2240280"/>
+            <a:ext cx="2011680" cy="1005840"/>
+          </a:xfrm>
+          <a:prstGeom prst="rect">
+            <a:avLst/>
+          </a:prstGeom>
+          <a:noFill/>
+          <a:ln/>
+        </p:spPr>
+        <p:txBody>
+          <a:bodyPr wrap="square" lIns="0" tIns="0" rIns="0" bIns="0" rtlCol="0" anchor="ctr"/>
+          <a:lstStyle/>
+          <a:p>
+            <a:pPr indent="0" marL="0">
+              <a:buNone/>
+            </a:pPr>
+            <a:r>
+              <a:rPr lang="en-US" sz="4400" b="1" dirty="0">
+                <a:solidFill>
+                  <a:srgbClr val="1A2233"/>
+                </a:solidFill>
+                <a:latin typeface="Georgia" pitchFamily="34" charset="0"/>
+                <a:ea typeface="Georgia" pitchFamily="34" charset="-122"/>
+                <a:cs typeface="Georgia" pitchFamily="34" charset="-120"/>
+              </a:rPr>
+              <a:t>0.95</a:t>
+            </a:r>
+            <a:endParaRPr lang="en-US" sz="4400" dirty="0"/>
+          </a:p>
+        </p:txBody>
+      </p:sp>
+      <p:sp>
+        <p:nvSpPr>
+          <p:cNvPr id="14" name="Text 12"/>
+          <p:cNvSpPr/>
+          <p:nvPr/>
+        </p:nvSpPr>
+        <p:spPr>
+          <a:xfrm>
+            <a:off x="8686800" y="2258568"/>
+            <a:ext cx="2743200" cy="1325880"/>
+          </a:xfrm>
+          <a:prstGeom prst="rect">
+            <a:avLst/>
+          </a:prstGeom>
+          <a:noFill/>
+          <a:ln/>
+        </p:spPr>
+        <p:txBody>
+          <a:bodyPr wrap="square" lIns="0" tIns="0" rIns="0" bIns="0" rtlCol="0" anchor="ctr"/>
+          <a:lstStyle/>
+          <a:p>
+            <a:pPr indent="0" marL="0">
+              <a:lnSpc>
+                <a:spcPct val="115000"/>
+              </a:lnSpc>
+              <a:buNone/>
+            </a:pPr>
+            <a:r>
+              <a:rPr lang="en-US" sz="1200" dirty="0">
+                <a:solidFill>
+                  <a:srgbClr val="1A2233"/>
+                </a:solidFill>
+                <a:latin typeface="Calibri" pitchFamily="34" charset="0"/>
+                <a:ea typeface="Calibri" pitchFamily="34" charset="-122"/>
+                <a:cs typeface="Calibri" pitchFamily="34" charset="-120"/>
+              </a:rPr>
+              <a:t>AFib  ROC 0.95 / F1 0.86</a:t>
+            </a:r>
+            <a:endParaRPr lang="en-US" sz="1200" dirty="0"/>
+          </a:p>
+          <a:p>
+            <a:pPr indent="0" marL="0">
+              <a:lnSpc>
+                <a:spcPct val="115000"/>
+              </a:lnSpc>
+              <a:buNone/>
+            </a:pPr>
+            <a:r>
+              <a:rPr lang="en-US" sz="1200" dirty="0">
+                <a:solidFill>
+                  <a:srgbClr val="1A2233"/>
+                </a:solidFill>
+                <a:latin typeface="Calibri" pitchFamily="34" charset="0"/>
+                <a:ea typeface="Calibri" pitchFamily="34" charset="-122"/>
+                <a:cs typeface="Calibri" pitchFamily="34" charset="-120"/>
+              </a:rPr>
+              <a:t>PVC   ROC 0.94 / F1 0.72</a:t>
+            </a:r>
+            <a:endParaRPr lang="en-US" sz="1200" dirty="0"/>
+          </a:p>
+          <a:p>
+            <a:pPr indent="0" marL="0">
+              <a:lnSpc>
+                <a:spcPct val="115000"/>
+              </a:lnSpc>
+              <a:buNone/>
+            </a:pPr>
+            <a:r>
+              <a:rPr lang="en-US" sz="1200" dirty="0">
+                <a:solidFill>
+                  <a:srgbClr val="1A2233"/>
+                </a:solidFill>
+                <a:latin typeface="Calibri" pitchFamily="34" charset="0"/>
+                <a:ea typeface="Calibri" pitchFamily="34" charset="-122"/>
+                <a:cs typeface="Calibri" pitchFamily="34" charset="-120"/>
+              </a:rPr>
+              <a:t>NSR   ROC 0.84 / F1 0.78</a:t>
+            </a:r>
+            <a:endParaRPr lang="en-US" sz="1200" dirty="0"/>
+          </a:p>
+        </p:txBody>
+      </p:sp>
+      <p:sp>
+        <p:nvSpPr>
+          <p:cNvPr id="15" name="Text 13"/>
+          <p:cNvSpPr/>
+          <p:nvPr/>
+        </p:nvSpPr>
+        <p:spPr>
+          <a:xfrm>
+            <a:off x="6675120" y="3520440"/>
+            <a:ext cx="4663440" cy="274320"/>
+          </a:xfrm>
+          <a:prstGeom prst="rect">
+            <a:avLst/>
+          </a:prstGeom>
+          <a:noFill/>
+          <a:ln/>
+        </p:spPr>
+        <p:txBody>
+          <a:bodyPr wrap="square" lIns="0" tIns="0" rIns="0" bIns="0" rtlCol="0" anchor="ctr"/>
+          <a:lstStyle/>
+          <a:p>
+            <a:pPr indent="0" marL="0">
+              <a:buNone/>
+            </a:pPr>
+            <a:r>
+              <a:rPr lang="en-US" sz="1100" b="1" i="1" dirty="0">
+                <a:solidFill>
+                  <a:srgbClr val="1C7293"/>
+                </a:solidFill>
+                <a:latin typeface="Calibri" pitchFamily="34" charset="0"/>
+                <a:ea typeface="Calibri" pitchFamily="34" charset="-122"/>
+                <a:cs typeface="Calibri" pitchFamily="34" charset="-120"/>
+              </a:rPr>
+              <a:t>NEVER trained on MIT-BIH (transfer)</a:t>
+            </a:r>
+            <a:endParaRPr lang="en-US" sz="1100" dirty="0"/>
+          </a:p>
+        </p:txBody>
+      </p:sp>
+      <p:sp>
+        <p:nvSpPr>
+          <p:cNvPr id="16" name="Shape 14"/>
+          <p:cNvSpPr/>
+          <p:nvPr/>
+        </p:nvSpPr>
+        <p:spPr>
+          <a:xfrm>
+            <a:off x="548640" y="4160520"/>
+            <a:ext cx="11064240" cy="1828800"/>
+          </a:xfrm>
+          <a:prstGeom prst="rect">
+            <a:avLst/>
+          </a:prstGeom>
+          <a:solidFill>
+            <a:srgbClr val="FBF3E2"/>
+          </a:solidFill>
+          <a:ln w="19050">
+            <a:solidFill>
+              <a:srgbClr val="C8862A"/>
+            </a:solidFill>
+            <a:prstDash val="solid"/>
+          </a:ln>
+        </p:spPr>
+      </p:sp>
+      <p:sp>
+        <p:nvSpPr>
+          <p:cNvPr id="17" name="Shape 15"/>
+          <p:cNvSpPr/>
+          <p:nvPr/>
+        </p:nvSpPr>
+        <p:spPr>
+          <a:xfrm>
+            <a:off x="548640" y="4160520"/>
+            <a:ext cx="118872" cy="1828800"/>
+          </a:xfrm>
+          <a:prstGeom prst="rect">
+            <a:avLst/>
+          </a:prstGeom>
+          <a:solidFill>
+            <a:srgbClr val="C8862A"/>
+          </a:solidFill>
+          <a:ln/>
+        </p:spPr>
+      </p:sp>
+      <p:sp>
+        <p:nvSpPr>
+          <p:cNvPr id="18" name="Text 16"/>
+          <p:cNvSpPr/>
+          <p:nvPr/>
+        </p:nvSpPr>
+        <p:spPr>
+          <a:xfrm>
+            <a:off x="868680" y="4297680"/>
+            <a:ext cx="10607040" cy="365760"/>
+          </a:xfrm>
+          <a:prstGeom prst="rect">
+            <a:avLst/>
+          </a:prstGeom>
+          <a:noFill/>
+          <a:ln/>
+        </p:spPr>
+        <p:txBody>
+          <a:bodyPr wrap="square" lIns="0" tIns="0" rIns="0" bIns="0" rtlCol="0" anchor="ctr"/>
+          <a:lstStyle/>
+          <a:p>
+            <a:pPr indent="0" marL="0">
+              <a:buNone/>
+            </a:pPr>
+            <a:r>
+              <a:rPr lang="en-US" sz="1600" b="1" dirty="0">
+                <a:solidFill>
+                  <a:srgbClr val="8A5E16"/>
+                </a:solidFill>
+                <a:latin typeface="Georgia" pitchFamily="34" charset="0"/>
+                <a:ea typeface="Georgia" pitchFamily="34" charset="-122"/>
+                <a:cs typeface="Georgia" pitchFamily="34" charset="-120"/>
+              </a:rPr>
+              <a:t>Not 'Stanford beats ECGFounder'</a:t>
+            </a:r>
+            <a:endParaRPr lang="en-US" sz="1600" dirty="0"/>
+          </a:p>
+        </p:txBody>
+      </p:sp>
+      <p:sp>
+        <p:nvSpPr>
+          <p:cNvPr id="19" name="Text 17"/>
+          <p:cNvSpPr/>
+          <p:nvPr/>
+        </p:nvSpPr>
+        <p:spPr>
+          <a:xfrm>
+            <a:off x="868680" y="4709160"/>
+            <a:ext cx="10515600" cy="1188720"/>
+          </a:xfrm>
+          <a:prstGeom prst="rect">
+            <a:avLst/>
+          </a:prstGeom>
+          <a:noFill/>
+          <a:ln/>
+        </p:spPr>
+        <p:txBody>
+          <a:bodyPr wrap="square" lIns="0" tIns="0" rIns="0" bIns="0" rtlCol="0" anchor="ctr"/>
+          <a:lstStyle/>
+          <a:p>
+            <a:pPr indent="0" marL="0">
+              <a:lnSpc>
+                <a:spcPct val="115000"/>
+              </a:lnSpc>
+              <a:buNone/>
+            </a:pPr>
+            <a:r>
+              <a:rPr lang="en-US" sz="1250" dirty="0">
+                <a:solidFill>
+                  <a:srgbClr val="1A2233"/>
+                </a:solidFill>
+                <a:latin typeface="Calibri" pitchFamily="34" charset="0"/>
+                <a:ea typeface="Calibri" pitchFamily="34" charset="-122"/>
+                <a:cs typeface="Calibri" pitchFamily="34" charset="-120"/>
+              </a:rPr>
+              <a:t>Stanford was trained ON MIT-BIH, so ~100% on a held-out split of the same (97% SINUS) dataset is in-distribution fit. ECGFounder's numbers are zero-shot transfer to an unseen dataset. Label spaces (4 exclusive vs 150 multi-label) and granularity (per-segment vs per-record) also differ.</a:t>
+            </a:r>
+            <a:endParaRPr lang="en-US" sz="1250" dirty="0"/>
+          </a:p>
+        </p:txBody>
+      </p:sp>
+    </p:spTree>
+  </p:cSld>
+  <p:clrMapOvr>
+    <a:masterClrMapping/>
+  </p:clrMapOvr>
+</p:sld>
+</file>
+
+<file path=ppt/slides/slide7.xml><?xml version="1.0" encoding="utf-8"?>
+<p:sld xmlns:a="http://schemas.openxmlformats.org/drawingml/2006/main" xmlns:r="http://schemas.openxmlformats.org/officeDocument/2006/relationships" xmlns:p="http://schemas.openxmlformats.org/presentationml/2006/main">
+  <p:cSld name="Slide 7">
     <p:bg>
       <p:bgPr>
         <a:solidFill>

--- a/docs/Stanford_vs_ECGFounder_6page.pptx
+++ b/docs/Stanford_vs_ECGFounder_6page.pptx
@@ -12,9 +12,10 @@
     <p:sldId id="260" r:id="rId6"/>
     <p:sldId id="261" r:id="rId7"/>
     <p:sldId id="262" r:id="rId8"/>
+    <p:sldId id="263" r:id="rId9"/>
   </p:sldIdLst>
   <p:notesMasterIdLst>
-    <p:notesMasterId r:id="rId9"/>
+    <p:notesMasterId r:id="rId10"/>
   </p:notesMasterIdLst>
   <p:sldSz cx="12192000" cy="6858000"/>
   <p:notesSz cx="6858000" cy="12192000"/>
@@ -1060,6 +1061,94 @@
             <a:fld id="{F7021451-1387-4CA6-816F-3879F97B5CBC}" type="slidenum">
               <a:rPr lang="en-US"/>
               <a:t>7</a:t>
+            </a:fld>
+            <a:endParaRPr lang="en-US"/>
+          </a:p>
+        </p:txBody>
+      </p:sp>
+    </p:spTree>
+    <p:extLst>
+      <p:ext uri="{BB962C8B-B14F-4D97-AF65-F5344CB8AC3E}">
+        <p14:creationId xmlns:p14="http://schemas.microsoft.com/office/powerpoint/2010/main" val="1024086991"/>
+      </p:ext>
+    </p:extLst>
+  </p:cSld>
+  <p:clrMapOvr>
+    <a:masterClrMapping/>
+  </p:clrMapOvr>
+</p:notes>
+</file>
+
+<file path=ppt/notesSlides/notesSlide8.xml><?xml version="1.0" encoding="utf-8"?>
+<p:notes xmlns:a="http://schemas.openxmlformats.org/drawingml/2006/main" xmlns:r="http://schemas.openxmlformats.org/officeDocument/2006/relationships" xmlns:p="http://schemas.openxmlformats.org/presentationml/2006/main">
+  <p:cSld>
+    <p:spTree>
+      <p:nvGrpSpPr>
+        <p:cNvPr id="1" name=""/>
+        <p:cNvGrpSpPr/>
+        <p:nvPr/>
+      </p:nvGrpSpPr>
+      <p:grpSpPr>
+        <a:xfrm>
+          <a:off x="0" y="0"/>
+          <a:ext cx="0" cy="0"/>
+          <a:chOff x="0" y="0"/>
+          <a:chExt cx="0" cy="0"/>
+        </a:xfrm>
+      </p:grpSpPr>
+      <p:sp>
+        <p:nvSpPr>
+          <p:cNvPr id="2" name="Slide Image Placeholder 1"/>
+          <p:cNvSpPr>
+            <a:spLocks noGrp="1" noRot="1" noChangeAspect="1"/>
+          </p:cNvSpPr>
+          <p:nvPr>
+            <p:ph type="sldImg"/>
+          </p:nvPr>
+        </p:nvSpPr>
+        <p:spPr/>
+      </p:sp>
+      <p:sp>
+        <p:nvSpPr>
+          <p:cNvPr id="3" name="Notes Placeholder 2"/>
+          <p:cNvSpPr>
+            <a:spLocks noGrp="1"/>
+          </p:cNvSpPr>
+          <p:nvPr>
+            <p:ph type="body" idx="1"/>
+          </p:nvPr>
+        </p:nvSpPr>
+        <p:spPr/>
+        <p:txBody>
+          <a:bodyPr/>
+          <a:lstStyle/>
+          <a:p>
+            <a:r>
+              <a:rPr lang="en-US" dirty="0"/>
+              <a:t/>
+            </a:r>
+            <a:endParaRPr lang="en-US" dirty="0"/>
+          </a:p>
+        </p:txBody>
+      </p:sp>
+      <p:sp>
+        <p:nvSpPr>
+          <p:cNvPr id="4" name="Slide Number Placeholder 3"/>
+          <p:cNvSpPr>
+            <a:spLocks noGrp="1"/>
+          </p:cNvSpPr>
+          <p:nvPr>
+            <p:ph type="sldNum" sz="quarter" idx="10"/>
+          </p:nvPr>
+        </p:nvSpPr>
+        <p:spPr/>
+        <p:txBody>
+          <a:bodyPr/>
+          <a:lstStyle/>
+          <a:p>
+            <a:fld id="{F7021451-1387-4CA6-816F-3879F97B5CBC}" type="slidenum">
+              <a:rPr lang="en-US"/>
+              <a:t>8</a:t>
             </a:fld>
             <a:endParaRPr lang="en-US"/>
           </a:p>
@@ -1650,7 +1739,7 @@
                 <a:ea typeface="Calibri" pitchFamily="34" charset="-122"/>
                 <a:cs typeface="Calibri" pitchFamily="34" charset="-120"/>
               </a:rPr>
-              <a:t>TWO DIFFERENT PHILOSOPHIES</a:t>
+              <a:t>GROUNDED IN THE TWO SOURCE PAPERS</a:t>
             </a:r>
             <a:endParaRPr lang="en-US" sz="1200" dirty="0"/>
           </a:p>
@@ -1689,7 +1778,7 @@
                 <a:ea typeface="Georgia" pitchFamily="34" charset="-122"/>
                 <a:cs typeface="Georgia" pitchFamily="34" charset="-120"/>
               </a:rPr>
-              <a:t>What each model is</a:t>
+              <a:t>What the papers actually report</a:t>
             </a:r>
             <a:endParaRPr lang="en-US" sz="3000" dirty="0"/>
           </a:p>
@@ -1704,15 +1793,397 @@
         <p:spPr>
           <a:xfrm>
             <a:off x="548640" y="1691640"/>
-            <a:ext cx="5257800" cy="4480560"/>
+            <a:ext cx="5257800" cy="3611880"/>
           </a:xfrm>
           <a:prstGeom prst="rect">
             <a:avLst/>
           </a:prstGeom>
           <a:solidFill>
-            <a:srgbClr val="F4F7FA"/>
+            <a:srgbClr val="FFFFFF"/>
           </a:solidFill>
-          <a:ln w="12700">
+          <a:ln w="19050">
+            <a:solidFill>
+              <a:srgbClr val="065A82"/>
+            </a:solidFill>
+            <a:prstDash val="solid"/>
+          </a:ln>
+        </p:spPr>
+      </p:sp>
+      <p:sp>
+        <p:nvSpPr>
+          <p:cNvPr id="5" name="Text 3"/>
+          <p:cNvSpPr/>
+          <p:nvPr/>
+        </p:nvSpPr>
+        <p:spPr>
+          <a:xfrm>
+            <a:off x="868680" y="1874520"/>
+            <a:ext cx="4754880" cy="457200"/>
+          </a:xfrm>
+          <a:prstGeom prst="rect">
+            <a:avLst/>
+          </a:prstGeom>
+          <a:noFill/>
+          <a:ln/>
+        </p:spPr>
+        <p:txBody>
+          <a:bodyPr wrap="square" lIns="0" tIns="0" rIns="0" bIns="0" rtlCol="0" anchor="ctr"/>
+          <a:lstStyle/>
+          <a:p>
+            <a:pPr indent="0" marL="0">
+              <a:buNone/>
+            </a:pPr>
+            <a:r>
+              <a:rPr lang="en-US" sz="1650" b="1" dirty="0">
+                <a:solidFill>
+                  <a:srgbClr val="065A82"/>
+                </a:solidFill>
+                <a:latin typeface="Georgia" pitchFamily="34" charset="0"/>
+                <a:ea typeface="Georgia" pitchFamily="34" charset="-122"/>
+                <a:cs typeface="Georgia" pitchFamily="34" charset="-120"/>
+              </a:rPr>
+              <a:t>Hannun et al. - Nature Medicine 2019</a:t>
+            </a:r>
+            <a:endParaRPr lang="en-US" sz="1650" dirty="0"/>
+          </a:p>
+        </p:txBody>
+      </p:sp>
+      <p:sp>
+        <p:nvSpPr>
+          <p:cNvPr id="6" name="Text 4"/>
+          <p:cNvSpPr/>
+          <p:nvPr/>
+        </p:nvSpPr>
+        <p:spPr>
+          <a:xfrm>
+            <a:off x="868680" y="2423160"/>
+            <a:ext cx="4709160" cy="2697480"/>
+          </a:xfrm>
+          <a:prstGeom prst="rect">
+            <a:avLst/>
+          </a:prstGeom>
+          <a:noFill/>
+          <a:ln/>
+        </p:spPr>
+        <p:txBody>
+          <a:bodyPr wrap="square" lIns="0" tIns="0" rIns="0" bIns="0" rtlCol="0" anchor="ctr"/>
+          <a:lstStyle/>
+          <a:p>
+            <a:pPr marL="342900" indent="-342900">
+              <a:lnSpc>
+                <a:spcPct val="130000"/>
+              </a:lnSpc>
+              <a:buSzPct val="100000"/>
+              <a:buChar char="•"/>
+            </a:pPr>
+            <a:r>
+              <a:rPr lang="en-US" sz="1300" dirty="0">
+                <a:solidFill>
+                  <a:srgbClr val="1A2233"/>
+                </a:solidFill>
+                <a:latin typeface="Calibri" pitchFamily="34" charset="0"/>
+                <a:ea typeface="Calibri" pitchFamily="34" charset="-122"/>
+                <a:cs typeface="Calibri" pitchFamily="34" charset="-120"/>
+              </a:rPr>
+              <a:t>Hannun, Rajpurkar, ..., Ng (awni/ecg)</a:t>
+            </a:r>
+            <a:endParaRPr lang="en-US" sz="1300" dirty="0"/>
+          </a:p>
+          <a:p>
+            <a:pPr marL="342900" indent="-342900">
+              <a:lnSpc>
+                <a:spcPct val="130000"/>
+              </a:lnSpc>
+              <a:buSzPct val="100000"/>
+              <a:buChar char="•"/>
+            </a:pPr>
+            <a:r>
+              <a:rPr lang="en-US" sz="1300" dirty="0">
+                <a:solidFill>
+                  <a:srgbClr val="1A2233"/>
+                </a:solidFill>
+                <a:latin typeface="Calibri" pitchFamily="34" charset="0"/>
+                <a:ea typeface="Calibri" pitchFamily="34" charset="-122"/>
+                <a:cs typeface="Calibri" pitchFamily="34" charset="-120"/>
+              </a:rPr>
+              <a:t>91,232 records / 53,549 patients; Zio patch, 200 Hz</a:t>
+            </a:r>
+            <a:endParaRPr lang="en-US" sz="1300" dirty="0"/>
+          </a:p>
+          <a:p>
+            <a:pPr marL="342900" indent="-342900">
+              <a:lnSpc>
+                <a:spcPct val="130000"/>
+              </a:lnSpc>
+              <a:buSzPct val="100000"/>
+              <a:buChar char="•"/>
+            </a:pPr>
+            <a:r>
+              <a:rPr lang="en-US" sz="1300" dirty="0">
+                <a:solidFill>
+                  <a:srgbClr val="1A2233"/>
+                </a:solidFill>
+                <a:latin typeface="Calibri" pitchFamily="34" charset="0"/>
+                <a:ea typeface="Calibri" pitchFamily="34" charset="-122"/>
+                <a:cs typeface="Calibri" pitchFamily="34" charset="-120"/>
+              </a:rPr>
+              <a:t>12 rhythm classes; seq-to-seq, 1 label / 1.28 s</a:t>
+            </a:r>
+            <a:endParaRPr lang="en-US" sz="1300" dirty="0"/>
+          </a:p>
+          <a:p>
+            <a:pPr marL="342900" indent="-342900">
+              <a:lnSpc>
+                <a:spcPct val="130000"/>
+              </a:lnSpc>
+              <a:buSzPct val="100000"/>
+              <a:buChar char="•"/>
+            </a:pPr>
+            <a:r>
+              <a:rPr lang="en-US" sz="1300" dirty="0">
+                <a:solidFill>
+                  <a:srgbClr val="1A2233"/>
+                </a:solidFill>
+                <a:latin typeface="Calibri" pitchFamily="34" charset="0"/>
+                <a:ea typeface="Calibri" pitchFamily="34" charset="-122"/>
+                <a:cs typeface="Calibri" pitchFamily="34" charset="-120"/>
+              </a:rPr>
+              <a:t>AUC 0.97, F1 0.837 &gt; avg cardiologist 0.780</a:t>
+            </a:r>
+            <a:endParaRPr lang="en-US" sz="1300" dirty="0"/>
+          </a:p>
+          <a:p>
+            <a:pPr marL="342900" indent="-342900">
+              <a:lnSpc>
+                <a:spcPct val="130000"/>
+              </a:lnSpc>
+              <a:buSzPct val="100000"/>
+              <a:buChar char="•"/>
+            </a:pPr>
+            <a:r>
+              <a:rPr lang="en-US" sz="1300" dirty="0">
+                <a:solidFill>
+                  <a:srgbClr val="1A2233"/>
+                </a:solidFill>
+                <a:latin typeface="Calibri" pitchFamily="34" charset="0"/>
+                <a:ea typeface="Calibri" pitchFamily="34" charset="-122"/>
+                <a:cs typeface="Calibri" pitchFamily="34" charset="-120"/>
+              </a:rPr>
+              <a:t>Code open; training data proprietary (iRhythm)</a:t>
+            </a:r>
+            <a:endParaRPr lang="en-US" sz="1300" dirty="0"/>
+          </a:p>
+        </p:txBody>
+      </p:sp>
+      <p:sp>
+        <p:nvSpPr>
+          <p:cNvPr id="7" name="Shape 5"/>
+          <p:cNvSpPr/>
+          <p:nvPr/>
+        </p:nvSpPr>
+        <p:spPr>
+          <a:xfrm>
+            <a:off x="6355080" y="1691640"/>
+            <a:ext cx="5257800" cy="3611880"/>
+          </a:xfrm>
+          <a:prstGeom prst="rect">
+            <a:avLst/>
+          </a:prstGeom>
+          <a:solidFill>
+            <a:srgbClr val="FFFFFF"/>
+          </a:solidFill>
+          <a:ln w="19050">
+            <a:solidFill>
+              <a:srgbClr val="1C7293"/>
+            </a:solidFill>
+            <a:prstDash val="solid"/>
+          </a:ln>
+        </p:spPr>
+      </p:sp>
+      <p:sp>
+        <p:nvSpPr>
+          <p:cNvPr id="8" name="Text 6"/>
+          <p:cNvSpPr/>
+          <p:nvPr/>
+        </p:nvSpPr>
+        <p:spPr>
+          <a:xfrm>
+            <a:off x="6675120" y="1874520"/>
+            <a:ext cx="4754880" cy="457200"/>
+          </a:xfrm>
+          <a:prstGeom prst="rect">
+            <a:avLst/>
+          </a:prstGeom>
+          <a:noFill/>
+          <a:ln/>
+        </p:spPr>
+        <p:txBody>
+          <a:bodyPr wrap="square" lIns="0" tIns="0" rIns="0" bIns="0" rtlCol="0" anchor="ctr"/>
+          <a:lstStyle/>
+          <a:p>
+            <a:pPr indent="0" marL="0">
+              <a:buNone/>
+            </a:pPr>
+            <a:r>
+              <a:rPr lang="en-US" sz="1650" b="1" dirty="0">
+                <a:solidFill>
+                  <a:srgbClr val="1C7293"/>
+                </a:solidFill>
+                <a:latin typeface="Georgia" pitchFamily="34" charset="0"/>
+                <a:ea typeface="Georgia" pitchFamily="34" charset="-122"/>
+                <a:cs typeface="Georgia" pitchFamily="34" charset="-120"/>
+              </a:rPr>
+              <a:t>ECGFounder - Li et al. 2025 (our base model)</a:t>
+            </a:r>
+            <a:endParaRPr lang="en-US" sz="1650" dirty="0"/>
+          </a:p>
+        </p:txBody>
+      </p:sp>
+      <p:sp>
+        <p:nvSpPr>
+          <p:cNvPr id="9" name="Text 7"/>
+          <p:cNvSpPr/>
+          <p:nvPr/>
+        </p:nvSpPr>
+        <p:spPr>
+          <a:xfrm>
+            <a:off x="6675120" y="2423160"/>
+            <a:ext cx="4709160" cy="2697480"/>
+          </a:xfrm>
+          <a:prstGeom prst="rect">
+            <a:avLst/>
+          </a:prstGeom>
+          <a:noFill/>
+          <a:ln/>
+        </p:spPr>
+        <p:txBody>
+          <a:bodyPr wrap="square" lIns="0" tIns="0" rIns="0" bIns="0" rtlCol="0" anchor="ctr"/>
+          <a:lstStyle/>
+          <a:p>
+            <a:pPr marL="342900" indent="-342900">
+              <a:lnSpc>
+                <a:spcPct val="130000"/>
+              </a:lnSpc>
+              <a:buSzPct val="100000"/>
+              <a:buChar char="•"/>
+            </a:pPr>
+            <a:r>
+              <a:rPr lang="en-US" sz="1300" dirty="0">
+                <a:solidFill>
+                  <a:srgbClr val="1A2233"/>
+                </a:solidFill>
+                <a:latin typeface="Calibri" pitchFamily="34" charset="0"/>
+                <a:ea typeface="Calibri" pitchFamily="34" charset="-122"/>
+                <a:cs typeface="Calibri" pitchFamily="34" charset="-120"/>
+              </a:rPr>
+              <a:t>Li, Aguirre, ..., Westover, Hong (arXiv 2410.04133)</a:t>
+            </a:r>
+            <a:endParaRPr lang="en-US" sz="1300" dirty="0"/>
+          </a:p>
+          <a:p>
+            <a:pPr marL="342900" indent="-342900">
+              <a:lnSpc>
+                <a:spcPct val="130000"/>
+              </a:lnSpc>
+              <a:buSzPct val="100000"/>
+              <a:buChar char="•"/>
+            </a:pPr>
+            <a:r>
+              <a:rPr lang="en-US" sz="1300" dirty="0">
+                <a:solidFill>
+                  <a:srgbClr val="1A2233"/>
+                </a:solidFill>
+                <a:latin typeface="Calibri" pitchFamily="34" charset="0"/>
+                <a:ea typeface="Calibri" pitchFamily="34" charset="-122"/>
+                <a:cs typeface="Calibri" pitchFamily="34" charset="-120"/>
+              </a:rPr>
+              <a:t>HEEDB: 10.8M ECGs / 1.8M subjects; 150 labels</a:t>
+            </a:r>
+            <a:endParaRPr lang="en-US" sz="1300" dirty="0"/>
+          </a:p>
+          <a:p>
+            <a:pPr marL="342900" indent="-342900">
+              <a:lnSpc>
+                <a:spcPct val="130000"/>
+              </a:lnSpc>
+              <a:buSzPct val="100000"/>
+              <a:buChar char="•"/>
+            </a:pPr>
+            <a:r>
+              <a:rPr lang="en-US" sz="1300" dirty="0">
+                <a:solidFill>
+                  <a:srgbClr val="1A2233"/>
+                </a:solidFill>
+                <a:latin typeface="Calibri" pitchFamily="34" charset="0"/>
+                <a:ea typeface="Calibri" pitchFamily="34" charset="-122"/>
+                <a:cs typeface="Calibri" pitchFamily="34" charset="-120"/>
+              </a:rPr>
+              <a:t>Net1D/RegNet; PU-learning loss; per-record multi-label</a:t>
+            </a:r>
+            <a:endParaRPr lang="en-US" sz="1300" dirty="0"/>
+          </a:p>
+          <a:p>
+            <a:pPr marL="342900" indent="-342900">
+              <a:lnSpc>
+                <a:spcPct val="130000"/>
+              </a:lnSpc>
+              <a:buSzPct val="100000"/>
+              <a:buChar char="•"/>
+            </a:pPr>
+            <a:r>
+              <a:rPr lang="en-US" sz="1300" dirty="0">
+                <a:solidFill>
+                  <a:srgbClr val="1A2233"/>
+                </a:solidFill>
+                <a:latin typeface="Calibri" pitchFamily="34" charset="0"/>
+                <a:ea typeface="Calibri" pitchFamily="34" charset="-122"/>
+                <a:cs typeface="Calibri" pitchFamily="34" charset="-120"/>
+              </a:rPr>
+              <a:t>Committee AUROC 0.968 / F1 0.677; CODE-test 0.981</a:t>
+            </a:r>
+            <a:endParaRPr lang="en-US" sz="1300" dirty="0"/>
+          </a:p>
+          <a:p>
+            <a:pPr marL="342900" indent="-342900">
+              <a:lnSpc>
+                <a:spcPct val="130000"/>
+              </a:lnSpc>
+              <a:buSzPct val="100000"/>
+              <a:buChar char="•"/>
+            </a:pPr>
+            <a:r>
+              <a:rPr lang="en-US" sz="1300" dirty="0">
+                <a:solidFill>
+                  <a:srgbClr val="1A2233"/>
+                </a:solidFill>
+                <a:latin typeface="Calibri" pitchFamily="34" charset="0"/>
+                <a:ea typeface="Calibri" pitchFamily="34" charset="-122"/>
+                <a:cs typeface="Calibri" pitchFamily="34" charset="-120"/>
+              </a:rPr>
+              <a:t>Single-lead via lead augmentation = our fuzzy angles</a:t>
+            </a:r>
+            <a:endParaRPr lang="en-US" sz="1300" dirty="0"/>
+          </a:p>
+        </p:txBody>
+      </p:sp>
+      <p:sp>
+        <p:nvSpPr>
+          <p:cNvPr id="10" name="Shape 8"/>
+          <p:cNvSpPr/>
+          <p:nvPr/>
+        </p:nvSpPr>
+        <p:spPr>
+          <a:xfrm>
+            <a:off x="548640" y="5486400"/>
+            <a:ext cx="11064240" cy="914400"/>
+          </a:xfrm>
+          <a:prstGeom prst="rect">
+            <a:avLst/>
+          </a:prstGeom>
+          <a:solidFill>
+            <a:srgbClr val="EEF3F6"/>
+          </a:solidFill>
+          <a:ln w="6350">
             <a:solidFill>
               <a:srgbClr val="D6DEE6"/>
             </a:solidFill>
@@ -1722,34 +2193,14 @@
       </p:sp>
       <p:sp>
         <p:nvSpPr>
-          <p:cNvPr id="5" name="Shape 3"/>
-          <p:cNvSpPr/>
-          <p:nvPr/>
-        </p:nvSpPr>
-        <p:spPr>
-          <a:xfrm>
-            <a:off x="548640" y="1691640"/>
-            <a:ext cx="118872" cy="4480560"/>
-          </a:xfrm>
-          <a:prstGeom prst="rect">
-            <a:avLst/>
-          </a:prstGeom>
-          <a:solidFill>
-            <a:srgbClr val="065A82"/>
-          </a:solidFill>
-          <a:ln/>
-        </p:spPr>
-      </p:sp>
-      <p:sp>
-        <p:nvSpPr>
-          <p:cNvPr id="6" name="Text 4"/>
-          <p:cNvSpPr/>
-          <p:nvPr/>
-        </p:nvSpPr>
-        <p:spPr>
-          <a:xfrm>
-            <a:off x="868680" y="1874520"/>
-            <a:ext cx="4754880" cy="457200"/>
+          <p:cNvPr id="11" name="Text 9"/>
+          <p:cNvSpPr/>
+          <p:nvPr/>
+        </p:nvSpPr>
+        <p:spPr>
+          <a:xfrm>
+            <a:off x="777240" y="5596128"/>
+            <a:ext cx="10607040" cy="713232"/>
           </a:xfrm>
           <a:prstGeom prst="rect">
             <a:avLst/>
@@ -1765,89 +2216,21 @@
               <a:buNone/>
             </a:pPr>
             <a:r>
-              <a:rPr lang="en-US" sz="2100" b="1" dirty="0">
-                <a:solidFill>
-                  <a:srgbClr val="065A82"/>
-                </a:solidFill>
-                <a:latin typeface="Georgia" pitchFamily="34" charset="0"/>
-                <a:ea typeface="Georgia" pitchFamily="34" charset="-122"/>
-                <a:cs typeface="Georgia" pitchFamily="34" charset="-120"/>
-              </a:rPr>
-              <a:t>Stanford 1D-ResNet</a:t>
-            </a:r>
-            <a:endParaRPr lang="en-US" sz="2100" dirty="0"/>
-          </a:p>
-        </p:txBody>
-      </p:sp>
-      <p:sp>
-        <p:nvSpPr>
-          <p:cNvPr id="7" name="Text 5"/>
-          <p:cNvSpPr/>
-          <p:nvPr/>
-        </p:nvSpPr>
-        <p:spPr>
-          <a:xfrm>
-            <a:off x="868680" y="2350008"/>
-            <a:ext cx="4754880" cy="365760"/>
-          </a:xfrm>
-          <a:prstGeom prst="rect">
-            <a:avLst/>
-          </a:prstGeom>
-          <a:noFill/>
-          <a:ln/>
-        </p:spPr>
-        <p:txBody>
-          <a:bodyPr wrap="square" lIns="0" tIns="0" rIns="0" bIns="0" rtlCol="0" anchor="ctr"/>
-          <a:lstStyle/>
-          <a:p>
+              <a:rPr lang="en-US" sz="1250" b="1" dirty="0">
+                <a:solidFill>
+                  <a:srgbClr val="21295C"/>
+                </a:solidFill>
+                <a:latin typeface="Calibri" pitchFamily="34" charset="0"/>
+                <a:ea typeface="Calibri" pitchFamily="34" charset="-122"/>
+                <a:cs typeface="Calibri" pitchFamily="34" charset="-120"/>
+              </a:rPr>
+              <a:t>Shared lineage:  </a:t>
+            </a:r>
             <a:pPr indent="0" marL="0">
               <a:buNone/>
             </a:pPr>
             <a:r>
-              <a:rPr lang="en-US" sz="1200" i="1" dirty="0">
-                <a:solidFill>
-                  <a:srgbClr val="5A6B7B"/>
-                </a:solidFill>
-                <a:latin typeface="Calibri" pitchFamily="34" charset="0"/>
-                <a:ea typeface="Calibri" pitchFamily="34" charset="-122"/>
-                <a:cs typeface="Calibri" pitchFamily="34" charset="-120"/>
-              </a:rPr>
-              <a:t>Hannun-Rajpurkar-Ng, Nature Medicine 2019</a:t>
-            </a:r>
-            <a:endParaRPr lang="en-US" sz="1200" dirty="0"/>
-          </a:p>
-        </p:txBody>
-      </p:sp>
-      <p:sp>
-        <p:nvSpPr>
-          <p:cNvPr id="8" name="Text 6"/>
-          <p:cNvSpPr/>
-          <p:nvPr/>
-        </p:nvSpPr>
-        <p:spPr>
-          <a:xfrm>
-            <a:off x="868680" y="2880360"/>
-            <a:ext cx="4709160" cy="3108960"/>
-          </a:xfrm>
-          <a:prstGeom prst="rect">
-            <a:avLst/>
-          </a:prstGeom>
-          <a:noFill/>
-          <a:ln/>
-        </p:spPr>
-        <p:txBody>
-          <a:bodyPr wrap="square" lIns="0" tIns="0" rIns="0" bIns="0" rtlCol="0" anchor="ctr"/>
-          <a:lstStyle/>
-          <a:p>
-            <a:pPr marL="342900" indent="-342900">
-              <a:lnSpc>
-                <a:spcPct val="125000"/>
-              </a:lnSpc>
-              <a:buSzPct val="100000"/>
-              <a:buChar char="•"/>
-            </a:pPr>
-            <a:r>
-              <a:rPr lang="en-US" sz="1400" dirty="0">
+              <a:rPr lang="en-US" sz="1250" dirty="0">
                 <a:solidFill>
                   <a:srgbClr val="1A2233"/>
                 </a:solidFill>
@@ -1855,301 +2238,9 @@
                 <a:ea typeface="Calibri" pitchFamily="34" charset="-122"/>
                 <a:cs typeface="Calibri" pitchFamily="34" charset="-120"/>
               </a:rPr>
-              <a:t>Task-specific net, trained from scratch</a:t>
-            </a:r>
-            <a:endParaRPr lang="en-US" sz="1400" dirty="0"/>
-          </a:p>
-          <a:p>
-            <a:pPr marL="342900" indent="-342900">
-              <a:lnSpc>
-                <a:spcPct val="125000"/>
-              </a:lnSpc>
-              <a:buSzPct val="100000"/>
-              <a:buChar char="•"/>
-            </a:pPr>
-            <a:r>
-              <a:rPr lang="en-US" sz="1400" dirty="0">
-                <a:solidFill>
-                  <a:srgbClr val="1A2233"/>
-                </a:solidFill>
-                <a:latin typeface="Calibri" pitchFamily="34" charset="0"/>
-                <a:ea typeface="Calibri" pitchFamily="34" charset="-122"/>
-                <a:cs typeface="Calibri" pitchFamily="34" charset="-120"/>
-              </a:rPr>
-              <a:t>Keras / TensorFlow</a:t>
-            </a:r>
-            <a:endParaRPr lang="en-US" sz="1400" dirty="0"/>
-          </a:p>
-          <a:p>
-            <a:pPr marL="342900" indent="-342900">
-              <a:lnSpc>
-                <a:spcPct val="125000"/>
-              </a:lnSpc>
-              <a:buSzPct val="100000"/>
-              <a:buChar char="•"/>
-            </a:pPr>
-            <a:r>
-              <a:rPr lang="en-US" sz="1400" dirty="0">
-                <a:solidFill>
-                  <a:srgbClr val="1A2233"/>
-                </a:solidFill>
-                <a:latin typeface="Calibri" pitchFamily="34" charset="0"/>
-                <a:ea typeface="Calibri" pitchFamily="34" charset="-122"/>
-                <a:cs typeface="Calibri" pitchFamily="34" charset="-120"/>
-              </a:rPr>
-              <a:t>Continuous ambulatory rhythm strips</a:t>
-            </a:r>
-            <a:endParaRPr lang="en-US" sz="1400" dirty="0"/>
-          </a:p>
-          <a:p>
-            <a:pPr marL="342900" indent="-342900">
-              <a:lnSpc>
-                <a:spcPct val="125000"/>
-              </a:lnSpc>
-              <a:buSzPct val="100000"/>
-              <a:buChar char="•"/>
-            </a:pPr>
-            <a:r>
-              <a:rPr lang="en-US" sz="1400" dirty="0">
-                <a:solidFill>
-                  <a:srgbClr val="1A2233"/>
-                </a:solidFill>
-                <a:latin typeface="Calibri" pitchFamily="34" charset="0"/>
-                <a:ea typeface="Calibri" pitchFamily="34" charset="-122"/>
-                <a:cs typeface="Calibri" pitchFamily="34" charset="-120"/>
-              </a:rPr>
-              <a:t>Few classes, one rhythm per segment</a:t>
-            </a:r>
-            <a:endParaRPr lang="en-US" sz="1400" dirty="0"/>
-          </a:p>
-        </p:txBody>
-      </p:sp>
-      <p:sp>
-        <p:nvSpPr>
-          <p:cNvPr id="9" name="Shape 7"/>
-          <p:cNvSpPr/>
-          <p:nvPr/>
-        </p:nvSpPr>
-        <p:spPr>
-          <a:xfrm>
-            <a:off x="6355080" y="1691640"/>
-            <a:ext cx="5257800" cy="4480560"/>
-          </a:xfrm>
-          <a:prstGeom prst="rect">
-            <a:avLst/>
-          </a:prstGeom>
-          <a:solidFill>
-            <a:srgbClr val="F4F7FA"/>
-          </a:solidFill>
-          <a:ln w="12700">
-            <a:solidFill>
-              <a:srgbClr val="D6DEE6"/>
-            </a:solidFill>
-            <a:prstDash val="solid"/>
-          </a:ln>
-        </p:spPr>
-      </p:sp>
-      <p:sp>
-        <p:nvSpPr>
-          <p:cNvPr id="10" name="Shape 8"/>
-          <p:cNvSpPr/>
-          <p:nvPr/>
-        </p:nvSpPr>
-        <p:spPr>
-          <a:xfrm>
-            <a:off x="6355080" y="1691640"/>
-            <a:ext cx="118872" cy="4480560"/>
-          </a:xfrm>
-          <a:prstGeom prst="rect">
-            <a:avLst/>
-          </a:prstGeom>
-          <a:solidFill>
-            <a:srgbClr val="1C7293"/>
-          </a:solidFill>
-          <a:ln/>
-        </p:spPr>
-      </p:sp>
-      <p:sp>
-        <p:nvSpPr>
-          <p:cNvPr id="11" name="Text 9"/>
-          <p:cNvSpPr/>
-          <p:nvPr/>
-        </p:nvSpPr>
-        <p:spPr>
-          <a:xfrm>
-            <a:off x="6675120" y="1874520"/>
-            <a:ext cx="4754880" cy="457200"/>
-          </a:xfrm>
-          <a:prstGeom prst="rect">
-            <a:avLst/>
-          </a:prstGeom>
-          <a:noFill/>
-          <a:ln/>
-        </p:spPr>
-        <p:txBody>
-          <a:bodyPr wrap="square" lIns="0" tIns="0" rIns="0" bIns="0" rtlCol="0" anchor="ctr"/>
-          <a:lstStyle/>
-          <a:p>
-            <a:pPr indent="0" marL="0">
-              <a:buNone/>
-            </a:pPr>
-            <a:r>
-              <a:rPr lang="en-US" sz="2100" b="1" dirty="0">
-                <a:solidFill>
-                  <a:srgbClr val="1C7293"/>
-                </a:solidFill>
-                <a:latin typeface="Georgia" pitchFamily="34" charset="0"/>
-                <a:ea typeface="Georgia" pitchFamily="34" charset="-122"/>
-                <a:cs typeface="Georgia" pitchFamily="34" charset="-120"/>
-              </a:rPr>
-              <a:t>ECGFounder</a:t>
-            </a:r>
-            <a:endParaRPr lang="en-US" sz="2100" dirty="0"/>
-          </a:p>
-        </p:txBody>
-      </p:sp>
-      <p:sp>
-        <p:nvSpPr>
-          <p:cNvPr id="12" name="Text 10"/>
-          <p:cNvSpPr/>
-          <p:nvPr/>
-        </p:nvSpPr>
-        <p:spPr>
-          <a:xfrm>
-            <a:off x="6675120" y="2350008"/>
-            <a:ext cx="4754880" cy="365760"/>
-          </a:xfrm>
-          <a:prstGeom prst="rect">
-            <a:avLst/>
-          </a:prstGeom>
-          <a:noFill/>
-          <a:ln/>
-        </p:spPr>
-        <p:txBody>
-          <a:bodyPr wrap="square" lIns="0" tIns="0" rIns="0" bIns="0" rtlCol="0" anchor="ctr"/>
-          <a:lstStyle/>
-          <a:p>
-            <a:pPr indent="0" marL="0">
-              <a:buNone/>
-            </a:pPr>
-            <a:r>
-              <a:rPr lang="en-US" sz="1200" i="1" dirty="0">
-                <a:solidFill>
-                  <a:srgbClr val="5A6B7B"/>
-                </a:solidFill>
-                <a:latin typeface="Calibri" pitchFamily="34" charset="0"/>
-                <a:ea typeface="Calibri" pitchFamily="34" charset="-122"/>
-                <a:cs typeface="Calibri" pitchFamily="34" charset="-120"/>
-              </a:rPr>
-              <a:t>Foundation model, pretrained on millions of ECGs</a:t>
-            </a:r>
-            <a:endParaRPr lang="en-US" sz="1200" dirty="0"/>
-          </a:p>
-        </p:txBody>
-      </p:sp>
-      <p:sp>
-        <p:nvSpPr>
-          <p:cNvPr id="13" name="Text 11"/>
-          <p:cNvSpPr/>
-          <p:nvPr/>
-        </p:nvSpPr>
-        <p:spPr>
-          <a:xfrm>
-            <a:off x="6675120" y="2880360"/>
-            <a:ext cx="4709160" cy="3108960"/>
-          </a:xfrm>
-          <a:prstGeom prst="rect">
-            <a:avLst/>
-          </a:prstGeom>
-          <a:noFill/>
-          <a:ln/>
-        </p:spPr>
-        <p:txBody>
-          <a:bodyPr wrap="square" lIns="0" tIns="0" rIns="0" bIns="0" rtlCol="0" anchor="ctr"/>
-          <a:lstStyle/>
-          <a:p>
-            <a:pPr marL="342900" indent="-342900">
-              <a:lnSpc>
-                <a:spcPct val="125000"/>
-              </a:lnSpc>
-              <a:buSzPct val="100000"/>
-              <a:buChar char="•"/>
-            </a:pPr>
-            <a:r>
-              <a:rPr lang="en-US" sz="1400" dirty="0">
-                <a:solidFill>
-                  <a:srgbClr val="1A2233"/>
-                </a:solidFill>
-                <a:latin typeface="Calibri" pitchFamily="34" charset="0"/>
-                <a:ea typeface="Calibri" pitchFamily="34" charset="-122"/>
-                <a:cs typeface="Calibri" pitchFamily="34" charset="-120"/>
-              </a:rPr>
-              <a:t>Pretrained backbone, then fine-tuned</a:t>
-            </a:r>
-            <a:endParaRPr lang="en-US" sz="1400" dirty="0"/>
-          </a:p>
-          <a:p>
-            <a:pPr marL="342900" indent="-342900">
-              <a:lnSpc>
-                <a:spcPct val="125000"/>
-              </a:lnSpc>
-              <a:buSzPct val="100000"/>
-              <a:buChar char="•"/>
-            </a:pPr>
-            <a:r>
-              <a:rPr lang="en-US" sz="1400" dirty="0">
-                <a:solidFill>
-                  <a:srgbClr val="1A2233"/>
-                </a:solidFill>
-                <a:latin typeface="Calibri" pitchFamily="34" charset="0"/>
-                <a:ea typeface="Calibri" pitchFamily="34" charset="-122"/>
-                <a:cs typeface="Calibri" pitchFamily="34" charset="-120"/>
-              </a:rPr>
-              <a:t>PyTorch (Net1D, ~30.8M params)</a:t>
-            </a:r>
-            <a:endParaRPr lang="en-US" sz="1400" dirty="0"/>
-          </a:p>
-          <a:p>
-            <a:pPr marL="342900" indent="-342900">
-              <a:lnSpc>
-                <a:spcPct val="125000"/>
-              </a:lnSpc>
-              <a:buSzPct val="100000"/>
-              <a:buChar char="•"/>
-            </a:pPr>
-            <a:r>
-              <a:rPr lang="en-US" sz="1400" dirty="0">
-                <a:solidFill>
-                  <a:srgbClr val="1A2233"/>
-                </a:solidFill>
-                <a:latin typeface="Calibri" pitchFamily="34" charset="0"/>
-                <a:ea typeface="Calibri" pitchFamily="34" charset="-122"/>
-                <a:cs typeface="Calibri" pitchFamily="34" charset="-120"/>
-              </a:rPr>
-              <a:t>Per-window multi-label diagnosis</a:t>
-            </a:r>
-            <a:endParaRPr lang="en-US" sz="1400" dirty="0"/>
-          </a:p>
-          <a:p>
-            <a:pPr marL="342900" indent="-342900">
-              <a:lnSpc>
-                <a:spcPct val="125000"/>
-              </a:lnSpc>
-              <a:buSzPct val="100000"/>
-              <a:buChar char="•"/>
-            </a:pPr>
-            <a:r>
-              <a:rPr lang="en-US" sz="1400" dirty="0">
-                <a:solidFill>
-                  <a:srgbClr val="1A2233"/>
-                </a:solidFill>
-                <a:latin typeface="Calibri" pitchFamily="34" charset="0"/>
-                <a:ea typeface="Calibri" pitchFamily="34" charset="-122"/>
-                <a:cs typeface="Calibri" pitchFamily="34" charset="-120"/>
-              </a:rPr>
-              <a:t>150 classes, co-occurring diagnoses</a:t>
-            </a:r>
-            <a:endParaRPr lang="en-US" sz="1400" dirty="0"/>
+              <a:t>both validate against a 3-cardiologist committee (ECGFounder cites Hannun). Hannun warns long recordings yield “non-trivial false-positive diagnoses” - exactly what our motion/SQI gates and per-window reporting address.</a:t>
+            </a:r>
+            <a:endParaRPr lang="en-US" sz="1250" dirty="0"/>
           </a:p>
         </p:txBody>
       </p:sp>
@@ -2218,7 +2309,7 @@
                 <a:ea typeface="Calibri" pitchFamily="34" charset="-122"/>
                 <a:cs typeface="Calibri" pitchFamily="34" charset="-120"/>
               </a:rPr>
-              <a:t>BOTH ARE 1D RESNETS, WIRED DIFFERENTLY</a:t>
+              <a:t>TWO DIFFERENT PHILOSOPHIES</a:t>
             </a:r>
             <a:endParaRPr lang="en-US" sz="1200" dirty="0"/>
           </a:p>
@@ -2257,7 +2348,7 @@
                 <a:ea typeface="Georgia" pitchFamily="34" charset="-122"/>
                 <a:cs typeface="Georgia" pitchFamily="34" charset="-120"/>
               </a:rPr>
-              <a:t>Architecture</a:t>
+              <a:t>What each model is</a:t>
             </a:r>
             <a:endParaRPr lang="en-US" sz="3000" dirty="0"/>
           </a:p>
@@ -2278,11 +2369,11 @@
             <a:avLst/>
           </a:prstGeom>
           <a:solidFill>
-            <a:srgbClr val="FFFFFF"/>
+            <a:srgbClr val="F4F7FA"/>
           </a:solidFill>
-          <a:ln w="19050">
+          <a:ln w="12700">
             <a:solidFill>
-              <a:srgbClr val="065A82"/>
+              <a:srgbClr val="D6DEE6"/>
             </a:solidFill>
             <a:prstDash val="solid"/>
           </a:ln>
@@ -2290,14 +2381,34 @@
       </p:sp>
       <p:sp>
         <p:nvSpPr>
-          <p:cNvPr id="5" name="Text 3"/>
-          <p:cNvSpPr/>
-          <p:nvPr/>
-        </p:nvSpPr>
-        <p:spPr>
-          <a:xfrm>
-            <a:off x="868680" y="1920240"/>
-            <a:ext cx="4754880" cy="502920"/>
+          <p:cNvPr id="5" name="Shape 3"/>
+          <p:cNvSpPr/>
+          <p:nvPr/>
+        </p:nvSpPr>
+        <p:spPr>
+          <a:xfrm>
+            <a:off x="548640" y="1691640"/>
+            <a:ext cx="118872" cy="4480560"/>
+          </a:xfrm>
+          <a:prstGeom prst="rect">
+            <a:avLst/>
+          </a:prstGeom>
+          <a:solidFill>
+            <a:srgbClr val="065A82"/>
+          </a:solidFill>
+          <a:ln/>
+        </p:spPr>
+      </p:sp>
+      <p:sp>
+        <p:nvSpPr>
+          <p:cNvPr id="6" name="Text 4"/>
+          <p:cNvSpPr/>
+          <p:nvPr/>
+        </p:nvSpPr>
+        <p:spPr>
+          <a:xfrm>
+            <a:off x="868680" y="1874520"/>
+            <a:ext cx="4754880" cy="457200"/>
           </a:xfrm>
           <a:prstGeom prst="rect">
             <a:avLst/>
@@ -2313,7 +2424,7 @@
               <a:buNone/>
             </a:pPr>
             <a:r>
-              <a:rPr lang="en-US" sz="1800" b="1" dirty="0">
+              <a:rPr lang="en-US" sz="2100" b="1" dirty="0">
                 <a:solidFill>
                   <a:srgbClr val="065A82"/>
                 </a:solidFill>
@@ -2321,22 +2432,22 @@
                 <a:ea typeface="Georgia" pitchFamily="34" charset="-122"/>
                 <a:cs typeface="Georgia" pitchFamily="34" charset="-120"/>
               </a:rPr>
-              <a:t>Stanford - sequence to sequence</a:t>
-            </a:r>
-            <a:endParaRPr lang="en-US" sz="1800" dirty="0"/>
-          </a:p>
-        </p:txBody>
-      </p:sp>
-      <p:sp>
-        <p:nvSpPr>
-          <p:cNvPr id="6" name="Text 4"/>
-          <p:cNvSpPr/>
-          <p:nvPr/>
-        </p:nvSpPr>
-        <p:spPr>
-          <a:xfrm>
-            <a:off x="868680" y="2560320"/>
-            <a:ext cx="4709160" cy="3383280"/>
+              <a:t>Stanford 1D-ResNet</a:t>
+            </a:r>
+            <a:endParaRPr lang="en-US" sz="2100" dirty="0"/>
+          </a:p>
+        </p:txBody>
+      </p:sp>
+      <p:sp>
+        <p:nvSpPr>
+          <p:cNvPr id="7" name="Text 5"/>
+          <p:cNvSpPr/>
+          <p:nvPr/>
+        </p:nvSpPr>
+        <p:spPr>
+          <a:xfrm>
+            <a:off x="868680" y="2350008"/>
+            <a:ext cx="4754880" cy="365760"/>
           </a:xfrm>
           <a:prstGeom prst="rect">
             <a:avLst/>
@@ -2348,9 +2459,48 @@
           <a:bodyPr wrap="square" lIns="0" tIns="0" rIns="0" bIns="0" rtlCol="0" anchor="ctr"/>
           <a:lstStyle/>
           <a:p>
+            <a:pPr indent="0" marL="0">
+              <a:buNone/>
+            </a:pPr>
+            <a:r>
+              <a:rPr lang="en-US" sz="1200" i="1" dirty="0">
+                <a:solidFill>
+                  <a:srgbClr val="5A6B7B"/>
+                </a:solidFill>
+                <a:latin typeface="Calibri" pitchFamily="34" charset="0"/>
+                <a:ea typeface="Calibri" pitchFamily="34" charset="-122"/>
+                <a:cs typeface="Calibri" pitchFamily="34" charset="-120"/>
+              </a:rPr>
+              <a:t>Hannun-Rajpurkar-Ng, Nature Medicine 2019</a:t>
+            </a:r>
+            <a:endParaRPr lang="en-US" sz="1200" dirty="0"/>
+          </a:p>
+        </p:txBody>
+      </p:sp>
+      <p:sp>
+        <p:nvSpPr>
+          <p:cNvPr id="8" name="Text 6"/>
+          <p:cNvSpPr/>
+          <p:nvPr/>
+        </p:nvSpPr>
+        <p:spPr>
+          <a:xfrm>
+            <a:off x="868680" y="2880360"/>
+            <a:ext cx="4709160" cy="3108960"/>
+          </a:xfrm>
+          <a:prstGeom prst="rect">
+            <a:avLst/>
+          </a:prstGeom>
+          <a:noFill/>
+          <a:ln/>
+        </p:spPr>
+        <p:txBody>
+          <a:bodyPr wrap="square" lIns="0" tIns="0" rIns="0" bIns="0" rtlCol="0" anchor="ctr"/>
+          <a:lstStyle/>
+          <a:p>
             <a:pPr marL="342900" indent="-342900">
               <a:lnSpc>
-                <a:spcPct val="130000"/>
+                <a:spcPct val="120000"/>
               </a:lnSpc>
               <a:buSzPct val="100000"/>
               <a:buChar char="•"/>
@@ -2364,14 +2514,14 @@
                 <a:ea typeface="Calibri" pitchFamily="34" charset="-122"/>
                 <a:cs typeface="Calibri" pitchFamily="34" charset="-120"/>
               </a:rPr>
-              <a:t>Input: single lead, z-scored, multiple of 256 samples</a:t>
+              <a:t>91K records / 53.5K patients (Zio, 200 Hz)</a:t>
             </a:r>
             <a:endParaRPr lang="en-US" sz="1400" dirty="0"/>
           </a:p>
           <a:p>
             <a:pPr marL="342900" indent="-342900">
               <a:lnSpc>
-                <a:spcPct val="130000"/>
+                <a:spcPct val="120000"/>
               </a:lnSpc>
               <a:buSzPct val="100000"/>
               <a:buChar char="•"/>
@@ -2385,14 +2535,14 @@
                 <a:ea typeface="Calibri" pitchFamily="34" charset="-122"/>
                 <a:cs typeface="Calibri" pitchFamily="34" charset="-120"/>
               </a:rPr>
-              <a:t>Stem Conv1D(16) -&gt; BN -&gt; ReLU</a:t>
+              <a:t>34-layer 1D ResNet, trained from scratch</a:t>
             </a:r>
             <a:endParaRPr lang="en-US" sz="1400" dirty="0"/>
           </a:p>
           <a:p>
             <a:pPr marL="342900" indent="-342900">
               <a:lnSpc>
-                <a:spcPct val="130000"/>
+                <a:spcPct val="120000"/>
               </a:lnSpc>
               <a:buSzPct val="100000"/>
               <a:buChar char="•"/>
@@ -2406,14 +2556,14 @@
                 <a:ea typeface="Calibri" pitchFamily="34" charset="-122"/>
                 <a:cs typeface="Calibri" pitchFamily="34" charset="-120"/>
               </a:rPr>
-              <a:t>16 residual blocks, 2 convs each (pre-act BN-&gt;ReLU-&gt;Drop 0.2)</a:t>
+              <a:t>12 classes; 1 label / 1.28 s (seq-to-seq)</a:t>
             </a:r>
             <a:endParaRPr lang="en-US" sz="1400" dirty="0"/>
           </a:p>
           <a:p>
             <a:pPr marL="342900" indent="-342900">
               <a:lnSpc>
-                <a:spcPct val="130000"/>
+                <a:spcPct val="120000"/>
               </a:lnSpc>
               <a:buSzPct val="100000"/>
               <a:buChar char="•"/>
@@ -2427,14 +2577,159 @@
                 <a:ea typeface="Calibri" pitchFamily="34" charset="-122"/>
                 <a:cs typeface="Calibri" pitchFamily="34" charset="-120"/>
               </a:rPr>
-              <a:t>Filters 32-&gt;64-&gt;128-&gt;256; strides 1,2,1,2... (256x down)</a:t>
+              <a:t>AUC 0.97 &gt; cardiologist (F1 .837 vs .780)</a:t>
             </a:r>
             <a:endParaRPr lang="en-US" sz="1400" dirty="0"/>
           </a:p>
+        </p:txBody>
+      </p:sp>
+      <p:sp>
+        <p:nvSpPr>
+          <p:cNvPr id="9" name="Shape 7"/>
+          <p:cNvSpPr/>
+          <p:nvPr/>
+        </p:nvSpPr>
+        <p:spPr>
+          <a:xfrm>
+            <a:off x="6355080" y="1691640"/>
+            <a:ext cx="5257800" cy="4480560"/>
+          </a:xfrm>
+          <a:prstGeom prst="rect">
+            <a:avLst/>
+          </a:prstGeom>
+          <a:solidFill>
+            <a:srgbClr val="F4F7FA"/>
+          </a:solidFill>
+          <a:ln w="12700">
+            <a:solidFill>
+              <a:srgbClr val="D6DEE6"/>
+            </a:solidFill>
+            <a:prstDash val="solid"/>
+          </a:ln>
+        </p:spPr>
+      </p:sp>
+      <p:sp>
+        <p:nvSpPr>
+          <p:cNvPr id="10" name="Shape 8"/>
+          <p:cNvSpPr/>
+          <p:nvPr/>
+        </p:nvSpPr>
+        <p:spPr>
+          <a:xfrm>
+            <a:off x="6355080" y="1691640"/>
+            <a:ext cx="118872" cy="4480560"/>
+          </a:xfrm>
+          <a:prstGeom prst="rect">
+            <a:avLst/>
+          </a:prstGeom>
+          <a:solidFill>
+            <a:srgbClr val="1C7293"/>
+          </a:solidFill>
+          <a:ln/>
+        </p:spPr>
+      </p:sp>
+      <p:sp>
+        <p:nvSpPr>
+          <p:cNvPr id="11" name="Text 9"/>
+          <p:cNvSpPr/>
+          <p:nvPr/>
+        </p:nvSpPr>
+        <p:spPr>
+          <a:xfrm>
+            <a:off x="6675120" y="1874520"/>
+            <a:ext cx="4754880" cy="457200"/>
+          </a:xfrm>
+          <a:prstGeom prst="rect">
+            <a:avLst/>
+          </a:prstGeom>
+          <a:noFill/>
+          <a:ln/>
+        </p:spPr>
+        <p:txBody>
+          <a:bodyPr wrap="square" lIns="0" tIns="0" rIns="0" bIns="0" rtlCol="0" anchor="ctr"/>
+          <a:lstStyle/>
+          <a:p>
+            <a:pPr indent="0" marL="0">
+              <a:buNone/>
+            </a:pPr>
+            <a:r>
+              <a:rPr lang="en-US" sz="2100" b="1" dirty="0">
+                <a:solidFill>
+                  <a:srgbClr val="1C7293"/>
+                </a:solidFill>
+                <a:latin typeface="Georgia" pitchFamily="34" charset="0"/>
+                <a:ea typeface="Georgia" pitchFamily="34" charset="-122"/>
+                <a:cs typeface="Georgia" pitchFamily="34" charset="-120"/>
+              </a:rPr>
+              <a:t>ECGFounder</a:t>
+            </a:r>
+            <a:endParaRPr lang="en-US" sz="2100" dirty="0"/>
+          </a:p>
+        </p:txBody>
+      </p:sp>
+      <p:sp>
+        <p:nvSpPr>
+          <p:cNvPr id="12" name="Text 10"/>
+          <p:cNvSpPr/>
+          <p:nvPr/>
+        </p:nvSpPr>
+        <p:spPr>
+          <a:xfrm>
+            <a:off x="6675120" y="2350008"/>
+            <a:ext cx="4754880" cy="365760"/>
+          </a:xfrm>
+          <a:prstGeom prst="rect">
+            <a:avLst/>
+          </a:prstGeom>
+          <a:noFill/>
+          <a:ln/>
+        </p:spPr>
+        <p:txBody>
+          <a:bodyPr wrap="square" lIns="0" tIns="0" rIns="0" bIns="0" rtlCol="0" anchor="ctr"/>
+          <a:lstStyle/>
+          <a:p>
+            <a:pPr indent="0" marL="0">
+              <a:buNone/>
+            </a:pPr>
+            <a:r>
+              <a:rPr lang="en-US" sz="1200" i="1" dirty="0">
+                <a:solidFill>
+                  <a:srgbClr val="5A6B7B"/>
+                </a:solidFill>
+                <a:latin typeface="Calibri" pitchFamily="34" charset="0"/>
+                <a:ea typeface="Calibri" pitchFamily="34" charset="-122"/>
+                <a:cs typeface="Calibri" pitchFamily="34" charset="-120"/>
+              </a:rPr>
+              <a:t>Li et al. 2025 (arXiv 2410.04133) - our base model</a:t>
+            </a:r>
+            <a:endParaRPr lang="en-US" sz="1200" dirty="0"/>
+          </a:p>
+        </p:txBody>
+      </p:sp>
+      <p:sp>
+        <p:nvSpPr>
+          <p:cNvPr id="13" name="Text 11"/>
+          <p:cNvSpPr/>
+          <p:nvPr/>
+        </p:nvSpPr>
+        <p:spPr>
+          <a:xfrm>
+            <a:off x="6675120" y="2880360"/>
+            <a:ext cx="4709160" cy="3108960"/>
+          </a:xfrm>
+          <a:prstGeom prst="rect">
+            <a:avLst/>
+          </a:prstGeom>
+          <a:noFill/>
+          <a:ln/>
+        </p:spPr>
+        <p:txBody>
+          <a:bodyPr wrap="square" lIns="0" tIns="0" rIns="0" bIns="0" rtlCol="0" anchor="ctr"/>
+          <a:lstStyle/>
           <a:p>
             <a:pPr marL="342900" indent="-342900">
               <a:lnSpc>
-                <a:spcPct val="130000"/>
+                <a:spcPct val="120000"/>
               </a:lnSpc>
               <a:buSzPct val="100000"/>
               <a:buChar char="•"/>
@@ -2448,14 +2743,14 @@
                 <a:ea typeface="Calibri" pitchFamily="34" charset="-122"/>
                 <a:cs typeface="Calibri" pitchFamily="34" charset="-120"/>
               </a:rPr>
-              <a:t>Output: TimeDistributed Dense -&gt; softmax</a:t>
+              <a:t>10.8M ECGs / 1.8M subjects; 150 labels</a:t>
             </a:r>
             <a:endParaRPr lang="en-US" sz="1400" dirty="0"/>
           </a:p>
           <a:p>
             <a:pPr marL="342900" indent="-342900">
               <a:lnSpc>
-                <a:spcPct val="130000"/>
+                <a:spcPct val="120000"/>
               </a:lnSpc>
               <a:buSzPct val="100000"/>
               <a:buChar char="•"/>
@@ -2469,100 +2764,14 @@
                 <a:ea typeface="Calibri" pitchFamily="34" charset="-122"/>
                 <a:cs typeface="Calibri" pitchFamily="34" charset="-120"/>
               </a:rPr>
-              <a:t>One label per ~1.3 s segment</a:t>
+              <a:t>Net1D/RegNet foundation; PU-learning loss</a:t>
             </a:r>
             <a:endParaRPr lang="en-US" sz="1400" dirty="0"/>
           </a:p>
-        </p:txBody>
-      </p:sp>
-      <p:sp>
-        <p:nvSpPr>
-          <p:cNvPr id="7" name="Shape 5"/>
-          <p:cNvSpPr/>
-          <p:nvPr/>
-        </p:nvSpPr>
-        <p:spPr>
-          <a:xfrm>
-            <a:off x="6355080" y="1691640"/>
-            <a:ext cx="5257800" cy="4480560"/>
-          </a:xfrm>
-          <a:prstGeom prst="rect">
-            <a:avLst/>
-          </a:prstGeom>
-          <a:solidFill>
-            <a:srgbClr val="FFFFFF"/>
-          </a:solidFill>
-          <a:ln w="19050">
-            <a:solidFill>
-              <a:srgbClr val="1C7293"/>
-            </a:solidFill>
-            <a:prstDash val="solid"/>
-          </a:ln>
-        </p:spPr>
-      </p:sp>
-      <p:sp>
-        <p:nvSpPr>
-          <p:cNvPr id="8" name="Text 6"/>
-          <p:cNvSpPr/>
-          <p:nvPr/>
-        </p:nvSpPr>
-        <p:spPr>
-          <a:xfrm>
-            <a:off x="6675120" y="1920240"/>
-            <a:ext cx="4754880" cy="502920"/>
-          </a:xfrm>
-          <a:prstGeom prst="rect">
-            <a:avLst/>
-          </a:prstGeom>
-          <a:noFill/>
-          <a:ln/>
-        </p:spPr>
-        <p:txBody>
-          <a:bodyPr wrap="square" lIns="0" tIns="0" rIns="0" bIns="0" rtlCol="0" anchor="ctr"/>
-          <a:lstStyle/>
-          <a:p>
-            <a:pPr indent="0" marL="0">
-              <a:buNone/>
-            </a:pPr>
-            <a:r>
-              <a:rPr lang="en-US" sz="1800" b="1" dirty="0">
-                <a:solidFill>
-                  <a:srgbClr val="1C7293"/>
-                </a:solidFill>
-                <a:latin typeface="Georgia" pitchFamily="34" charset="0"/>
-                <a:ea typeface="Georgia" pitchFamily="34" charset="-122"/>
-                <a:cs typeface="Georgia" pitchFamily="34" charset="-120"/>
-              </a:rPr>
-              <a:t>ECGFounder - sequence to one</a:t>
-            </a:r>
-            <a:endParaRPr lang="en-US" sz="1800" dirty="0"/>
-          </a:p>
-        </p:txBody>
-      </p:sp>
-      <p:sp>
-        <p:nvSpPr>
-          <p:cNvPr id="9" name="Text 7"/>
-          <p:cNvSpPr/>
-          <p:nvPr/>
-        </p:nvSpPr>
-        <p:spPr>
-          <a:xfrm>
-            <a:off x="6675120" y="2560320"/>
-            <a:ext cx="4709160" cy="3383280"/>
-          </a:xfrm>
-          <a:prstGeom prst="rect">
-            <a:avLst/>
-          </a:prstGeom>
-          <a:noFill/>
-          <a:ln/>
-        </p:spPr>
-        <p:txBody>
-          <a:bodyPr wrap="square" lIns="0" tIns="0" rIns="0" bIns="0" rtlCol="0" anchor="ctr"/>
-          <a:lstStyle/>
           <a:p>
             <a:pPr marL="342900" indent="-342900">
               <a:lnSpc>
-                <a:spcPct val="130000"/>
+                <a:spcPct val="120000"/>
               </a:lnSpc>
               <a:buSzPct val="100000"/>
               <a:buChar char="•"/>
@@ -2576,14 +2785,14 @@
                 <a:ea typeface="Calibri" pitchFamily="34" charset="-122"/>
                 <a:cs typeface="Calibri" pitchFamily="34" charset="-120"/>
               </a:rPr>
-              <a:t>Input: single lead, fixed 10 s @ 500 Hz (1x5000)</a:t>
+              <a:t>Single-lead = lead augmentation (our fuzzy)</a:t>
             </a:r>
             <a:endParaRPr lang="en-US" sz="1400" dirty="0"/>
           </a:p>
           <a:p>
             <a:pPr marL="342900" indent="-342900">
               <a:lnSpc>
-                <a:spcPct val="130000"/>
+                <a:spcPct val="120000"/>
               </a:lnSpc>
               <a:buSzPct val="100000"/>
               <a:buChar char="•"/>
@@ -2597,91 +2806,7 @@
                 <a:ea typeface="Calibri" pitchFamily="34" charset="-122"/>
                 <a:cs typeface="Calibri" pitchFamily="34" charset="-120"/>
               </a:rPr>
-              <a:t>Net1D conv stages (deeper / wider)</a:t>
-            </a:r>
-            <a:endParaRPr lang="en-US" sz="1400" dirty="0"/>
-          </a:p>
-          <a:p>
-            <a:pPr marL="342900" indent="-342900">
-              <a:lnSpc>
-                <a:spcPct val="130000"/>
-              </a:lnSpc>
-              <a:buSzPct val="100000"/>
-              <a:buChar char="•"/>
-            </a:pPr>
-            <a:r>
-              <a:rPr lang="en-US" sz="1400" dirty="0">
-                <a:solidFill>
-                  <a:srgbClr val="1A2233"/>
-                </a:solidFill>
-                <a:latin typeface="Calibri" pitchFamily="34" charset="0"/>
-                <a:ea typeface="Calibri" pitchFamily="34" charset="-122"/>
-                <a:cs typeface="Calibri" pitchFamily="34" charset="-120"/>
-              </a:rPr>
-              <a:t>Global pooling -&gt; 1024-dim feature</a:t>
-            </a:r>
-            <a:endParaRPr lang="en-US" sz="1400" dirty="0"/>
-          </a:p>
-          <a:p>
-            <a:pPr marL="342900" indent="-342900">
-              <a:lnSpc>
-                <a:spcPct val="130000"/>
-              </a:lnSpc>
-              <a:buSzPct val="100000"/>
-              <a:buChar char="•"/>
-            </a:pPr>
-            <a:r>
-              <a:rPr lang="en-US" sz="1400" dirty="0">
-                <a:solidFill>
-                  <a:srgbClr val="1A2233"/>
-                </a:solidFill>
-                <a:latin typeface="Calibri" pitchFamily="34" charset="0"/>
-                <a:ea typeface="Calibri" pitchFamily="34" charset="-122"/>
-                <a:cs typeface="Calibri" pitchFamily="34" charset="-120"/>
-              </a:rPr>
-              <a:t>Linear(1024, 150) -&gt; sigmoid</a:t>
-            </a:r>
-            <a:endParaRPr lang="en-US" sz="1400" dirty="0"/>
-          </a:p>
-          <a:p>
-            <a:pPr marL="342900" indent="-342900">
-              <a:lnSpc>
-                <a:spcPct val="130000"/>
-              </a:lnSpc>
-              <a:buSzPct val="100000"/>
-              <a:buChar char="•"/>
-            </a:pPr>
-            <a:r>
-              <a:rPr lang="en-US" sz="1400" dirty="0">
-                <a:solidFill>
-                  <a:srgbClr val="1A2233"/>
-                </a:solidFill>
-                <a:latin typeface="Calibri" pitchFamily="34" charset="0"/>
-                <a:ea typeface="Calibri" pitchFamily="34" charset="-122"/>
-                <a:cs typeface="Calibri" pitchFamily="34" charset="-120"/>
-              </a:rPr>
-              <a:t>Output: 150 independent probabilities</a:t>
-            </a:r>
-            <a:endParaRPr lang="en-US" sz="1400" dirty="0"/>
-          </a:p>
-          <a:p>
-            <a:pPr marL="342900" indent="-342900">
-              <a:lnSpc>
-                <a:spcPct val="130000"/>
-              </a:lnSpc>
-              <a:buSzPct val="100000"/>
-              <a:buChar char="•"/>
-            </a:pPr>
-            <a:r>
-              <a:rPr lang="en-US" sz="1400" dirty="0">
-                <a:solidFill>
-                  <a:srgbClr val="1A2233"/>
-                </a:solidFill>
-                <a:latin typeface="Calibri" pitchFamily="34" charset="0"/>
-                <a:ea typeface="Calibri" pitchFamily="34" charset="-122"/>
-                <a:cs typeface="Calibri" pitchFamily="34" charset="-120"/>
-              </a:rPr>
-              <a:t>One multi-label vector per record</a:t>
+              <a:t>Committee AUROC .968; CODE-test .981</a:t>
             </a:r>
             <a:endParaRPr lang="en-US" sz="1400" dirty="0"/>
           </a:p>
@@ -2752,7 +2877,7 @@
                 <a:ea typeface="Calibri" pitchFamily="34" charset="-122"/>
                 <a:cs typeface="Calibri" pitchFamily="34" charset="-120"/>
               </a:rPr>
-              <a:t>THE DIFFERENCES THAT MATTER</a:t>
+              <a:t>BOTH ARE 1D RESNETS, WIRED DIFFERENTLY</a:t>
             </a:r>
             <a:endParaRPr lang="en-US" sz="1200" dirty="0"/>
           </a:p>
@@ -2791,6 +2916,540 @@
                 <a:ea typeface="Georgia" pitchFamily="34" charset="-122"/>
                 <a:cs typeface="Georgia" pitchFamily="34" charset="-120"/>
               </a:rPr>
+              <a:t>Architecture</a:t>
+            </a:r>
+            <a:endParaRPr lang="en-US" sz="3000" dirty="0"/>
+          </a:p>
+        </p:txBody>
+      </p:sp>
+      <p:sp>
+        <p:nvSpPr>
+          <p:cNvPr id="4" name="Shape 2"/>
+          <p:cNvSpPr/>
+          <p:nvPr/>
+        </p:nvSpPr>
+        <p:spPr>
+          <a:xfrm>
+            <a:off x="548640" y="1691640"/>
+            <a:ext cx="5257800" cy="4480560"/>
+          </a:xfrm>
+          <a:prstGeom prst="rect">
+            <a:avLst/>
+          </a:prstGeom>
+          <a:solidFill>
+            <a:srgbClr val="FFFFFF"/>
+          </a:solidFill>
+          <a:ln w="19050">
+            <a:solidFill>
+              <a:srgbClr val="065A82"/>
+            </a:solidFill>
+            <a:prstDash val="solid"/>
+          </a:ln>
+        </p:spPr>
+      </p:sp>
+      <p:sp>
+        <p:nvSpPr>
+          <p:cNvPr id="5" name="Text 3"/>
+          <p:cNvSpPr/>
+          <p:nvPr/>
+        </p:nvSpPr>
+        <p:spPr>
+          <a:xfrm>
+            <a:off x="868680" y="1920240"/>
+            <a:ext cx="4754880" cy="502920"/>
+          </a:xfrm>
+          <a:prstGeom prst="rect">
+            <a:avLst/>
+          </a:prstGeom>
+          <a:noFill/>
+          <a:ln/>
+        </p:spPr>
+        <p:txBody>
+          <a:bodyPr wrap="square" lIns="0" tIns="0" rIns="0" bIns="0" rtlCol="0" anchor="ctr"/>
+          <a:lstStyle/>
+          <a:p>
+            <a:pPr indent="0" marL="0">
+              <a:buNone/>
+            </a:pPr>
+            <a:r>
+              <a:rPr lang="en-US" sz="1800" b="1" dirty="0">
+                <a:solidFill>
+                  <a:srgbClr val="065A82"/>
+                </a:solidFill>
+                <a:latin typeface="Georgia" pitchFamily="34" charset="0"/>
+                <a:ea typeface="Georgia" pitchFamily="34" charset="-122"/>
+                <a:cs typeface="Georgia" pitchFamily="34" charset="-120"/>
+              </a:rPr>
+              <a:t>Stanford - sequence to sequence</a:t>
+            </a:r>
+            <a:endParaRPr lang="en-US" sz="1800" dirty="0"/>
+          </a:p>
+        </p:txBody>
+      </p:sp>
+      <p:sp>
+        <p:nvSpPr>
+          <p:cNvPr id="6" name="Text 4"/>
+          <p:cNvSpPr/>
+          <p:nvPr/>
+        </p:nvSpPr>
+        <p:spPr>
+          <a:xfrm>
+            <a:off x="868680" y="2560320"/>
+            <a:ext cx="4709160" cy="3383280"/>
+          </a:xfrm>
+          <a:prstGeom prst="rect">
+            <a:avLst/>
+          </a:prstGeom>
+          <a:noFill/>
+          <a:ln/>
+        </p:spPr>
+        <p:txBody>
+          <a:bodyPr wrap="square" lIns="0" tIns="0" rIns="0" bIns="0" rtlCol="0" anchor="ctr"/>
+          <a:lstStyle/>
+          <a:p>
+            <a:pPr marL="342900" indent="-342900">
+              <a:lnSpc>
+                <a:spcPct val="130000"/>
+              </a:lnSpc>
+              <a:buSzPct val="100000"/>
+              <a:buChar char="•"/>
+            </a:pPr>
+            <a:r>
+              <a:rPr lang="en-US" sz="1400" dirty="0">
+                <a:solidFill>
+                  <a:srgbClr val="1A2233"/>
+                </a:solidFill>
+                <a:latin typeface="Calibri" pitchFamily="34" charset="0"/>
+                <a:ea typeface="Calibri" pitchFamily="34" charset="-122"/>
+                <a:cs typeface="Calibri" pitchFamily="34" charset="-120"/>
+              </a:rPr>
+              <a:t>Input: single lead, z-scored, multiple of 256 samples</a:t>
+            </a:r>
+            <a:endParaRPr lang="en-US" sz="1400" dirty="0"/>
+          </a:p>
+          <a:p>
+            <a:pPr marL="342900" indent="-342900">
+              <a:lnSpc>
+                <a:spcPct val="130000"/>
+              </a:lnSpc>
+              <a:buSzPct val="100000"/>
+              <a:buChar char="•"/>
+            </a:pPr>
+            <a:r>
+              <a:rPr lang="en-US" sz="1400" dirty="0">
+                <a:solidFill>
+                  <a:srgbClr val="1A2233"/>
+                </a:solidFill>
+                <a:latin typeface="Calibri" pitchFamily="34" charset="0"/>
+                <a:ea typeface="Calibri" pitchFamily="34" charset="-122"/>
+                <a:cs typeface="Calibri" pitchFamily="34" charset="-120"/>
+              </a:rPr>
+              <a:t>Stem Conv1D(16) -&gt; BN -&gt; ReLU</a:t>
+            </a:r>
+            <a:endParaRPr lang="en-US" sz="1400" dirty="0"/>
+          </a:p>
+          <a:p>
+            <a:pPr marL="342900" indent="-342900">
+              <a:lnSpc>
+                <a:spcPct val="130000"/>
+              </a:lnSpc>
+              <a:buSzPct val="100000"/>
+              <a:buChar char="•"/>
+            </a:pPr>
+            <a:r>
+              <a:rPr lang="en-US" sz="1400" dirty="0">
+                <a:solidFill>
+                  <a:srgbClr val="1A2233"/>
+                </a:solidFill>
+                <a:latin typeface="Calibri" pitchFamily="34" charset="0"/>
+                <a:ea typeface="Calibri" pitchFamily="34" charset="-122"/>
+                <a:cs typeface="Calibri" pitchFamily="34" charset="-120"/>
+              </a:rPr>
+              <a:t>16 residual blocks, 2 convs each (pre-act BN-&gt;ReLU-&gt;Drop 0.2)</a:t>
+            </a:r>
+            <a:endParaRPr lang="en-US" sz="1400" dirty="0"/>
+          </a:p>
+          <a:p>
+            <a:pPr marL="342900" indent="-342900">
+              <a:lnSpc>
+                <a:spcPct val="130000"/>
+              </a:lnSpc>
+              <a:buSzPct val="100000"/>
+              <a:buChar char="•"/>
+            </a:pPr>
+            <a:r>
+              <a:rPr lang="en-US" sz="1400" dirty="0">
+                <a:solidFill>
+                  <a:srgbClr val="1A2233"/>
+                </a:solidFill>
+                <a:latin typeface="Calibri" pitchFamily="34" charset="0"/>
+                <a:ea typeface="Calibri" pitchFamily="34" charset="-122"/>
+                <a:cs typeface="Calibri" pitchFamily="34" charset="-120"/>
+              </a:rPr>
+              <a:t>Filters 32-&gt;64-&gt;128-&gt;256; strides 1,2,1,2... (256x down)</a:t>
+            </a:r>
+            <a:endParaRPr lang="en-US" sz="1400" dirty="0"/>
+          </a:p>
+          <a:p>
+            <a:pPr marL="342900" indent="-342900">
+              <a:lnSpc>
+                <a:spcPct val="130000"/>
+              </a:lnSpc>
+              <a:buSzPct val="100000"/>
+              <a:buChar char="•"/>
+            </a:pPr>
+            <a:r>
+              <a:rPr lang="en-US" sz="1400" dirty="0">
+                <a:solidFill>
+                  <a:srgbClr val="1A2233"/>
+                </a:solidFill>
+                <a:latin typeface="Calibri" pitchFamily="34" charset="0"/>
+                <a:ea typeface="Calibri" pitchFamily="34" charset="-122"/>
+                <a:cs typeface="Calibri" pitchFamily="34" charset="-120"/>
+              </a:rPr>
+              <a:t>Output: TimeDistributed Dense -&gt; softmax</a:t>
+            </a:r>
+            <a:endParaRPr lang="en-US" sz="1400" dirty="0"/>
+          </a:p>
+          <a:p>
+            <a:pPr marL="342900" indent="-342900">
+              <a:lnSpc>
+                <a:spcPct val="130000"/>
+              </a:lnSpc>
+              <a:buSzPct val="100000"/>
+              <a:buChar char="•"/>
+            </a:pPr>
+            <a:r>
+              <a:rPr lang="en-US" sz="1400" dirty="0">
+                <a:solidFill>
+                  <a:srgbClr val="1A2233"/>
+                </a:solidFill>
+                <a:latin typeface="Calibri" pitchFamily="34" charset="0"/>
+                <a:ea typeface="Calibri" pitchFamily="34" charset="-122"/>
+                <a:cs typeface="Calibri" pitchFamily="34" charset="-120"/>
+              </a:rPr>
+              <a:t>One label per 1.28 s segment (256 samp @ 200 Hz)</a:t>
+            </a:r>
+            <a:endParaRPr lang="en-US" sz="1400" dirty="0"/>
+          </a:p>
+        </p:txBody>
+      </p:sp>
+      <p:sp>
+        <p:nvSpPr>
+          <p:cNvPr id="7" name="Shape 5"/>
+          <p:cNvSpPr/>
+          <p:nvPr/>
+        </p:nvSpPr>
+        <p:spPr>
+          <a:xfrm>
+            <a:off x="6355080" y="1691640"/>
+            <a:ext cx="5257800" cy="4480560"/>
+          </a:xfrm>
+          <a:prstGeom prst="rect">
+            <a:avLst/>
+          </a:prstGeom>
+          <a:solidFill>
+            <a:srgbClr val="FFFFFF"/>
+          </a:solidFill>
+          <a:ln w="19050">
+            <a:solidFill>
+              <a:srgbClr val="1C7293"/>
+            </a:solidFill>
+            <a:prstDash val="solid"/>
+          </a:ln>
+        </p:spPr>
+      </p:sp>
+      <p:sp>
+        <p:nvSpPr>
+          <p:cNvPr id="8" name="Text 6"/>
+          <p:cNvSpPr/>
+          <p:nvPr/>
+        </p:nvSpPr>
+        <p:spPr>
+          <a:xfrm>
+            <a:off x="6675120" y="1920240"/>
+            <a:ext cx="4754880" cy="502920"/>
+          </a:xfrm>
+          <a:prstGeom prst="rect">
+            <a:avLst/>
+          </a:prstGeom>
+          <a:noFill/>
+          <a:ln/>
+        </p:spPr>
+        <p:txBody>
+          <a:bodyPr wrap="square" lIns="0" tIns="0" rIns="0" bIns="0" rtlCol="0" anchor="ctr"/>
+          <a:lstStyle/>
+          <a:p>
+            <a:pPr indent="0" marL="0">
+              <a:buNone/>
+            </a:pPr>
+            <a:r>
+              <a:rPr lang="en-US" sz="1800" b="1" dirty="0">
+                <a:solidFill>
+                  <a:srgbClr val="1C7293"/>
+                </a:solidFill>
+                <a:latin typeface="Georgia" pitchFamily="34" charset="0"/>
+                <a:ea typeface="Georgia" pitchFamily="34" charset="-122"/>
+                <a:cs typeface="Georgia" pitchFamily="34" charset="-120"/>
+              </a:rPr>
+              <a:t>ECGFounder - sequence to one</a:t>
+            </a:r>
+            <a:endParaRPr lang="en-US" sz="1800" dirty="0"/>
+          </a:p>
+        </p:txBody>
+      </p:sp>
+      <p:sp>
+        <p:nvSpPr>
+          <p:cNvPr id="9" name="Text 7"/>
+          <p:cNvSpPr/>
+          <p:nvPr/>
+        </p:nvSpPr>
+        <p:spPr>
+          <a:xfrm>
+            <a:off x="6675120" y="2560320"/>
+            <a:ext cx="4709160" cy="3383280"/>
+          </a:xfrm>
+          <a:prstGeom prst="rect">
+            <a:avLst/>
+          </a:prstGeom>
+          <a:noFill/>
+          <a:ln/>
+        </p:spPr>
+        <p:txBody>
+          <a:bodyPr wrap="square" lIns="0" tIns="0" rIns="0" bIns="0" rtlCol="0" anchor="ctr"/>
+          <a:lstStyle/>
+          <a:p>
+            <a:pPr marL="342900" indent="-342900">
+              <a:lnSpc>
+                <a:spcPct val="130000"/>
+              </a:lnSpc>
+              <a:buSzPct val="100000"/>
+              <a:buChar char="•"/>
+            </a:pPr>
+            <a:r>
+              <a:rPr lang="en-US" sz="1400" dirty="0">
+                <a:solidFill>
+                  <a:srgbClr val="1A2233"/>
+                </a:solidFill>
+                <a:latin typeface="Calibri" pitchFamily="34" charset="0"/>
+                <a:ea typeface="Calibri" pitchFamily="34" charset="-122"/>
+                <a:cs typeface="Calibri" pitchFamily="34" charset="-120"/>
+              </a:rPr>
+              <a:t>Input: single lead, fixed 10 s @ 500 Hz (1x5000)</a:t>
+            </a:r>
+            <a:endParaRPr lang="en-US" sz="1400" dirty="0"/>
+          </a:p>
+          <a:p>
+            <a:pPr marL="342900" indent="-342900">
+              <a:lnSpc>
+                <a:spcPct val="130000"/>
+              </a:lnSpc>
+              <a:buSzPct val="100000"/>
+              <a:buChar char="•"/>
+            </a:pPr>
+            <a:r>
+              <a:rPr lang="en-US" sz="1400" dirty="0">
+                <a:solidFill>
+                  <a:srgbClr val="1A2233"/>
+                </a:solidFill>
+                <a:latin typeface="Calibri" pitchFamily="34" charset="0"/>
+                <a:ea typeface="Calibri" pitchFamily="34" charset="-122"/>
+                <a:cs typeface="Calibri" pitchFamily="34" charset="-120"/>
+              </a:rPr>
+              <a:t>Net1D conv stages (deeper / wider)</a:t>
+            </a:r>
+            <a:endParaRPr lang="en-US" sz="1400" dirty="0"/>
+          </a:p>
+          <a:p>
+            <a:pPr marL="342900" indent="-342900">
+              <a:lnSpc>
+                <a:spcPct val="130000"/>
+              </a:lnSpc>
+              <a:buSzPct val="100000"/>
+              <a:buChar char="•"/>
+            </a:pPr>
+            <a:r>
+              <a:rPr lang="en-US" sz="1400" dirty="0">
+                <a:solidFill>
+                  <a:srgbClr val="1A2233"/>
+                </a:solidFill>
+                <a:latin typeface="Calibri" pitchFamily="34" charset="0"/>
+                <a:ea typeface="Calibri" pitchFamily="34" charset="-122"/>
+                <a:cs typeface="Calibri" pitchFamily="34" charset="-120"/>
+              </a:rPr>
+              <a:t>Global pooling -&gt; 1024-dim feature</a:t>
+            </a:r>
+            <a:endParaRPr lang="en-US" sz="1400" dirty="0"/>
+          </a:p>
+          <a:p>
+            <a:pPr marL="342900" indent="-342900">
+              <a:lnSpc>
+                <a:spcPct val="130000"/>
+              </a:lnSpc>
+              <a:buSzPct val="100000"/>
+              <a:buChar char="•"/>
+            </a:pPr>
+            <a:r>
+              <a:rPr lang="en-US" sz="1400" dirty="0">
+                <a:solidFill>
+                  <a:srgbClr val="1A2233"/>
+                </a:solidFill>
+                <a:latin typeface="Calibri" pitchFamily="34" charset="0"/>
+                <a:ea typeface="Calibri" pitchFamily="34" charset="-122"/>
+                <a:cs typeface="Calibri" pitchFamily="34" charset="-120"/>
+              </a:rPr>
+              <a:t>Linear(1024, 150) -&gt; sigmoid</a:t>
+            </a:r>
+            <a:endParaRPr lang="en-US" sz="1400" dirty="0"/>
+          </a:p>
+          <a:p>
+            <a:pPr marL="342900" indent="-342900">
+              <a:lnSpc>
+                <a:spcPct val="130000"/>
+              </a:lnSpc>
+              <a:buSzPct val="100000"/>
+              <a:buChar char="•"/>
+            </a:pPr>
+            <a:r>
+              <a:rPr lang="en-US" sz="1400" dirty="0">
+                <a:solidFill>
+                  <a:srgbClr val="1A2233"/>
+                </a:solidFill>
+                <a:latin typeface="Calibri" pitchFamily="34" charset="0"/>
+                <a:ea typeface="Calibri" pitchFamily="34" charset="-122"/>
+                <a:cs typeface="Calibri" pitchFamily="34" charset="-120"/>
+              </a:rPr>
+              <a:t>Output: 150 independent probabilities</a:t>
+            </a:r>
+            <a:endParaRPr lang="en-US" sz="1400" dirty="0"/>
+          </a:p>
+          <a:p>
+            <a:pPr marL="342900" indent="-342900">
+              <a:lnSpc>
+                <a:spcPct val="130000"/>
+              </a:lnSpc>
+              <a:buSzPct val="100000"/>
+              <a:buChar char="•"/>
+            </a:pPr>
+            <a:r>
+              <a:rPr lang="en-US" sz="1400" dirty="0">
+                <a:solidFill>
+                  <a:srgbClr val="1A2233"/>
+                </a:solidFill>
+                <a:latin typeface="Calibri" pitchFamily="34" charset="0"/>
+                <a:ea typeface="Calibri" pitchFamily="34" charset="-122"/>
+                <a:cs typeface="Calibri" pitchFamily="34" charset="-120"/>
+              </a:rPr>
+              <a:t>One multi-label vector per record</a:t>
+            </a:r>
+            <a:endParaRPr lang="en-US" sz="1400" dirty="0"/>
+          </a:p>
+        </p:txBody>
+      </p:sp>
+    </p:spTree>
+  </p:cSld>
+  <p:clrMapOvr>
+    <a:masterClrMapping/>
+  </p:clrMapOvr>
+</p:sld>
+</file>
+
+<file path=ppt/slides/slide5.xml><?xml version="1.0" encoding="utf-8"?>
+<p:sld xmlns:a="http://schemas.openxmlformats.org/drawingml/2006/main" xmlns:r="http://schemas.openxmlformats.org/officeDocument/2006/relationships" xmlns:p="http://schemas.openxmlformats.org/presentationml/2006/main">
+  <p:cSld name="Slide 5">
+    <p:bg>
+      <p:bgPr>
+        <a:solidFill>
+          <a:srgbClr val="FFFFFF"/>
+        </a:solidFill>
+      </p:bgPr>
+    </p:bg>
+    <p:spTree>
+      <p:nvGrpSpPr>
+        <p:cNvPr id="1" name=""/>
+        <p:cNvGrpSpPr/>
+        <p:nvPr/>
+      </p:nvGrpSpPr>
+      <p:grpSpPr>
+        <a:xfrm>
+          <a:off x="0" y="0"/>
+          <a:ext cx="0" cy="0"/>
+          <a:chOff x="0" y="0"/>
+          <a:chExt cx="0" cy="0"/>
+        </a:xfrm>
+      </p:grpSpPr>
+      <p:sp>
+        <p:nvSpPr>
+          <p:cNvPr id="2" name="Text 0"/>
+          <p:cNvSpPr/>
+          <p:nvPr/>
+        </p:nvSpPr>
+        <p:spPr>
+          <a:xfrm>
+            <a:off x="548640" y="384048"/>
+            <a:ext cx="11064240" cy="274320"/>
+          </a:xfrm>
+          <a:prstGeom prst="rect">
+            <a:avLst/>
+          </a:prstGeom>
+          <a:noFill/>
+          <a:ln/>
+        </p:spPr>
+        <p:txBody>
+          <a:bodyPr wrap="square" lIns="0" tIns="0" rIns="0" bIns="0" rtlCol="0" anchor="ctr"/>
+          <a:lstStyle/>
+          <a:p>
+            <a:pPr indent="0" marL="0">
+              <a:buNone/>
+            </a:pPr>
+            <a:r>
+              <a:rPr lang="en-US" sz="1200" b="1" spc="300" kern="0" dirty="0">
+                <a:solidFill>
+                  <a:srgbClr val="065A82"/>
+                </a:solidFill>
+                <a:latin typeface="Calibri" pitchFamily="34" charset="0"/>
+                <a:ea typeface="Calibri" pitchFamily="34" charset="-122"/>
+                <a:cs typeface="Calibri" pitchFamily="34" charset="-120"/>
+              </a:rPr>
+              <a:t>THE DIFFERENCES THAT MATTER</a:t>
+            </a:r>
+            <a:endParaRPr lang="en-US" sz="1200" dirty="0"/>
+          </a:p>
+        </p:txBody>
+      </p:sp>
+      <p:sp>
+        <p:nvSpPr>
+          <p:cNvPr id="3" name="Text 1"/>
+          <p:cNvSpPr/>
+          <p:nvPr/>
+        </p:nvSpPr>
+        <p:spPr>
+          <a:xfrm>
+            <a:off x="548640" y="640080"/>
+            <a:ext cx="11064240" cy="731520"/>
+          </a:xfrm>
+          <a:prstGeom prst="rect">
+            <a:avLst/>
+          </a:prstGeom>
+          <a:noFill/>
+          <a:ln/>
+        </p:spPr>
+        <p:txBody>
+          <a:bodyPr wrap="square" lIns="0" tIns="0" rIns="0" bIns="0" rtlCol="0" anchor="ctr"/>
+          <a:lstStyle/>
+          <a:p>
+            <a:pPr indent="0" marL="0">
+              <a:buNone/>
+            </a:pPr>
+            <a:r>
+              <a:rPr lang="en-US" sz="3000" b="1" dirty="0">
+                <a:solidFill>
+                  <a:srgbClr val="1A2233"/>
+                </a:solidFill>
+                <a:latin typeface="Georgia" pitchFamily="34" charset="0"/>
+                <a:ea typeface="Georgia" pitchFamily="34" charset="-122"/>
+                <a:cs typeface="Georgia" pitchFamily="34" charset="-120"/>
+              </a:rPr>
               <a:t>Side-by-side</a:t>
             </a:r>
             <a:endParaRPr lang="en-US" sz="3000" dirty="0"/>
@@ -2799,7 +3458,7 @@
       </p:sp>
       <p:graphicFrame>
         <p:nvGraphicFramePr>
-          <p:cNvPr id="5" name="Table 0"/>
+          <p:cNvPr id="6" name="Table 0"/>
           <p:cNvGraphicFramePr>
             <a:graphicFrameLocks noGrp="1"/>
           </p:cNvGraphicFramePr>
@@ -3116,7 +3775,7 @@
                           <a:ea typeface="Calibri" pitchFamily="34" charset="-122"/>
                           <a:cs typeface="Calibri" pitchFamily="34" charset="-120"/>
                         </a:rPr>
-                        <a:t>Sequence: 1 label / ~1.3 s</a:t>
+                        <a:t>Sequence: 1 label / 1.28 s</a:t>
                       </a:r>
                       <a:endParaRPr lang="en-US" sz="1300" dirty="0">
                         <a:latin typeface="Calibri" charset="0"/>
@@ -4442,576 +5101,6 @@
 </p:sld>
 </file>
 
-<file path=ppt/slides/slide5.xml><?xml version="1.0" encoding="utf-8"?>
-<p:sld xmlns:a="http://schemas.openxmlformats.org/drawingml/2006/main" xmlns:r="http://schemas.openxmlformats.org/officeDocument/2006/relationships" xmlns:p="http://schemas.openxmlformats.org/presentationml/2006/main">
-  <p:cSld name="Slide 5">
-    <p:bg>
-      <p:bgPr>
-        <a:solidFill>
-          <a:srgbClr val="FFFFFF"/>
-        </a:solidFill>
-      </p:bgPr>
-    </p:bg>
-    <p:spTree>
-      <p:nvGrpSpPr>
-        <p:cNvPr id="1" name=""/>
-        <p:cNvGrpSpPr/>
-        <p:nvPr/>
-      </p:nvGrpSpPr>
-      <p:grpSpPr>
-        <a:xfrm>
-          <a:off x="0" y="0"/>
-          <a:ext cx="0" cy="0"/>
-          <a:chOff x="0" y="0"/>
-          <a:chExt cx="0" cy="0"/>
-        </a:xfrm>
-      </p:grpSpPr>
-      <p:sp>
-        <p:nvSpPr>
-          <p:cNvPr id="2" name="Text 0"/>
-          <p:cNvSpPr/>
-          <p:nvPr/>
-        </p:nvSpPr>
-        <p:spPr>
-          <a:xfrm>
-            <a:off x="548640" y="384048"/>
-            <a:ext cx="11064240" cy="274320"/>
-          </a:xfrm>
-          <a:prstGeom prst="rect">
-            <a:avLst/>
-          </a:prstGeom>
-          <a:noFill/>
-          <a:ln/>
-        </p:spPr>
-        <p:txBody>
-          <a:bodyPr wrap="square" lIns="0" tIns="0" rIns="0" bIns="0" rtlCol="0" anchor="ctr"/>
-          <a:lstStyle/>
-          <a:p>
-            <a:pPr indent="0" marL="0">
-              <a:buNone/>
-            </a:pPr>
-            <a:r>
-              <a:rPr lang="en-US" sz="1200" b="1" spc="300" kern="0" dirty="0">
-                <a:solidFill>
-                  <a:srgbClr val="065A82"/>
-                </a:solidFill>
-                <a:latin typeface="Calibri" pitchFamily="34" charset="0"/>
-                <a:ea typeface="Calibri" pitchFamily="34" charset="-122"/>
-                <a:cs typeface="Calibri" pitchFamily="34" charset="-120"/>
-              </a:rPr>
-              <a:t>NO SHARED ONTOLOGY VS ONE FIXED VOCABULARY</a:t>
-            </a:r>
-            <a:endParaRPr lang="en-US" sz="1200" dirty="0"/>
-          </a:p>
-        </p:txBody>
-      </p:sp>
-      <p:sp>
-        <p:nvSpPr>
-          <p:cNvPr id="3" name="Text 1"/>
-          <p:cNvSpPr/>
-          <p:nvPr/>
-        </p:nvSpPr>
-        <p:spPr>
-          <a:xfrm>
-            <a:off x="548640" y="640080"/>
-            <a:ext cx="11064240" cy="731520"/>
-          </a:xfrm>
-          <a:prstGeom prst="rect">
-            <a:avLst/>
-          </a:prstGeom>
-          <a:noFill/>
-          <a:ln/>
-        </p:spPr>
-        <p:txBody>
-          <a:bodyPr wrap="square" lIns="0" tIns="0" rIns="0" bIns="0" rtlCol="0" anchor="ctr"/>
-          <a:lstStyle/>
-          <a:p>
-            <a:pPr indent="0" marL="0">
-              <a:buNone/>
-            </a:pPr>
-            <a:r>
-              <a:rPr lang="en-US" sz="3000" b="1" dirty="0">
-                <a:solidFill>
-                  <a:srgbClr val="1A2233"/>
-                </a:solidFill>
-                <a:latin typeface="Georgia" pitchFamily="34" charset="0"/>
-                <a:ea typeface="Georgia" pitchFamily="34" charset="-122"/>
-                <a:cs typeface="Georgia" pitchFamily="34" charset="-120"/>
-              </a:rPr>
-              <a:t>Label handling across databases</a:t>
-            </a:r>
-            <a:endParaRPr lang="en-US" sz="3000" dirty="0"/>
-          </a:p>
-        </p:txBody>
-      </p:sp>
-      <p:sp>
-        <p:nvSpPr>
-          <p:cNvPr id="4" name="Shape 2"/>
-          <p:cNvSpPr/>
-          <p:nvPr/>
-        </p:nvSpPr>
-        <p:spPr>
-          <a:xfrm>
-            <a:off x="548640" y="1691640"/>
-            <a:ext cx="5257800" cy="3657600"/>
-          </a:xfrm>
-          <a:prstGeom prst="rect">
-            <a:avLst/>
-          </a:prstGeom>
-          <a:solidFill>
-            <a:srgbClr val="FFFFFF"/>
-          </a:solidFill>
-          <a:ln w="19050">
-            <a:solidFill>
-              <a:srgbClr val="065A82"/>
-            </a:solidFill>
-            <a:prstDash val="solid"/>
-          </a:ln>
-        </p:spPr>
-      </p:sp>
-      <p:sp>
-        <p:nvSpPr>
-          <p:cNvPr id="5" name="Text 3"/>
-          <p:cNvSpPr/>
-          <p:nvPr/>
-        </p:nvSpPr>
-        <p:spPr>
-          <a:xfrm>
-            <a:off x="868680" y="1920240"/>
-            <a:ext cx="4754880" cy="502920"/>
-          </a:xfrm>
-          <a:prstGeom prst="rect">
-            <a:avLst/>
-          </a:prstGeom>
-          <a:noFill/>
-          <a:ln/>
-        </p:spPr>
-        <p:txBody>
-          <a:bodyPr wrap="square" lIns="0" tIns="0" rIns="0" bIns="0" rtlCol="0" anchor="ctr"/>
-          <a:lstStyle/>
-          <a:p>
-            <a:pPr indent="0" marL="0">
-              <a:buNone/>
-            </a:pPr>
-            <a:r>
-              <a:rPr lang="en-US" sz="1800" b="1" dirty="0">
-                <a:solidFill>
-                  <a:srgbClr val="065A82"/>
-                </a:solidFill>
-                <a:latin typeface="Georgia" pitchFamily="34" charset="0"/>
-                <a:ea typeface="Georgia" pitchFamily="34" charset="-122"/>
-                <a:cs typeface="Georgia" pitchFamily="34" charset="-120"/>
-              </a:rPr>
-              <a:t>Stanford - no global label space</a:t>
-            </a:r>
-            <a:endParaRPr lang="en-US" sz="1800" dirty="0"/>
-          </a:p>
-        </p:txBody>
-      </p:sp>
-      <p:sp>
-        <p:nvSpPr>
-          <p:cNvPr id="6" name="Text 4"/>
-          <p:cNvSpPr/>
-          <p:nvPr/>
-        </p:nvSpPr>
-        <p:spPr>
-          <a:xfrm>
-            <a:off x="868680" y="2560320"/>
-            <a:ext cx="4709160" cy="2651760"/>
-          </a:xfrm>
-          <a:prstGeom prst="rect">
-            <a:avLst/>
-          </a:prstGeom>
-          <a:noFill/>
-          <a:ln/>
-        </p:spPr>
-        <p:txBody>
-          <a:bodyPr wrap="square" lIns="0" tIns="0" rIns="0" bIns="0" rtlCol="0" anchor="ctr"/>
-          <a:lstStyle/>
-          <a:p>
-            <a:pPr marL="342900" indent="-342900">
-              <a:lnSpc>
-                <a:spcPct val="125000"/>
-              </a:lnSpc>
-              <a:buSzPct val="100000"/>
-              <a:buChar char="•"/>
-            </a:pPr>
-            <a:r>
-              <a:rPr lang="en-US" sz="1350" dirty="0">
-                <a:solidFill>
-                  <a:srgbClr val="1A2233"/>
-                </a:solidFill>
-                <a:latin typeface="Calibri" pitchFamily="34" charset="0"/>
-                <a:ea typeface="Calibri" pitchFamily="34" charset="-122"/>
-                <a:cs typeface="Calibri" pitchFamily="34" charset="-120"/>
-              </a:rPr>
-              <a:t>Each checkpoint's classes auto-derived from its training data</a:t>
-            </a:r>
-            <a:endParaRPr lang="en-US" sz="1350" dirty="0"/>
-          </a:p>
-          <a:p>
-            <a:pPr marL="342900" indent="-342900">
-              <a:lnSpc>
-                <a:spcPct val="125000"/>
-              </a:lnSpc>
-              <a:buSzPct val="100000"/>
-              <a:buChar char="•"/>
-            </a:pPr>
-            <a:r>
-              <a:rPr lang="en-US" sz="1350" dirty="0">
-                <a:solidFill>
-                  <a:srgbClr val="1A2233"/>
-                </a:solidFill>
-                <a:latin typeface="Calibri" pitchFamily="34" charset="0"/>
-                <a:ea typeface="Calibri" pitchFamily="34" charset="-122"/>
-                <a:cs typeface="Calibri" pitchFamily="34" charset="-120"/>
-              </a:rPr>
-              <a:t>cinc17 -&gt; A / N / O / ~     mitdb -&gt; SINUS / BIGEMINY / TRIGEMINY / VT</a:t>
-            </a:r>
-            <a:endParaRPr lang="en-US" sz="1350" dirty="0"/>
-          </a:p>
-          <a:p>
-            <a:pPr marL="342900" indent="-342900">
-              <a:lnSpc>
-                <a:spcPct val="125000"/>
-              </a:lnSpc>
-              <a:buSzPct val="100000"/>
-              <a:buChar char="•"/>
-            </a:pPr>
-            <a:r>
-              <a:rPr lang="en-US" sz="1350" dirty="0">
-                <a:solidFill>
-                  <a:srgbClr val="1A2233"/>
-                </a:solidFill>
-                <a:latin typeface="Calibri" pitchFamily="34" charset="0"/>
-                <a:ea typeface="Calibri" pitchFamily="34" charset="-122"/>
-                <a:cs typeface="Calibri" pitchFamily="34" charset="-120"/>
-              </a:rPr>
-              <a:t>New database = RETRAIN (new checkpoint) OR HAND-MAP</a:t>
-            </a:r>
-            <a:endParaRPr lang="en-US" sz="1350" dirty="0"/>
-          </a:p>
-          <a:p>
-            <a:pPr marL="342900" indent="-342900">
-              <a:lnSpc>
-                <a:spcPct val="125000"/>
-              </a:lnSpc>
-              <a:buSzPct val="100000"/>
-              <a:buChar char="•"/>
-            </a:pPr>
-            <a:r>
-              <a:rPr lang="en-US" sz="1350" dirty="0">
-                <a:solidFill>
-                  <a:srgbClr val="1A2233"/>
-                </a:solidFill>
-                <a:latin typeface="Calibri" pitchFamily="34" charset="0"/>
-                <a:ea typeface="Calibri" pitchFamily="34" charset="-122"/>
-                <a:cs typeface="Calibri" pitchFamily="34" charset="-120"/>
-              </a:rPr>
-              <a:t>Hand-map = per-script LABEL_MAP dict, lossy, not centralized</a:t>
-            </a:r>
-            <a:endParaRPr lang="en-US" sz="1350" dirty="0"/>
-          </a:p>
-          <a:p>
-            <a:pPr marL="342900" indent="-342900">
-              <a:lnSpc>
-                <a:spcPct val="125000"/>
-              </a:lnSpc>
-              <a:buSzPct val="100000"/>
-              <a:buChar char="•"/>
-            </a:pPr>
-            <a:r>
-              <a:rPr lang="en-US" sz="1350" dirty="0">
-                <a:solidFill>
-                  <a:srgbClr val="1A2233"/>
-                </a:solidFill>
-                <a:latin typeface="Calibri" pitchFamily="34" charset="0"/>
-                <a:ea typeface="Calibri" pitchFamily="34" charset="-122"/>
-                <a:cs typeface="Calibri" pitchFamily="34" charset="-120"/>
-              </a:rPr>
-              <a:t>No reusable, enforced cross-dataset mapping</a:t>
-            </a:r>
-            <a:endParaRPr lang="en-US" sz="1350" dirty="0"/>
-          </a:p>
-        </p:txBody>
-      </p:sp>
-      <p:sp>
-        <p:nvSpPr>
-          <p:cNvPr id="7" name="Shape 5"/>
-          <p:cNvSpPr/>
-          <p:nvPr/>
-        </p:nvSpPr>
-        <p:spPr>
-          <a:xfrm>
-            <a:off x="6355080" y="1691640"/>
-            <a:ext cx="5257800" cy="3657600"/>
-          </a:xfrm>
-          <a:prstGeom prst="rect">
-            <a:avLst/>
-          </a:prstGeom>
-          <a:solidFill>
-            <a:srgbClr val="FFFFFF"/>
-          </a:solidFill>
-          <a:ln w="19050">
-            <a:solidFill>
-              <a:srgbClr val="1C7293"/>
-            </a:solidFill>
-            <a:prstDash val="solid"/>
-          </a:ln>
-        </p:spPr>
-      </p:sp>
-      <p:sp>
-        <p:nvSpPr>
-          <p:cNvPr id="8" name="Text 6"/>
-          <p:cNvSpPr/>
-          <p:nvPr/>
-        </p:nvSpPr>
-        <p:spPr>
-          <a:xfrm>
-            <a:off x="6675120" y="1920240"/>
-            <a:ext cx="4754880" cy="502920"/>
-          </a:xfrm>
-          <a:prstGeom prst="rect">
-            <a:avLst/>
-          </a:prstGeom>
-          <a:noFill/>
-          <a:ln/>
-        </p:spPr>
-        <p:txBody>
-          <a:bodyPr wrap="square" lIns="0" tIns="0" rIns="0" bIns="0" rtlCol="0" anchor="ctr"/>
-          <a:lstStyle/>
-          <a:p>
-            <a:pPr indent="0" marL="0">
-              <a:buNone/>
-            </a:pPr>
-            <a:r>
-              <a:rPr lang="en-US" sz="1800" b="1" dirty="0">
-                <a:solidFill>
-                  <a:srgbClr val="1C7293"/>
-                </a:solidFill>
-                <a:latin typeface="Georgia" pitchFamily="34" charset="0"/>
-                <a:ea typeface="Georgia" pitchFamily="34" charset="-122"/>
-                <a:cs typeface="Georgia" pitchFamily="34" charset="-120"/>
-              </a:rPr>
-              <a:t>ECGFounder - one fixed vocabulary</a:t>
-            </a:r>
-            <a:endParaRPr lang="en-US" sz="1800" dirty="0"/>
-          </a:p>
-        </p:txBody>
-      </p:sp>
-      <p:sp>
-        <p:nvSpPr>
-          <p:cNvPr id="9" name="Text 7"/>
-          <p:cNvSpPr/>
-          <p:nvPr/>
-        </p:nvSpPr>
-        <p:spPr>
-          <a:xfrm>
-            <a:off x="6675120" y="2560320"/>
-            <a:ext cx="4709160" cy="2651760"/>
-          </a:xfrm>
-          <a:prstGeom prst="rect">
-            <a:avLst/>
-          </a:prstGeom>
-          <a:noFill/>
-          <a:ln/>
-        </p:spPr>
-        <p:txBody>
-          <a:bodyPr wrap="square" lIns="0" tIns="0" rIns="0" bIns="0" rtlCol="0" anchor="ctr"/>
-          <a:lstStyle/>
-          <a:p>
-            <a:pPr marL="342900" indent="-342900">
-              <a:lnSpc>
-                <a:spcPct val="125000"/>
-              </a:lnSpc>
-              <a:buSzPct val="100000"/>
-              <a:buChar char="•"/>
-            </a:pPr>
-            <a:r>
-              <a:rPr lang="en-US" sz="1350" dirty="0">
-                <a:solidFill>
-                  <a:srgbClr val="1A2233"/>
-                </a:solidFill>
-                <a:latin typeface="Calibri" pitchFamily="34" charset="0"/>
-                <a:ea typeface="Calibri" pitchFamily="34" charset="-122"/>
-                <a:cs typeface="Calibri" pitchFamily="34" charset="-120"/>
-              </a:rPr>
-              <a:t>One fixed 150-label space, pinned once (tasks.txt)</a:t>
-            </a:r>
-            <a:endParaRPr lang="en-US" sz="1350" dirty="0"/>
-          </a:p>
-          <a:p>
-            <a:pPr marL="342900" indent="-342900">
-              <a:lnSpc>
-                <a:spcPct val="125000"/>
-              </a:lnSpc>
-              <a:buSzPct val="100000"/>
-              <a:buChar char="•"/>
-            </a:pPr>
-            <a:r>
-              <a:rPr lang="en-US" sz="1350" dirty="0">
-                <a:solidFill>
-                  <a:srgbClr val="1A2233"/>
-                </a:solidFill>
-                <a:latin typeface="Calibri" pitchFamily="34" charset="0"/>
-                <a:ea typeface="Calibri" pitchFamily="34" charset="-122"/>
-                <a:cs typeface="Calibri" pitchFamily="34" charset="-120"/>
-              </a:rPr>
-              <a:t>Every dataset mapped INTO that space, not the reverse</a:t>
-            </a:r>
-            <a:endParaRPr lang="en-US" sz="1350" dirty="0"/>
-          </a:p>
-          <a:p>
-            <a:pPr marL="342900" indent="-342900">
-              <a:lnSpc>
-                <a:spcPct val="125000"/>
-              </a:lnSpc>
-              <a:buSzPct val="100000"/>
-              <a:buChar char="•"/>
-            </a:pPr>
-            <a:r>
-              <a:rPr lang="en-US" sz="1350" dirty="0">
-                <a:solidFill>
-                  <a:srgbClr val="1A2233"/>
-                </a:solidFill>
-                <a:latin typeface="Calibri" pitchFamily="34" charset="0"/>
-                <a:ea typeface="Calibri" pitchFamily="34" charset="-122"/>
-                <a:cs typeface="Calibri" pitchFamily="34" charset="-120"/>
-              </a:rPr>
-              <a:t>Centralized label_config + GLOBAL_LABEL_MAP.md (single source)</a:t>
-            </a:r>
-            <a:endParaRPr lang="en-US" sz="1350" dirty="0"/>
-          </a:p>
-          <a:p>
-            <a:pPr marL="342900" indent="-342900">
-              <a:lnSpc>
-                <a:spcPct val="125000"/>
-              </a:lnSpc>
-              <a:buSzPct val="100000"/>
-              <a:buChar char="•"/>
-            </a:pPr>
-            <a:r>
-              <a:rPr lang="en-US" sz="1350" dirty="0">
-                <a:solidFill>
-                  <a:srgbClr val="1A2233"/>
-                </a:solidFill>
-                <a:latin typeface="Calibri" pitchFamily="34" charset="0"/>
-                <a:ea typeface="Calibri" pitchFamily="34" charset="-122"/>
-                <a:cs typeface="Calibri" pitchFamily="34" charset="-120"/>
-              </a:rPr>
-              <a:t>Import-time enforced - fails to load on drift</a:t>
-            </a:r>
-            <a:endParaRPr lang="en-US" sz="1350" dirty="0"/>
-          </a:p>
-          <a:p>
-            <a:pPr marL="342900" indent="-342900">
-              <a:lnSpc>
-                <a:spcPct val="125000"/>
-              </a:lnSpc>
-              <a:buSzPct val="100000"/>
-              <a:buChar char="•"/>
-            </a:pPr>
-            <a:r>
-              <a:rPr lang="en-US" sz="1350" dirty="0">
-                <a:solidFill>
-                  <a:srgbClr val="1A2233"/>
-                </a:solidFill>
-                <a:latin typeface="Calibri" pitchFamily="34" charset="0"/>
-                <a:ea typeface="Calibri" pitchFamily="34" charset="-122"/>
-                <a:cs typeface="Calibri" pitchFamily="34" charset="-120"/>
-              </a:rPr>
-              <a:t>New database = a mapping entry, backbone untouched</a:t>
-            </a:r>
-            <a:endParaRPr lang="en-US" sz="1350" dirty="0"/>
-          </a:p>
-        </p:txBody>
-      </p:sp>
-      <p:sp>
-        <p:nvSpPr>
-          <p:cNvPr id="10" name="Shape 8"/>
-          <p:cNvSpPr/>
-          <p:nvPr/>
-        </p:nvSpPr>
-        <p:spPr>
-          <a:xfrm>
-            <a:off x="548640" y="5532120"/>
-            <a:ext cx="11064240" cy="868680"/>
-          </a:xfrm>
-          <a:prstGeom prst="rect">
-            <a:avLst/>
-          </a:prstGeom>
-          <a:solidFill>
-            <a:srgbClr val="EEF3F6"/>
-          </a:solidFill>
-          <a:ln w="6350">
-            <a:solidFill>
-              <a:srgbClr val="D6DEE6"/>
-            </a:solidFill>
-            <a:prstDash val="solid"/>
-          </a:ln>
-        </p:spPr>
-      </p:sp>
-      <p:sp>
-        <p:nvSpPr>
-          <p:cNvPr id="11" name="Text 9"/>
-          <p:cNvSpPr/>
-          <p:nvPr/>
-        </p:nvSpPr>
-        <p:spPr>
-          <a:xfrm>
-            <a:off x="777240" y="5650992"/>
-            <a:ext cx="10607040" cy="640080"/>
-          </a:xfrm>
-          <a:prstGeom prst="rect">
-            <a:avLst/>
-          </a:prstGeom>
-          <a:noFill/>
-          <a:ln/>
-        </p:spPr>
-        <p:txBody>
-          <a:bodyPr wrap="square" lIns="0" tIns="0" rIns="0" bIns="0" rtlCol="0" anchor="ctr"/>
-          <a:lstStyle/>
-          <a:p>
-            <a:pPr indent="0" marL="0">
-              <a:buNone/>
-            </a:pPr>
-            <a:r>
-              <a:rPr lang="en-US" sz="1350" b="1" dirty="0">
-                <a:solidFill>
-                  <a:srgbClr val="21295C"/>
-                </a:solidFill>
-                <a:latin typeface="Calibri" pitchFamily="34" charset="0"/>
-                <a:ea typeface="Calibri" pitchFamily="34" charset="-122"/>
-                <a:cs typeface="Calibri" pitchFamily="34" charset="-120"/>
-              </a:rPr>
-              <a:t>Takeaway:  </a:t>
-            </a:r>
-            <a:pPr indent="0" marL="0">
-              <a:buNone/>
-            </a:pPr>
-            <a:r>
-              <a:rPr lang="en-US" sz="1350" dirty="0">
-                <a:solidFill>
-                  <a:srgbClr val="1A2233"/>
-                </a:solidFill>
-                <a:latin typeface="Calibri" pitchFamily="34" charset="0"/>
-                <a:ea typeface="Calibri" pitchFamily="34" charset="-122"/>
-                <a:cs typeface="Calibri" pitchFamily="34" charset="-120"/>
-              </a:rPr>
-              <a:t>Stanford ties one model to one dataset's labels (retrain or hand-map per DB); ECGFounder's fixed vocabulary + centralized mapping is the foundation-model advantage for multi-dataset work.</a:t>
-            </a:r>
-            <a:endParaRPr lang="en-US" sz="1350" dirty="0"/>
-          </a:p>
-        </p:txBody>
-      </p:sp>
-    </p:spTree>
-  </p:cSld>
-  <p:clrMapOvr>
-    <a:masterClrMapping/>
-  </p:clrMapOvr>
-</p:sld>
-</file>
-
 <file path=ppt/slides/slide6.xml><?xml version="1.0" encoding="utf-8"?>
 <p:sld xmlns:a="http://schemas.openxmlformats.org/drawingml/2006/main" xmlns:r="http://schemas.openxmlformats.org/officeDocument/2006/relationships" xmlns:p="http://schemas.openxmlformats.org/presentationml/2006/main">
   <p:cSld name="Slide 6">
@@ -5069,7 +5158,7 @@
                 <a:ea typeface="Calibri" pitchFamily="34" charset="-122"/>
                 <a:cs typeface="Calibri" pitchFamily="34" charset="-120"/>
               </a:rPr>
-              <a:t>BOTH RUN ON MIT-BIH, IN DIFFERENT SETTINGS</a:t>
+              <a:t>NO SHARED ONTOLOGY VS ONE FIXED VOCABULARY</a:t>
             </a:r>
             <a:endParaRPr lang="en-US" sz="1200" dirty="0"/>
           </a:p>
@@ -5108,7 +5197,7 @@
                 <a:ea typeface="Georgia" pitchFamily="34" charset="-122"/>
                 <a:cs typeface="Georgia" pitchFamily="34" charset="-120"/>
               </a:rPr>
-              <a:t>Head-to-head: MIT-BIH</a:t>
+              <a:t>Label handling across databases</a:t>
             </a:r>
             <a:endParaRPr lang="en-US" sz="3000" dirty="0"/>
           </a:p>
@@ -5123,15 +5212,397 @@
         <p:spPr>
           <a:xfrm>
             <a:off x="548640" y="1691640"/>
-            <a:ext cx="5257800" cy="2148840"/>
+            <a:ext cx="5257800" cy="3657600"/>
           </a:xfrm>
           <a:prstGeom prst="rect">
             <a:avLst/>
           </a:prstGeom>
           <a:solidFill>
-            <a:srgbClr val="F4F7FA"/>
+            <a:srgbClr val="FFFFFF"/>
           </a:solidFill>
-          <a:ln w="12700">
+          <a:ln w="19050">
+            <a:solidFill>
+              <a:srgbClr val="065A82"/>
+            </a:solidFill>
+            <a:prstDash val="solid"/>
+          </a:ln>
+        </p:spPr>
+      </p:sp>
+      <p:sp>
+        <p:nvSpPr>
+          <p:cNvPr id="5" name="Text 3"/>
+          <p:cNvSpPr/>
+          <p:nvPr/>
+        </p:nvSpPr>
+        <p:spPr>
+          <a:xfrm>
+            <a:off x="868680" y="1920240"/>
+            <a:ext cx="4754880" cy="502920"/>
+          </a:xfrm>
+          <a:prstGeom prst="rect">
+            <a:avLst/>
+          </a:prstGeom>
+          <a:noFill/>
+          <a:ln/>
+        </p:spPr>
+        <p:txBody>
+          <a:bodyPr wrap="square" lIns="0" tIns="0" rIns="0" bIns="0" rtlCol="0" anchor="ctr"/>
+          <a:lstStyle/>
+          <a:p>
+            <a:pPr indent="0" marL="0">
+              <a:buNone/>
+            </a:pPr>
+            <a:r>
+              <a:rPr lang="en-US" sz="1800" b="1" dirty="0">
+                <a:solidFill>
+                  <a:srgbClr val="065A82"/>
+                </a:solidFill>
+                <a:latin typeface="Georgia" pitchFamily="34" charset="0"/>
+                <a:ea typeface="Georgia" pitchFamily="34" charset="-122"/>
+                <a:cs typeface="Georgia" pitchFamily="34" charset="-120"/>
+              </a:rPr>
+              <a:t>Stanford - no global label space</a:t>
+            </a:r>
+            <a:endParaRPr lang="en-US" sz="1800" dirty="0"/>
+          </a:p>
+        </p:txBody>
+      </p:sp>
+      <p:sp>
+        <p:nvSpPr>
+          <p:cNvPr id="6" name="Text 4"/>
+          <p:cNvSpPr/>
+          <p:nvPr/>
+        </p:nvSpPr>
+        <p:spPr>
+          <a:xfrm>
+            <a:off x="868680" y="2560320"/>
+            <a:ext cx="4709160" cy="2651760"/>
+          </a:xfrm>
+          <a:prstGeom prst="rect">
+            <a:avLst/>
+          </a:prstGeom>
+          <a:noFill/>
+          <a:ln/>
+        </p:spPr>
+        <p:txBody>
+          <a:bodyPr wrap="square" lIns="0" tIns="0" rIns="0" bIns="0" rtlCol="0" anchor="ctr"/>
+          <a:lstStyle/>
+          <a:p>
+            <a:pPr marL="342900" indent="-342900">
+              <a:lnSpc>
+                <a:spcPct val="125000"/>
+              </a:lnSpc>
+              <a:buSzPct val="100000"/>
+              <a:buChar char="•"/>
+            </a:pPr>
+            <a:r>
+              <a:rPr lang="en-US" sz="1350" dirty="0">
+                <a:solidFill>
+                  <a:srgbClr val="1A2233"/>
+                </a:solidFill>
+                <a:latin typeface="Calibri" pitchFamily="34" charset="0"/>
+                <a:ea typeface="Calibri" pitchFamily="34" charset="-122"/>
+                <a:cs typeface="Calibri" pitchFamily="34" charset="-120"/>
+              </a:rPr>
+              <a:t>Each checkpoint's classes auto-derived from its training data</a:t>
+            </a:r>
+            <a:endParaRPr lang="en-US" sz="1350" dirty="0"/>
+          </a:p>
+          <a:p>
+            <a:pPr marL="342900" indent="-342900">
+              <a:lnSpc>
+                <a:spcPct val="125000"/>
+              </a:lnSpc>
+              <a:buSzPct val="100000"/>
+              <a:buChar char="•"/>
+            </a:pPr>
+            <a:r>
+              <a:rPr lang="en-US" sz="1350" dirty="0">
+                <a:solidFill>
+                  <a:srgbClr val="1A2233"/>
+                </a:solidFill>
+                <a:latin typeface="Calibri" pitchFamily="34" charset="0"/>
+                <a:ea typeface="Calibri" pitchFamily="34" charset="-122"/>
+                <a:cs typeface="Calibri" pitchFamily="34" charset="-120"/>
+              </a:rPr>
+              <a:t>cinc17 -&gt; A / N / O / ~     mitdb -&gt; SINUS / BIGEMINY / TRIGEMINY / VT</a:t>
+            </a:r>
+            <a:endParaRPr lang="en-US" sz="1350" dirty="0"/>
+          </a:p>
+          <a:p>
+            <a:pPr marL="342900" indent="-342900">
+              <a:lnSpc>
+                <a:spcPct val="125000"/>
+              </a:lnSpc>
+              <a:buSzPct val="100000"/>
+              <a:buChar char="•"/>
+            </a:pPr>
+            <a:r>
+              <a:rPr lang="en-US" sz="1350" dirty="0">
+                <a:solidFill>
+                  <a:srgbClr val="1A2233"/>
+                </a:solidFill>
+                <a:latin typeface="Calibri" pitchFamily="34" charset="0"/>
+                <a:ea typeface="Calibri" pitchFamily="34" charset="-122"/>
+                <a:cs typeface="Calibri" pitchFamily="34" charset="-120"/>
+              </a:rPr>
+              <a:t>New database = RETRAIN (new checkpoint) OR HAND-MAP</a:t>
+            </a:r>
+            <a:endParaRPr lang="en-US" sz="1350" dirty="0"/>
+          </a:p>
+          <a:p>
+            <a:pPr marL="342900" indent="-342900">
+              <a:lnSpc>
+                <a:spcPct val="125000"/>
+              </a:lnSpc>
+              <a:buSzPct val="100000"/>
+              <a:buChar char="•"/>
+            </a:pPr>
+            <a:r>
+              <a:rPr lang="en-US" sz="1350" dirty="0">
+                <a:solidFill>
+                  <a:srgbClr val="1A2233"/>
+                </a:solidFill>
+                <a:latin typeface="Calibri" pitchFamily="34" charset="0"/>
+                <a:ea typeface="Calibri" pitchFamily="34" charset="-122"/>
+                <a:cs typeface="Calibri" pitchFamily="34" charset="-120"/>
+              </a:rPr>
+              <a:t>Hand-map = per-script LABEL_MAP dict, lossy, not centralized</a:t>
+            </a:r>
+            <a:endParaRPr lang="en-US" sz="1350" dirty="0"/>
+          </a:p>
+          <a:p>
+            <a:pPr marL="342900" indent="-342900">
+              <a:lnSpc>
+                <a:spcPct val="125000"/>
+              </a:lnSpc>
+              <a:buSzPct val="100000"/>
+              <a:buChar char="•"/>
+            </a:pPr>
+            <a:r>
+              <a:rPr lang="en-US" sz="1350" dirty="0">
+                <a:solidFill>
+                  <a:srgbClr val="1A2233"/>
+                </a:solidFill>
+                <a:latin typeface="Calibri" pitchFamily="34" charset="0"/>
+                <a:ea typeface="Calibri" pitchFamily="34" charset="-122"/>
+                <a:cs typeface="Calibri" pitchFamily="34" charset="-120"/>
+              </a:rPr>
+              <a:t>No reusable, enforced cross-dataset mapping</a:t>
+            </a:r>
+            <a:endParaRPr lang="en-US" sz="1350" dirty="0"/>
+          </a:p>
+        </p:txBody>
+      </p:sp>
+      <p:sp>
+        <p:nvSpPr>
+          <p:cNvPr id="7" name="Shape 5"/>
+          <p:cNvSpPr/>
+          <p:nvPr/>
+        </p:nvSpPr>
+        <p:spPr>
+          <a:xfrm>
+            <a:off x="6355080" y="1691640"/>
+            <a:ext cx="5257800" cy="3657600"/>
+          </a:xfrm>
+          <a:prstGeom prst="rect">
+            <a:avLst/>
+          </a:prstGeom>
+          <a:solidFill>
+            <a:srgbClr val="FFFFFF"/>
+          </a:solidFill>
+          <a:ln w="19050">
+            <a:solidFill>
+              <a:srgbClr val="1C7293"/>
+            </a:solidFill>
+            <a:prstDash val="solid"/>
+          </a:ln>
+        </p:spPr>
+      </p:sp>
+      <p:sp>
+        <p:nvSpPr>
+          <p:cNvPr id="8" name="Text 6"/>
+          <p:cNvSpPr/>
+          <p:nvPr/>
+        </p:nvSpPr>
+        <p:spPr>
+          <a:xfrm>
+            <a:off x="6675120" y="1920240"/>
+            <a:ext cx="4754880" cy="502920"/>
+          </a:xfrm>
+          <a:prstGeom prst="rect">
+            <a:avLst/>
+          </a:prstGeom>
+          <a:noFill/>
+          <a:ln/>
+        </p:spPr>
+        <p:txBody>
+          <a:bodyPr wrap="square" lIns="0" tIns="0" rIns="0" bIns="0" rtlCol="0" anchor="ctr"/>
+          <a:lstStyle/>
+          <a:p>
+            <a:pPr indent="0" marL="0">
+              <a:buNone/>
+            </a:pPr>
+            <a:r>
+              <a:rPr lang="en-US" sz="1800" b="1" dirty="0">
+                <a:solidFill>
+                  <a:srgbClr val="1C7293"/>
+                </a:solidFill>
+                <a:latin typeface="Georgia" pitchFamily="34" charset="0"/>
+                <a:ea typeface="Georgia" pitchFamily="34" charset="-122"/>
+                <a:cs typeface="Georgia" pitchFamily="34" charset="-120"/>
+              </a:rPr>
+              <a:t>ECGFounder - one fixed vocabulary</a:t>
+            </a:r>
+            <a:endParaRPr lang="en-US" sz="1800" dirty="0"/>
+          </a:p>
+        </p:txBody>
+      </p:sp>
+      <p:sp>
+        <p:nvSpPr>
+          <p:cNvPr id="9" name="Text 7"/>
+          <p:cNvSpPr/>
+          <p:nvPr/>
+        </p:nvSpPr>
+        <p:spPr>
+          <a:xfrm>
+            <a:off x="6675120" y="2560320"/>
+            <a:ext cx="4709160" cy="2651760"/>
+          </a:xfrm>
+          <a:prstGeom prst="rect">
+            <a:avLst/>
+          </a:prstGeom>
+          <a:noFill/>
+          <a:ln/>
+        </p:spPr>
+        <p:txBody>
+          <a:bodyPr wrap="square" lIns="0" tIns="0" rIns="0" bIns="0" rtlCol="0" anchor="ctr"/>
+          <a:lstStyle/>
+          <a:p>
+            <a:pPr marL="342900" indent="-342900">
+              <a:lnSpc>
+                <a:spcPct val="125000"/>
+              </a:lnSpc>
+              <a:buSzPct val="100000"/>
+              <a:buChar char="•"/>
+            </a:pPr>
+            <a:r>
+              <a:rPr lang="en-US" sz="1350" dirty="0">
+                <a:solidFill>
+                  <a:srgbClr val="1A2233"/>
+                </a:solidFill>
+                <a:latin typeface="Calibri" pitchFamily="34" charset="0"/>
+                <a:ea typeface="Calibri" pitchFamily="34" charset="-122"/>
+                <a:cs typeface="Calibri" pitchFamily="34" charset="-120"/>
+              </a:rPr>
+              <a:t>One fixed 150-label space, pinned once (tasks.txt)</a:t>
+            </a:r>
+            <a:endParaRPr lang="en-US" sz="1350" dirty="0"/>
+          </a:p>
+          <a:p>
+            <a:pPr marL="342900" indent="-342900">
+              <a:lnSpc>
+                <a:spcPct val="125000"/>
+              </a:lnSpc>
+              <a:buSzPct val="100000"/>
+              <a:buChar char="•"/>
+            </a:pPr>
+            <a:r>
+              <a:rPr lang="en-US" sz="1350" dirty="0">
+                <a:solidFill>
+                  <a:srgbClr val="1A2233"/>
+                </a:solidFill>
+                <a:latin typeface="Calibri" pitchFamily="34" charset="0"/>
+                <a:ea typeface="Calibri" pitchFamily="34" charset="-122"/>
+                <a:cs typeface="Calibri" pitchFamily="34" charset="-120"/>
+              </a:rPr>
+              <a:t>Every dataset mapped INTO that space, not the reverse</a:t>
+            </a:r>
+            <a:endParaRPr lang="en-US" sz="1350" dirty="0"/>
+          </a:p>
+          <a:p>
+            <a:pPr marL="342900" indent="-342900">
+              <a:lnSpc>
+                <a:spcPct val="125000"/>
+              </a:lnSpc>
+              <a:buSzPct val="100000"/>
+              <a:buChar char="•"/>
+            </a:pPr>
+            <a:r>
+              <a:rPr lang="en-US" sz="1350" dirty="0">
+                <a:solidFill>
+                  <a:srgbClr val="1A2233"/>
+                </a:solidFill>
+                <a:latin typeface="Calibri" pitchFamily="34" charset="0"/>
+                <a:ea typeface="Calibri" pitchFamily="34" charset="-122"/>
+                <a:cs typeface="Calibri" pitchFamily="34" charset="-120"/>
+              </a:rPr>
+              <a:t>Centralized label_config + GLOBAL_LABEL_MAP.md (single source)</a:t>
+            </a:r>
+            <a:endParaRPr lang="en-US" sz="1350" dirty="0"/>
+          </a:p>
+          <a:p>
+            <a:pPr marL="342900" indent="-342900">
+              <a:lnSpc>
+                <a:spcPct val="125000"/>
+              </a:lnSpc>
+              <a:buSzPct val="100000"/>
+              <a:buChar char="•"/>
+            </a:pPr>
+            <a:r>
+              <a:rPr lang="en-US" sz="1350" dirty="0">
+                <a:solidFill>
+                  <a:srgbClr val="1A2233"/>
+                </a:solidFill>
+                <a:latin typeface="Calibri" pitchFamily="34" charset="0"/>
+                <a:ea typeface="Calibri" pitchFamily="34" charset="-122"/>
+                <a:cs typeface="Calibri" pitchFamily="34" charset="-120"/>
+              </a:rPr>
+              <a:t>Import-time enforced - fails to load on drift</a:t>
+            </a:r>
+            <a:endParaRPr lang="en-US" sz="1350" dirty="0"/>
+          </a:p>
+          <a:p>
+            <a:pPr marL="342900" indent="-342900">
+              <a:lnSpc>
+                <a:spcPct val="125000"/>
+              </a:lnSpc>
+              <a:buSzPct val="100000"/>
+              <a:buChar char="•"/>
+            </a:pPr>
+            <a:r>
+              <a:rPr lang="en-US" sz="1350" dirty="0">
+                <a:solidFill>
+                  <a:srgbClr val="1A2233"/>
+                </a:solidFill>
+                <a:latin typeface="Calibri" pitchFamily="34" charset="0"/>
+                <a:ea typeface="Calibri" pitchFamily="34" charset="-122"/>
+                <a:cs typeface="Calibri" pitchFamily="34" charset="-120"/>
+              </a:rPr>
+              <a:t>New database = a mapping entry, backbone untouched</a:t>
+            </a:r>
+            <a:endParaRPr lang="en-US" sz="1350" dirty="0"/>
+          </a:p>
+        </p:txBody>
+      </p:sp>
+      <p:sp>
+        <p:nvSpPr>
+          <p:cNvPr id="10" name="Shape 8"/>
+          <p:cNvSpPr/>
+          <p:nvPr/>
+        </p:nvSpPr>
+        <p:spPr>
+          <a:xfrm>
+            <a:off x="548640" y="5532120"/>
+            <a:ext cx="11064240" cy="868680"/>
+          </a:xfrm>
+          <a:prstGeom prst="rect">
+            <a:avLst/>
+          </a:prstGeom>
+          <a:solidFill>
+            <a:srgbClr val="EEF3F6"/>
+          </a:solidFill>
+          <a:ln w="6350">
             <a:solidFill>
               <a:srgbClr val="D6DEE6"/>
             </a:solidFill>
@@ -5141,34 +5612,14 @@
       </p:sp>
       <p:sp>
         <p:nvSpPr>
-          <p:cNvPr id="5" name="Shape 3"/>
-          <p:cNvSpPr/>
-          <p:nvPr/>
-        </p:nvSpPr>
-        <p:spPr>
-          <a:xfrm>
-            <a:off x="548640" y="1691640"/>
-            <a:ext cx="5257800" cy="118872"/>
-          </a:xfrm>
-          <a:prstGeom prst="rect">
-            <a:avLst/>
-          </a:prstGeom>
-          <a:solidFill>
-            <a:srgbClr val="065A82"/>
-          </a:solidFill>
-          <a:ln/>
-        </p:spPr>
-      </p:sp>
-      <p:sp>
-        <p:nvSpPr>
-          <p:cNvPr id="6" name="Text 4"/>
-          <p:cNvSpPr/>
-          <p:nvPr/>
-        </p:nvSpPr>
-        <p:spPr>
-          <a:xfrm>
-            <a:off x="868680" y="1874520"/>
-            <a:ext cx="4663440" cy="365760"/>
+          <p:cNvPr id="11" name="Text 9"/>
+          <p:cNvSpPr/>
+          <p:nvPr/>
+        </p:nvSpPr>
+        <p:spPr>
+          <a:xfrm>
+            <a:off x="777240" y="5650992"/>
+            <a:ext cx="10607040" cy="640080"/>
           </a:xfrm>
           <a:prstGeom prst="rect">
             <a:avLst/>
@@ -5184,547 +5635,31 @@
               <a:buNone/>
             </a:pPr>
             <a:r>
-              <a:rPr lang="en-US" sz="1600" b="1" dirty="0">
-                <a:solidFill>
-                  <a:srgbClr val="065A82"/>
-                </a:solidFill>
-                <a:latin typeface="Georgia" pitchFamily="34" charset="0"/>
-                <a:ea typeface="Georgia" pitchFamily="34" charset="-122"/>
-                <a:cs typeface="Georgia" pitchFamily="34" charset="-120"/>
-              </a:rPr>
-              <a:t>Stanford 1D-ResNet</a:t>
-            </a:r>
-            <a:endParaRPr lang="en-US" sz="1600" dirty="0"/>
-          </a:p>
-        </p:txBody>
-      </p:sp>
-      <p:sp>
-        <p:nvSpPr>
-          <p:cNvPr id="7" name="Text 5"/>
-          <p:cNvSpPr/>
-          <p:nvPr/>
-        </p:nvSpPr>
-        <p:spPr>
-          <a:xfrm>
-            <a:off x="822960" y="2240280"/>
-            <a:ext cx="2011680" cy="1005840"/>
-          </a:xfrm>
-          <a:prstGeom prst="rect">
-            <a:avLst/>
-          </a:prstGeom>
-          <a:noFill/>
-          <a:ln/>
-        </p:spPr>
-        <p:txBody>
-          <a:bodyPr wrap="square" lIns="0" tIns="0" rIns="0" bIns="0" rtlCol="0" anchor="ctr"/>
-          <a:lstStyle/>
-          <a:p>
+              <a:rPr lang="en-US" sz="1350" b="1" dirty="0">
+                <a:solidFill>
+                  <a:srgbClr val="21295C"/>
+                </a:solidFill>
+                <a:latin typeface="Calibri" pitchFamily="34" charset="0"/>
+                <a:ea typeface="Calibri" pitchFamily="34" charset="-122"/>
+                <a:cs typeface="Calibri" pitchFamily="34" charset="-120"/>
+              </a:rPr>
+              <a:t>Takeaway:  </a:t>
+            </a:r>
             <a:pPr indent="0" marL="0">
               <a:buNone/>
             </a:pPr>
             <a:r>
-              <a:rPr lang="en-US" sz="4400" b="1" dirty="0">
+              <a:rPr lang="en-US" sz="1350" dirty="0">
                 <a:solidFill>
                   <a:srgbClr val="1A2233"/>
                 </a:solidFill>
-                <a:latin typeface="Georgia" pitchFamily="34" charset="0"/>
-                <a:ea typeface="Georgia" pitchFamily="34" charset="-122"/>
-                <a:cs typeface="Georgia" pitchFamily="34" charset="-120"/>
-              </a:rPr>
-              <a:t>~1.00</a:t>
-            </a:r>
-            <a:endParaRPr lang="en-US" sz="4400" dirty="0"/>
-          </a:p>
-        </p:txBody>
-      </p:sp>
-      <p:sp>
-        <p:nvSpPr>
-          <p:cNvPr id="8" name="Text 6"/>
-          <p:cNvSpPr/>
-          <p:nvPr/>
-        </p:nvSpPr>
-        <p:spPr>
-          <a:xfrm>
-            <a:off x="2880360" y="2258568"/>
-            <a:ext cx="2743200" cy="1325880"/>
-          </a:xfrm>
-          <a:prstGeom prst="rect">
-            <a:avLst/>
-          </a:prstGeom>
-          <a:noFill/>
-          <a:ln/>
-        </p:spPr>
-        <p:txBody>
-          <a:bodyPr wrap="square" lIns="0" tIns="0" rIns="0" bIns="0" rtlCol="0" anchor="ctr"/>
-          <a:lstStyle/>
-          <a:p>
-            <a:pPr indent="0" marL="0">
-              <a:lnSpc>
-                <a:spcPct val="115000"/>
-              </a:lnSpc>
-              <a:buNone/>
-            </a:pPr>
-            <a:r>
-              <a:rPr lang="en-US" sz="1200" dirty="0">
-                <a:solidFill>
-                  <a:srgbClr val="1A2233"/>
-                </a:solidFill>
-                <a:latin typeface="Calibri" pitchFamily="34" charset="0"/>
-                <a:ea typeface="Calibri" pitchFamily="34" charset="-122"/>
-                <a:cs typeface="Calibri" pitchFamily="34" charset="-120"/>
-              </a:rPr>
-              <a:t>accuracy on dev_split</a:t>
-            </a:r>
-            <a:endParaRPr lang="en-US" sz="1200" dirty="0"/>
-          </a:p>
-          <a:p>
-            <a:pPr indent="0" marL="0">
-              <a:lnSpc>
-                <a:spcPct val="115000"/>
-              </a:lnSpc>
-              <a:buNone/>
-            </a:pPr>
-            <a:r>
-              <a:rPr lang="en-US" sz="1200" dirty="0">
-                <a:solidFill>
-                  <a:srgbClr val="1A2233"/>
-                </a:solidFill>
-                <a:latin typeface="Calibri" pitchFamily="34" charset="0"/>
-                <a:ea typeface="Calibri" pitchFamily="34" charset="-122"/>
-                <a:cs typeface="Calibri" pitchFamily="34" charset="-120"/>
-              </a:rPr>
-              <a:t>SINUS F1 1.00 (n=1597)</a:t>
-            </a:r>
-            <a:endParaRPr lang="en-US" sz="1200" dirty="0"/>
-          </a:p>
-          <a:p>
-            <a:pPr indent="0" marL="0">
-              <a:lnSpc>
-                <a:spcPct val="115000"/>
-              </a:lnSpc>
-              <a:buNone/>
-            </a:pPr>
-            <a:r>
-              <a:rPr lang="en-US" sz="1200" dirty="0">
-                <a:solidFill>
-                  <a:srgbClr val="1A2233"/>
-                </a:solidFill>
-                <a:latin typeface="Calibri" pitchFamily="34" charset="0"/>
-                <a:ea typeface="Calibri" pitchFamily="34" charset="-122"/>
-                <a:cs typeface="Calibri" pitchFamily="34" charset="-120"/>
-              </a:rPr>
-              <a:t>BIGEMINY F1 0.96 (n=41)</a:t>
-            </a:r>
-            <a:endParaRPr lang="en-US" sz="1200" dirty="0"/>
-          </a:p>
-        </p:txBody>
-      </p:sp>
-      <p:sp>
-        <p:nvSpPr>
-          <p:cNvPr id="9" name="Text 7"/>
-          <p:cNvSpPr/>
-          <p:nvPr/>
-        </p:nvSpPr>
-        <p:spPr>
-          <a:xfrm>
-            <a:off x="868680" y="3520440"/>
-            <a:ext cx="4663440" cy="274320"/>
-          </a:xfrm>
-          <a:prstGeom prst="rect">
-            <a:avLst/>
-          </a:prstGeom>
-          <a:noFill/>
-          <a:ln/>
-        </p:spPr>
-        <p:txBody>
-          <a:bodyPr wrap="square" lIns="0" tIns="0" rIns="0" bIns="0" rtlCol="0" anchor="ctr"/>
-          <a:lstStyle/>
-          <a:p>
-            <a:pPr indent="0" marL="0">
-              <a:buNone/>
-            </a:pPr>
-            <a:r>
-              <a:rPr lang="en-US" sz="1100" b="1" i="1" dirty="0">
-                <a:solidFill>
-                  <a:srgbClr val="065A82"/>
-                </a:solidFill>
-                <a:latin typeface="Calibri" pitchFamily="34" charset="0"/>
-                <a:ea typeface="Calibri" pitchFamily="34" charset="-122"/>
-                <a:cs typeface="Calibri" pitchFamily="34" charset="-120"/>
-              </a:rPr>
-              <a:t>TRAINED ON MIT-BIH (in-distribution)</a:t>
-            </a:r>
-            <a:endParaRPr lang="en-US" sz="1100" dirty="0"/>
-          </a:p>
-        </p:txBody>
-      </p:sp>
-      <p:sp>
-        <p:nvSpPr>
-          <p:cNvPr id="10" name="Shape 8"/>
-          <p:cNvSpPr/>
-          <p:nvPr/>
-        </p:nvSpPr>
-        <p:spPr>
-          <a:xfrm>
-            <a:off x="6355080" y="1691640"/>
-            <a:ext cx="5257800" cy="2148840"/>
-          </a:xfrm>
-          <a:prstGeom prst="rect">
-            <a:avLst/>
-          </a:prstGeom>
-          <a:solidFill>
-            <a:srgbClr val="F4F7FA"/>
-          </a:solidFill>
-          <a:ln w="12700">
-            <a:solidFill>
-              <a:srgbClr val="D6DEE6"/>
-            </a:solidFill>
-            <a:prstDash val="solid"/>
-          </a:ln>
-        </p:spPr>
-      </p:sp>
-      <p:sp>
-        <p:nvSpPr>
-          <p:cNvPr id="11" name="Shape 9"/>
-          <p:cNvSpPr/>
-          <p:nvPr/>
-        </p:nvSpPr>
-        <p:spPr>
-          <a:xfrm>
-            <a:off x="6355080" y="1691640"/>
-            <a:ext cx="5257800" cy="118872"/>
-          </a:xfrm>
-          <a:prstGeom prst="rect">
-            <a:avLst/>
-          </a:prstGeom>
-          <a:solidFill>
-            <a:srgbClr val="1C7293"/>
-          </a:solidFill>
-          <a:ln/>
-        </p:spPr>
-      </p:sp>
-      <p:sp>
-        <p:nvSpPr>
-          <p:cNvPr id="12" name="Text 10"/>
-          <p:cNvSpPr/>
-          <p:nvPr/>
-        </p:nvSpPr>
-        <p:spPr>
-          <a:xfrm>
-            <a:off x="6675120" y="1874520"/>
-            <a:ext cx="4663440" cy="365760"/>
-          </a:xfrm>
-          <a:prstGeom prst="rect">
-            <a:avLst/>
-          </a:prstGeom>
-          <a:noFill/>
-          <a:ln/>
-        </p:spPr>
-        <p:txBody>
-          <a:bodyPr wrap="square" lIns="0" tIns="0" rIns="0" bIns="0" rtlCol="0" anchor="ctr"/>
-          <a:lstStyle/>
-          <a:p>
-            <a:pPr indent="0" marL="0">
-              <a:buNone/>
-            </a:pPr>
-            <a:r>
-              <a:rPr lang="en-US" sz="1600" b="1" dirty="0">
-                <a:solidFill>
-                  <a:srgbClr val="1C7293"/>
-                </a:solidFill>
-                <a:latin typeface="Georgia" pitchFamily="34" charset="0"/>
-                <a:ea typeface="Georgia" pitchFamily="34" charset="-122"/>
-                <a:cs typeface="Georgia" pitchFamily="34" charset="-120"/>
-              </a:rPr>
-              <a:t>ECGFounder (zero-shot)</a:t>
-            </a:r>
-            <a:endParaRPr lang="en-US" sz="1600" dirty="0"/>
-          </a:p>
-        </p:txBody>
-      </p:sp>
-      <p:sp>
-        <p:nvSpPr>
-          <p:cNvPr id="13" name="Text 11"/>
-          <p:cNvSpPr/>
-          <p:nvPr/>
-        </p:nvSpPr>
-        <p:spPr>
-          <a:xfrm>
-            <a:off x="6629400" y="2240280"/>
-            <a:ext cx="2011680" cy="1005840"/>
-          </a:xfrm>
-          <a:prstGeom prst="rect">
-            <a:avLst/>
-          </a:prstGeom>
-          <a:noFill/>
-          <a:ln/>
-        </p:spPr>
-        <p:txBody>
-          <a:bodyPr wrap="square" lIns="0" tIns="0" rIns="0" bIns="0" rtlCol="0" anchor="ctr"/>
-          <a:lstStyle/>
-          <a:p>
-            <a:pPr indent="0" marL="0">
-              <a:buNone/>
-            </a:pPr>
-            <a:r>
-              <a:rPr lang="en-US" sz="4400" b="1" dirty="0">
-                <a:solidFill>
-                  <a:srgbClr val="1A2233"/>
-                </a:solidFill>
-                <a:latin typeface="Georgia" pitchFamily="34" charset="0"/>
-                <a:ea typeface="Georgia" pitchFamily="34" charset="-122"/>
-                <a:cs typeface="Georgia" pitchFamily="34" charset="-120"/>
-              </a:rPr>
-              <a:t>0.95</a:t>
-            </a:r>
-            <a:endParaRPr lang="en-US" sz="4400" dirty="0"/>
-          </a:p>
-        </p:txBody>
-      </p:sp>
-      <p:sp>
-        <p:nvSpPr>
-          <p:cNvPr id="14" name="Text 12"/>
-          <p:cNvSpPr/>
-          <p:nvPr/>
-        </p:nvSpPr>
-        <p:spPr>
-          <a:xfrm>
-            <a:off x="8686800" y="2258568"/>
-            <a:ext cx="2743200" cy="1325880"/>
-          </a:xfrm>
-          <a:prstGeom prst="rect">
-            <a:avLst/>
-          </a:prstGeom>
-          <a:noFill/>
-          <a:ln/>
-        </p:spPr>
-        <p:txBody>
-          <a:bodyPr wrap="square" lIns="0" tIns="0" rIns="0" bIns="0" rtlCol="0" anchor="ctr"/>
-          <a:lstStyle/>
-          <a:p>
-            <a:pPr indent="0" marL="0">
-              <a:lnSpc>
-                <a:spcPct val="115000"/>
-              </a:lnSpc>
-              <a:buNone/>
-            </a:pPr>
-            <a:r>
-              <a:rPr lang="en-US" sz="1200" dirty="0">
-                <a:solidFill>
-                  <a:srgbClr val="1A2233"/>
-                </a:solidFill>
-                <a:latin typeface="Calibri" pitchFamily="34" charset="0"/>
-                <a:ea typeface="Calibri" pitchFamily="34" charset="-122"/>
-                <a:cs typeface="Calibri" pitchFamily="34" charset="-120"/>
-              </a:rPr>
-              <a:t>AFib  ROC 0.95 / F1 0.86</a:t>
-            </a:r>
-            <a:endParaRPr lang="en-US" sz="1200" dirty="0"/>
-          </a:p>
-          <a:p>
-            <a:pPr indent="0" marL="0">
-              <a:lnSpc>
-                <a:spcPct val="115000"/>
-              </a:lnSpc>
-              <a:buNone/>
-            </a:pPr>
-            <a:r>
-              <a:rPr lang="en-US" sz="1200" dirty="0">
-                <a:solidFill>
-                  <a:srgbClr val="1A2233"/>
-                </a:solidFill>
-                <a:latin typeface="Calibri" pitchFamily="34" charset="0"/>
-                <a:ea typeface="Calibri" pitchFamily="34" charset="-122"/>
-                <a:cs typeface="Calibri" pitchFamily="34" charset="-120"/>
-              </a:rPr>
-              <a:t>PVC   ROC 0.94 / F1 0.72</a:t>
-            </a:r>
-            <a:endParaRPr lang="en-US" sz="1200" dirty="0"/>
-          </a:p>
-          <a:p>
-            <a:pPr indent="0" marL="0">
-              <a:lnSpc>
-                <a:spcPct val="115000"/>
-              </a:lnSpc>
-              <a:buNone/>
-            </a:pPr>
-            <a:r>
-              <a:rPr lang="en-US" sz="1200" dirty="0">
-                <a:solidFill>
-                  <a:srgbClr val="1A2233"/>
-                </a:solidFill>
-                <a:latin typeface="Calibri" pitchFamily="34" charset="0"/>
-                <a:ea typeface="Calibri" pitchFamily="34" charset="-122"/>
-                <a:cs typeface="Calibri" pitchFamily="34" charset="-120"/>
-              </a:rPr>
-              <a:t>NSR   ROC 0.84 / F1 0.78</a:t>
-            </a:r>
-            <a:endParaRPr lang="en-US" sz="1200" dirty="0"/>
-          </a:p>
-        </p:txBody>
-      </p:sp>
-      <p:sp>
-        <p:nvSpPr>
-          <p:cNvPr id="15" name="Text 13"/>
-          <p:cNvSpPr/>
-          <p:nvPr/>
-        </p:nvSpPr>
-        <p:spPr>
-          <a:xfrm>
-            <a:off x="6675120" y="3520440"/>
-            <a:ext cx="4663440" cy="274320"/>
-          </a:xfrm>
-          <a:prstGeom prst="rect">
-            <a:avLst/>
-          </a:prstGeom>
-          <a:noFill/>
-          <a:ln/>
-        </p:spPr>
-        <p:txBody>
-          <a:bodyPr wrap="square" lIns="0" tIns="0" rIns="0" bIns="0" rtlCol="0" anchor="ctr"/>
-          <a:lstStyle/>
-          <a:p>
-            <a:pPr indent="0" marL="0">
-              <a:buNone/>
-            </a:pPr>
-            <a:r>
-              <a:rPr lang="en-US" sz="1100" b="1" i="1" dirty="0">
-                <a:solidFill>
-                  <a:srgbClr val="1C7293"/>
-                </a:solidFill>
-                <a:latin typeface="Calibri" pitchFamily="34" charset="0"/>
-                <a:ea typeface="Calibri" pitchFamily="34" charset="-122"/>
-                <a:cs typeface="Calibri" pitchFamily="34" charset="-120"/>
-              </a:rPr>
-              <a:t>NEVER trained on MIT-BIH (transfer)</a:t>
-            </a:r>
-            <a:endParaRPr lang="en-US" sz="1100" dirty="0"/>
-          </a:p>
-        </p:txBody>
-      </p:sp>
-      <p:sp>
-        <p:nvSpPr>
-          <p:cNvPr id="16" name="Shape 14"/>
-          <p:cNvSpPr/>
-          <p:nvPr/>
-        </p:nvSpPr>
-        <p:spPr>
-          <a:xfrm>
-            <a:off x="548640" y="4160520"/>
-            <a:ext cx="11064240" cy="1828800"/>
-          </a:xfrm>
-          <a:prstGeom prst="rect">
-            <a:avLst/>
-          </a:prstGeom>
-          <a:solidFill>
-            <a:srgbClr val="FBF3E2"/>
-          </a:solidFill>
-          <a:ln w="19050">
-            <a:solidFill>
-              <a:srgbClr val="C8862A"/>
-            </a:solidFill>
-            <a:prstDash val="solid"/>
-          </a:ln>
-        </p:spPr>
-      </p:sp>
-      <p:sp>
-        <p:nvSpPr>
-          <p:cNvPr id="17" name="Shape 15"/>
-          <p:cNvSpPr/>
-          <p:nvPr/>
-        </p:nvSpPr>
-        <p:spPr>
-          <a:xfrm>
-            <a:off x="548640" y="4160520"/>
-            <a:ext cx="118872" cy="1828800"/>
-          </a:xfrm>
-          <a:prstGeom prst="rect">
-            <a:avLst/>
-          </a:prstGeom>
-          <a:solidFill>
-            <a:srgbClr val="C8862A"/>
-          </a:solidFill>
-          <a:ln/>
-        </p:spPr>
-      </p:sp>
-      <p:sp>
-        <p:nvSpPr>
-          <p:cNvPr id="18" name="Text 16"/>
-          <p:cNvSpPr/>
-          <p:nvPr/>
-        </p:nvSpPr>
-        <p:spPr>
-          <a:xfrm>
-            <a:off x="868680" y="4297680"/>
-            <a:ext cx="10607040" cy="365760"/>
-          </a:xfrm>
-          <a:prstGeom prst="rect">
-            <a:avLst/>
-          </a:prstGeom>
-          <a:noFill/>
-          <a:ln/>
-        </p:spPr>
-        <p:txBody>
-          <a:bodyPr wrap="square" lIns="0" tIns="0" rIns="0" bIns="0" rtlCol="0" anchor="ctr"/>
-          <a:lstStyle/>
-          <a:p>
-            <a:pPr indent="0" marL="0">
-              <a:buNone/>
-            </a:pPr>
-            <a:r>
-              <a:rPr lang="en-US" sz="1600" b="1" dirty="0">
-                <a:solidFill>
-                  <a:srgbClr val="8A5E16"/>
-                </a:solidFill>
-                <a:latin typeface="Georgia" pitchFamily="34" charset="0"/>
-                <a:ea typeface="Georgia" pitchFamily="34" charset="-122"/>
-                <a:cs typeface="Georgia" pitchFamily="34" charset="-120"/>
-              </a:rPr>
-              <a:t>Not 'Stanford beats ECGFounder'</a:t>
-            </a:r>
-            <a:endParaRPr lang="en-US" sz="1600" dirty="0"/>
-          </a:p>
-        </p:txBody>
-      </p:sp>
-      <p:sp>
-        <p:nvSpPr>
-          <p:cNvPr id="19" name="Text 17"/>
-          <p:cNvSpPr/>
-          <p:nvPr/>
-        </p:nvSpPr>
-        <p:spPr>
-          <a:xfrm>
-            <a:off x="868680" y="4709160"/>
-            <a:ext cx="10515600" cy="1188720"/>
-          </a:xfrm>
-          <a:prstGeom prst="rect">
-            <a:avLst/>
-          </a:prstGeom>
-          <a:noFill/>
-          <a:ln/>
-        </p:spPr>
-        <p:txBody>
-          <a:bodyPr wrap="square" lIns="0" tIns="0" rIns="0" bIns="0" rtlCol="0" anchor="ctr"/>
-          <a:lstStyle/>
-          <a:p>
-            <a:pPr indent="0" marL="0">
-              <a:lnSpc>
-                <a:spcPct val="115000"/>
-              </a:lnSpc>
-              <a:buNone/>
-            </a:pPr>
-            <a:r>
-              <a:rPr lang="en-US" sz="1250" dirty="0">
-                <a:solidFill>
-                  <a:srgbClr val="1A2233"/>
-                </a:solidFill>
-                <a:latin typeface="Calibri" pitchFamily="34" charset="0"/>
-                <a:ea typeface="Calibri" pitchFamily="34" charset="-122"/>
-                <a:cs typeface="Calibri" pitchFamily="34" charset="-120"/>
-              </a:rPr>
-              <a:t>Stanford was trained ON MIT-BIH, so ~100% on a held-out split of the same (97% SINUS) dataset is in-distribution fit. ECGFounder's numbers are zero-shot transfer to an unseen dataset. Label spaces (4 exclusive vs 150 multi-label) and granularity (per-segment vs per-record) also differ.</a:t>
-            </a:r>
-            <a:endParaRPr lang="en-US" sz="1250" dirty="0"/>
+                <a:latin typeface="Calibri" pitchFamily="34" charset="0"/>
+                <a:ea typeface="Calibri" pitchFamily="34" charset="-122"/>
+                <a:cs typeface="Calibri" pitchFamily="34" charset="-120"/>
+              </a:rPr>
+              <a:t>Stanford ties one model to one dataset's labels (retrain or hand-map per DB); ECGFounder's fixed vocabulary + centralized mapping is the foundation-model advantage for multi-dataset work.</a:t>
+            </a:r>
+            <a:endParaRPr lang="en-US" sz="1350" dirty="0"/>
           </a:p>
         </p:txBody>
       </p:sp>
@@ -5739,6 +5674,730 @@
 <file path=ppt/slides/slide7.xml><?xml version="1.0" encoding="utf-8"?>
 <p:sld xmlns:a="http://schemas.openxmlformats.org/drawingml/2006/main" xmlns:r="http://schemas.openxmlformats.org/officeDocument/2006/relationships" xmlns:p="http://schemas.openxmlformats.org/presentationml/2006/main">
   <p:cSld name="Slide 7">
+    <p:bg>
+      <p:bgPr>
+        <a:solidFill>
+          <a:srgbClr val="FFFFFF"/>
+        </a:solidFill>
+      </p:bgPr>
+    </p:bg>
+    <p:spTree>
+      <p:nvGrpSpPr>
+        <p:cNvPr id="1" name=""/>
+        <p:cNvGrpSpPr/>
+        <p:nvPr/>
+      </p:nvGrpSpPr>
+      <p:grpSpPr>
+        <a:xfrm>
+          <a:off x="0" y="0"/>
+          <a:ext cx="0" cy="0"/>
+          <a:chOff x="0" y="0"/>
+          <a:chExt cx="0" cy="0"/>
+        </a:xfrm>
+      </p:grpSpPr>
+      <p:sp>
+        <p:nvSpPr>
+          <p:cNvPr id="2" name="Text 0"/>
+          <p:cNvSpPr/>
+          <p:nvPr/>
+        </p:nvSpPr>
+        <p:spPr>
+          <a:xfrm>
+            <a:off x="548640" y="384048"/>
+            <a:ext cx="11064240" cy="274320"/>
+          </a:xfrm>
+          <a:prstGeom prst="rect">
+            <a:avLst/>
+          </a:prstGeom>
+          <a:noFill/>
+          <a:ln/>
+        </p:spPr>
+        <p:txBody>
+          <a:bodyPr wrap="square" lIns="0" tIns="0" rIns="0" bIns="0" rtlCol="0" anchor="ctr"/>
+          <a:lstStyle/>
+          <a:p>
+            <a:pPr indent="0" marL="0">
+              <a:buNone/>
+            </a:pPr>
+            <a:r>
+              <a:rPr lang="en-US" sz="1200" b="1" spc="300" kern="0" dirty="0">
+                <a:solidFill>
+                  <a:srgbClr val="065A82"/>
+                </a:solidFill>
+                <a:latin typeface="Calibri" pitchFamily="34" charset="0"/>
+                <a:ea typeface="Calibri" pitchFamily="34" charset="-122"/>
+                <a:cs typeface="Calibri" pitchFamily="34" charset="-120"/>
+              </a:rPr>
+              <a:t>BOTH RUN ON MIT-BIH, IN DIFFERENT SETTINGS</a:t>
+            </a:r>
+            <a:endParaRPr lang="en-US" sz="1200" dirty="0"/>
+          </a:p>
+        </p:txBody>
+      </p:sp>
+      <p:sp>
+        <p:nvSpPr>
+          <p:cNvPr id="3" name="Text 1"/>
+          <p:cNvSpPr/>
+          <p:nvPr/>
+        </p:nvSpPr>
+        <p:spPr>
+          <a:xfrm>
+            <a:off x="548640" y="640080"/>
+            <a:ext cx="11064240" cy="731520"/>
+          </a:xfrm>
+          <a:prstGeom prst="rect">
+            <a:avLst/>
+          </a:prstGeom>
+          <a:noFill/>
+          <a:ln/>
+        </p:spPr>
+        <p:txBody>
+          <a:bodyPr wrap="square" lIns="0" tIns="0" rIns="0" bIns="0" rtlCol="0" anchor="ctr"/>
+          <a:lstStyle/>
+          <a:p>
+            <a:pPr indent="0" marL="0">
+              <a:buNone/>
+            </a:pPr>
+            <a:r>
+              <a:rPr lang="en-US" sz="3000" b="1" dirty="0">
+                <a:solidFill>
+                  <a:srgbClr val="1A2233"/>
+                </a:solidFill>
+                <a:latin typeface="Georgia" pitchFamily="34" charset="0"/>
+                <a:ea typeface="Georgia" pitchFamily="34" charset="-122"/>
+                <a:cs typeface="Georgia" pitchFamily="34" charset="-120"/>
+              </a:rPr>
+              <a:t>Head-to-head: MIT-BIH</a:t>
+            </a:r>
+            <a:endParaRPr lang="en-US" sz="3000" dirty="0"/>
+          </a:p>
+        </p:txBody>
+      </p:sp>
+      <p:sp>
+        <p:nvSpPr>
+          <p:cNvPr id="4" name="Shape 2"/>
+          <p:cNvSpPr/>
+          <p:nvPr/>
+        </p:nvSpPr>
+        <p:spPr>
+          <a:xfrm>
+            <a:off x="548640" y="1691640"/>
+            <a:ext cx="5257800" cy="2148840"/>
+          </a:xfrm>
+          <a:prstGeom prst="rect">
+            <a:avLst/>
+          </a:prstGeom>
+          <a:solidFill>
+            <a:srgbClr val="F4F7FA"/>
+          </a:solidFill>
+          <a:ln w="12700">
+            <a:solidFill>
+              <a:srgbClr val="D6DEE6"/>
+            </a:solidFill>
+            <a:prstDash val="solid"/>
+          </a:ln>
+        </p:spPr>
+      </p:sp>
+      <p:sp>
+        <p:nvSpPr>
+          <p:cNvPr id="5" name="Shape 3"/>
+          <p:cNvSpPr/>
+          <p:nvPr/>
+        </p:nvSpPr>
+        <p:spPr>
+          <a:xfrm>
+            <a:off x="548640" y="1691640"/>
+            <a:ext cx="5257800" cy="118872"/>
+          </a:xfrm>
+          <a:prstGeom prst="rect">
+            <a:avLst/>
+          </a:prstGeom>
+          <a:solidFill>
+            <a:srgbClr val="065A82"/>
+          </a:solidFill>
+          <a:ln/>
+        </p:spPr>
+      </p:sp>
+      <p:sp>
+        <p:nvSpPr>
+          <p:cNvPr id="6" name="Text 4"/>
+          <p:cNvSpPr/>
+          <p:nvPr/>
+        </p:nvSpPr>
+        <p:spPr>
+          <a:xfrm>
+            <a:off x="868680" y="1874520"/>
+            <a:ext cx="4663440" cy="365760"/>
+          </a:xfrm>
+          <a:prstGeom prst="rect">
+            <a:avLst/>
+          </a:prstGeom>
+          <a:noFill/>
+          <a:ln/>
+        </p:spPr>
+        <p:txBody>
+          <a:bodyPr wrap="square" lIns="0" tIns="0" rIns="0" bIns="0" rtlCol="0" anchor="ctr"/>
+          <a:lstStyle/>
+          <a:p>
+            <a:pPr indent="0" marL="0">
+              <a:buNone/>
+            </a:pPr>
+            <a:r>
+              <a:rPr lang="en-US" sz="1600" b="1" dirty="0">
+                <a:solidFill>
+                  <a:srgbClr val="065A82"/>
+                </a:solidFill>
+                <a:latin typeface="Georgia" pitchFamily="34" charset="0"/>
+                <a:ea typeface="Georgia" pitchFamily="34" charset="-122"/>
+                <a:cs typeface="Georgia" pitchFamily="34" charset="-120"/>
+              </a:rPr>
+              <a:t>Stanford 1D-ResNet</a:t>
+            </a:r>
+            <a:endParaRPr lang="en-US" sz="1600" dirty="0"/>
+          </a:p>
+        </p:txBody>
+      </p:sp>
+      <p:sp>
+        <p:nvSpPr>
+          <p:cNvPr id="7" name="Text 5"/>
+          <p:cNvSpPr/>
+          <p:nvPr/>
+        </p:nvSpPr>
+        <p:spPr>
+          <a:xfrm>
+            <a:off x="822960" y="2240280"/>
+            <a:ext cx="2011680" cy="1005840"/>
+          </a:xfrm>
+          <a:prstGeom prst="rect">
+            <a:avLst/>
+          </a:prstGeom>
+          <a:noFill/>
+          <a:ln/>
+        </p:spPr>
+        <p:txBody>
+          <a:bodyPr wrap="square" lIns="0" tIns="0" rIns="0" bIns="0" rtlCol="0" anchor="ctr"/>
+          <a:lstStyle/>
+          <a:p>
+            <a:pPr indent="0" marL="0">
+              <a:buNone/>
+            </a:pPr>
+            <a:r>
+              <a:rPr lang="en-US" sz="4400" b="1" dirty="0">
+                <a:solidFill>
+                  <a:srgbClr val="1A2233"/>
+                </a:solidFill>
+                <a:latin typeface="Georgia" pitchFamily="34" charset="0"/>
+                <a:ea typeface="Georgia" pitchFamily="34" charset="-122"/>
+                <a:cs typeface="Georgia" pitchFamily="34" charset="-120"/>
+              </a:rPr>
+              <a:t>~1.00</a:t>
+            </a:r>
+            <a:endParaRPr lang="en-US" sz="4400" dirty="0"/>
+          </a:p>
+        </p:txBody>
+      </p:sp>
+      <p:sp>
+        <p:nvSpPr>
+          <p:cNvPr id="8" name="Text 6"/>
+          <p:cNvSpPr/>
+          <p:nvPr/>
+        </p:nvSpPr>
+        <p:spPr>
+          <a:xfrm>
+            <a:off x="2880360" y="2258568"/>
+            <a:ext cx="2743200" cy="1325880"/>
+          </a:xfrm>
+          <a:prstGeom prst="rect">
+            <a:avLst/>
+          </a:prstGeom>
+          <a:noFill/>
+          <a:ln/>
+        </p:spPr>
+        <p:txBody>
+          <a:bodyPr wrap="square" lIns="0" tIns="0" rIns="0" bIns="0" rtlCol="0" anchor="ctr"/>
+          <a:lstStyle/>
+          <a:p>
+            <a:pPr indent="0" marL="0">
+              <a:lnSpc>
+                <a:spcPct val="115000"/>
+              </a:lnSpc>
+              <a:buNone/>
+            </a:pPr>
+            <a:r>
+              <a:rPr lang="en-US" sz="1200" dirty="0">
+                <a:solidFill>
+                  <a:srgbClr val="1A2233"/>
+                </a:solidFill>
+                <a:latin typeface="Calibri" pitchFamily="34" charset="0"/>
+                <a:ea typeface="Calibri" pitchFamily="34" charset="-122"/>
+                <a:cs typeface="Calibri" pitchFamily="34" charset="-120"/>
+              </a:rPr>
+              <a:t>accuracy on dev_split</a:t>
+            </a:r>
+            <a:endParaRPr lang="en-US" sz="1200" dirty="0"/>
+          </a:p>
+          <a:p>
+            <a:pPr indent="0" marL="0">
+              <a:lnSpc>
+                <a:spcPct val="115000"/>
+              </a:lnSpc>
+              <a:buNone/>
+            </a:pPr>
+            <a:r>
+              <a:rPr lang="en-US" sz="1200" dirty="0">
+                <a:solidFill>
+                  <a:srgbClr val="1A2233"/>
+                </a:solidFill>
+                <a:latin typeface="Calibri" pitchFamily="34" charset="0"/>
+                <a:ea typeface="Calibri" pitchFamily="34" charset="-122"/>
+                <a:cs typeface="Calibri" pitchFamily="34" charset="-120"/>
+              </a:rPr>
+              <a:t>SINUS F1 1.00 (n=1597)</a:t>
+            </a:r>
+            <a:endParaRPr lang="en-US" sz="1200" dirty="0"/>
+          </a:p>
+          <a:p>
+            <a:pPr indent="0" marL="0">
+              <a:lnSpc>
+                <a:spcPct val="115000"/>
+              </a:lnSpc>
+              <a:buNone/>
+            </a:pPr>
+            <a:r>
+              <a:rPr lang="en-US" sz="1200" dirty="0">
+                <a:solidFill>
+                  <a:srgbClr val="1A2233"/>
+                </a:solidFill>
+                <a:latin typeface="Calibri" pitchFamily="34" charset="0"/>
+                <a:ea typeface="Calibri" pitchFamily="34" charset="-122"/>
+                <a:cs typeface="Calibri" pitchFamily="34" charset="-120"/>
+              </a:rPr>
+              <a:t>BIGEMINY F1 0.96 (n=41)</a:t>
+            </a:r>
+            <a:endParaRPr lang="en-US" sz="1200" dirty="0"/>
+          </a:p>
+        </p:txBody>
+      </p:sp>
+      <p:sp>
+        <p:nvSpPr>
+          <p:cNvPr id="9" name="Text 7"/>
+          <p:cNvSpPr/>
+          <p:nvPr/>
+        </p:nvSpPr>
+        <p:spPr>
+          <a:xfrm>
+            <a:off x="868680" y="3520440"/>
+            <a:ext cx="4663440" cy="274320"/>
+          </a:xfrm>
+          <a:prstGeom prst="rect">
+            <a:avLst/>
+          </a:prstGeom>
+          <a:noFill/>
+          <a:ln/>
+        </p:spPr>
+        <p:txBody>
+          <a:bodyPr wrap="square" lIns="0" tIns="0" rIns="0" bIns="0" rtlCol="0" anchor="ctr"/>
+          <a:lstStyle/>
+          <a:p>
+            <a:pPr indent="0" marL="0">
+              <a:buNone/>
+            </a:pPr>
+            <a:r>
+              <a:rPr lang="en-US" sz="1100" b="1" i="1" dirty="0">
+                <a:solidFill>
+                  <a:srgbClr val="065A82"/>
+                </a:solidFill>
+                <a:latin typeface="Calibri" pitchFamily="34" charset="0"/>
+                <a:ea typeface="Calibri" pitchFamily="34" charset="-122"/>
+                <a:cs typeface="Calibri" pitchFamily="34" charset="-120"/>
+              </a:rPr>
+              <a:t>TRAINED ON MIT-BIH (in-distribution)</a:t>
+            </a:r>
+            <a:endParaRPr lang="en-US" sz="1100" dirty="0"/>
+          </a:p>
+        </p:txBody>
+      </p:sp>
+      <p:sp>
+        <p:nvSpPr>
+          <p:cNvPr id="10" name="Shape 8"/>
+          <p:cNvSpPr/>
+          <p:nvPr/>
+        </p:nvSpPr>
+        <p:spPr>
+          <a:xfrm>
+            <a:off x="6355080" y="1691640"/>
+            <a:ext cx="5257800" cy="2148840"/>
+          </a:xfrm>
+          <a:prstGeom prst="rect">
+            <a:avLst/>
+          </a:prstGeom>
+          <a:solidFill>
+            <a:srgbClr val="F4F7FA"/>
+          </a:solidFill>
+          <a:ln w="12700">
+            <a:solidFill>
+              <a:srgbClr val="D6DEE6"/>
+            </a:solidFill>
+            <a:prstDash val="solid"/>
+          </a:ln>
+        </p:spPr>
+      </p:sp>
+      <p:sp>
+        <p:nvSpPr>
+          <p:cNvPr id="11" name="Shape 9"/>
+          <p:cNvSpPr/>
+          <p:nvPr/>
+        </p:nvSpPr>
+        <p:spPr>
+          <a:xfrm>
+            <a:off x="6355080" y="1691640"/>
+            <a:ext cx="5257800" cy="118872"/>
+          </a:xfrm>
+          <a:prstGeom prst="rect">
+            <a:avLst/>
+          </a:prstGeom>
+          <a:solidFill>
+            <a:srgbClr val="1C7293"/>
+          </a:solidFill>
+          <a:ln/>
+        </p:spPr>
+      </p:sp>
+      <p:sp>
+        <p:nvSpPr>
+          <p:cNvPr id="12" name="Text 10"/>
+          <p:cNvSpPr/>
+          <p:nvPr/>
+        </p:nvSpPr>
+        <p:spPr>
+          <a:xfrm>
+            <a:off x="6675120" y="1874520"/>
+            <a:ext cx="4663440" cy="365760"/>
+          </a:xfrm>
+          <a:prstGeom prst="rect">
+            <a:avLst/>
+          </a:prstGeom>
+          <a:noFill/>
+          <a:ln/>
+        </p:spPr>
+        <p:txBody>
+          <a:bodyPr wrap="square" lIns="0" tIns="0" rIns="0" bIns="0" rtlCol="0" anchor="ctr"/>
+          <a:lstStyle/>
+          <a:p>
+            <a:pPr indent="0" marL="0">
+              <a:buNone/>
+            </a:pPr>
+            <a:r>
+              <a:rPr lang="en-US" sz="1600" b="1" dirty="0">
+                <a:solidFill>
+                  <a:srgbClr val="1C7293"/>
+                </a:solidFill>
+                <a:latin typeface="Georgia" pitchFamily="34" charset="0"/>
+                <a:ea typeface="Georgia" pitchFamily="34" charset="-122"/>
+                <a:cs typeface="Georgia" pitchFamily="34" charset="-120"/>
+              </a:rPr>
+              <a:t>ECGFounder (zero-shot)</a:t>
+            </a:r>
+            <a:endParaRPr lang="en-US" sz="1600" dirty="0"/>
+          </a:p>
+        </p:txBody>
+      </p:sp>
+      <p:sp>
+        <p:nvSpPr>
+          <p:cNvPr id="13" name="Text 11"/>
+          <p:cNvSpPr/>
+          <p:nvPr/>
+        </p:nvSpPr>
+        <p:spPr>
+          <a:xfrm>
+            <a:off x="6629400" y="2240280"/>
+            <a:ext cx="2011680" cy="1005840"/>
+          </a:xfrm>
+          <a:prstGeom prst="rect">
+            <a:avLst/>
+          </a:prstGeom>
+          <a:noFill/>
+          <a:ln/>
+        </p:spPr>
+        <p:txBody>
+          <a:bodyPr wrap="square" lIns="0" tIns="0" rIns="0" bIns="0" rtlCol="0" anchor="ctr"/>
+          <a:lstStyle/>
+          <a:p>
+            <a:pPr indent="0" marL="0">
+              <a:buNone/>
+            </a:pPr>
+            <a:r>
+              <a:rPr lang="en-US" sz="4400" b="1" dirty="0">
+                <a:solidFill>
+                  <a:srgbClr val="1A2233"/>
+                </a:solidFill>
+                <a:latin typeface="Georgia" pitchFamily="34" charset="0"/>
+                <a:ea typeface="Georgia" pitchFamily="34" charset="-122"/>
+                <a:cs typeface="Georgia" pitchFamily="34" charset="-120"/>
+              </a:rPr>
+              <a:t>0.95</a:t>
+            </a:r>
+            <a:endParaRPr lang="en-US" sz="4400" dirty="0"/>
+          </a:p>
+        </p:txBody>
+      </p:sp>
+      <p:sp>
+        <p:nvSpPr>
+          <p:cNvPr id="14" name="Text 12"/>
+          <p:cNvSpPr/>
+          <p:nvPr/>
+        </p:nvSpPr>
+        <p:spPr>
+          <a:xfrm>
+            <a:off x="8686800" y="2258568"/>
+            <a:ext cx="2743200" cy="1325880"/>
+          </a:xfrm>
+          <a:prstGeom prst="rect">
+            <a:avLst/>
+          </a:prstGeom>
+          <a:noFill/>
+          <a:ln/>
+        </p:spPr>
+        <p:txBody>
+          <a:bodyPr wrap="square" lIns="0" tIns="0" rIns="0" bIns="0" rtlCol="0" anchor="ctr"/>
+          <a:lstStyle/>
+          <a:p>
+            <a:pPr indent="0" marL="0">
+              <a:lnSpc>
+                <a:spcPct val="115000"/>
+              </a:lnSpc>
+              <a:buNone/>
+            </a:pPr>
+            <a:r>
+              <a:rPr lang="en-US" sz="1200" dirty="0">
+                <a:solidFill>
+                  <a:srgbClr val="1A2233"/>
+                </a:solidFill>
+                <a:latin typeface="Calibri" pitchFamily="34" charset="0"/>
+                <a:ea typeface="Calibri" pitchFamily="34" charset="-122"/>
+                <a:cs typeface="Calibri" pitchFamily="34" charset="-120"/>
+              </a:rPr>
+              <a:t>AFib  ROC 0.95 / F1 0.86</a:t>
+            </a:r>
+            <a:endParaRPr lang="en-US" sz="1200" dirty="0"/>
+          </a:p>
+          <a:p>
+            <a:pPr indent="0" marL="0">
+              <a:lnSpc>
+                <a:spcPct val="115000"/>
+              </a:lnSpc>
+              <a:buNone/>
+            </a:pPr>
+            <a:r>
+              <a:rPr lang="en-US" sz="1200" dirty="0">
+                <a:solidFill>
+                  <a:srgbClr val="1A2233"/>
+                </a:solidFill>
+                <a:latin typeface="Calibri" pitchFamily="34" charset="0"/>
+                <a:ea typeface="Calibri" pitchFamily="34" charset="-122"/>
+                <a:cs typeface="Calibri" pitchFamily="34" charset="-120"/>
+              </a:rPr>
+              <a:t>PVC   ROC 0.94 / F1 0.72</a:t>
+            </a:r>
+            <a:endParaRPr lang="en-US" sz="1200" dirty="0"/>
+          </a:p>
+          <a:p>
+            <a:pPr indent="0" marL="0">
+              <a:lnSpc>
+                <a:spcPct val="115000"/>
+              </a:lnSpc>
+              <a:buNone/>
+            </a:pPr>
+            <a:r>
+              <a:rPr lang="en-US" sz="1200" dirty="0">
+                <a:solidFill>
+                  <a:srgbClr val="1A2233"/>
+                </a:solidFill>
+                <a:latin typeface="Calibri" pitchFamily="34" charset="0"/>
+                <a:ea typeface="Calibri" pitchFamily="34" charset="-122"/>
+                <a:cs typeface="Calibri" pitchFamily="34" charset="-120"/>
+              </a:rPr>
+              <a:t>NSR   ROC 0.84 / F1 0.78</a:t>
+            </a:r>
+            <a:endParaRPr lang="en-US" sz="1200" dirty="0"/>
+          </a:p>
+        </p:txBody>
+      </p:sp>
+      <p:sp>
+        <p:nvSpPr>
+          <p:cNvPr id="15" name="Text 13"/>
+          <p:cNvSpPr/>
+          <p:nvPr/>
+        </p:nvSpPr>
+        <p:spPr>
+          <a:xfrm>
+            <a:off x="6675120" y="3520440"/>
+            <a:ext cx="4663440" cy="274320"/>
+          </a:xfrm>
+          <a:prstGeom prst="rect">
+            <a:avLst/>
+          </a:prstGeom>
+          <a:noFill/>
+          <a:ln/>
+        </p:spPr>
+        <p:txBody>
+          <a:bodyPr wrap="square" lIns="0" tIns="0" rIns="0" bIns="0" rtlCol="0" anchor="ctr"/>
+          <a:lstStyle/>
+          <a:p>
+            <a:pPr indent="0" marL="0">
+              <a:buNone/>
+            </a:pPr>
+            <a:r>
+              <a:rPr lang="en-US" sz="1100" b="1" i="1" dirty="0">
+                <a:solidFill>
+                  <a:srgbClr val="1C7293"/>
+                </a:solidFill>
+                <a:latin typeface="Calibri" pitchFamily="34" charset="0"/>
+                <a:ea typeface="Calibri" pitchFamily="34" charset="-122"/>
+                <a:cs typeface="Calibri" pitchFamily="34" charset="-120"/>
+              </a:rPr>
+              <a:t>NEVER trained on MIT-BIH (transfer)</a:t>
+            </a:r>
+            <a:endParaRPr lang="en-US" sz="1100" dirty="0"/>
+          </a:p>
+        </p:txBody>
+      </p:sp>
+      <p:sp>
+        <p:nvSpPr>
+          <p:cNvPr id="16" name="Shape 14"/>
+          <p:cNvSpPr/>
+          <p:nvPr/>
+        </p:nvSpPr>
+        <p:spPr>
+          <a:xfrm>
+            <a:off x="548640" y="4160520"/>
+            <a:ext cx="11064240" cy="1828800"/>
+          </a:xfrm>
+          <a:prstGeom prst="rect">
+            <a:avLst/>
+          </a:prstGeom>
+          <a:solidFill>
+            <a:srgbClr val="FBF3E2"/>
+          </a:solidFill>
+          <a:ln w="19050">
+            <a:solidFill>
+              <a:srgbClr val="C8862A"/>
+            </a:solidFill>
+            <a:prstDash val="solid"/>
+          </a:ln>
+        </p:spPr>
+      </p:sp>
+      <p:sp>
+        <p:nvSpPr>
+          <p:cNvPr id="17" name="Shape 15"/>
+          <p:cNvSpPr/>
+          <p:nvPr/>
+        </p:nvSpPr>
+        <p:spPr>
+          <a:xfrm>
+            <a:off x="548640" y="4160520"/>
+            <a:ext cx="118872" cy="1828800"/>
+          </a:xfrm>
+          <a:prstGeom prst="rect">
+            <a:avLst/>
+          </a:prstGeom>
+          <a:solidFill>
+            <a:srgbClr val="C8862A"/>
+          </a:solidFill>
+          <a:ln/>
+        </p:spPr>
+      </p:sp>
+      <p:sp>
+        <p:nvSpPr>
+          <p:cNvPr id="18" name="Text 16"/>
+          <p:cNvSpPr/>
+          <p:nvPr/>
+        </p:nvSpPr>
+        <p:spPr>
+          <a:xfrm>
+            <a:off x="868680" y="4297680"/>
+            <a:ext cx="10607040" cy="365760"/>
+          </a:xfrm>
+          <a:prstGeom prst="rect">
+            <a:avLst/>
+          </a:prstGeom>
+          <a:noFill/>
+          <a:ln/>
+        </p:spPr>
+        <p:txBody>
+          <a:bodyPr wrap="square" lIns="0" tIns="0" rIns="0" bIns="0" rtlCol="0" anchor="ctr"/>
+          <a:lstStyle/>
+          <a:p>
+            <a:pPr indent="0" marL="0">
+              <a:buNone/>
+            </a:pPr>
+            <a:r>
+              <a:rPr lang="en-US" sz="1600" b="1" dirty="0">
+                <a:solidFill>
+                  <a:srgbClr val="8A5E16"/>
+                </a:solidFill>
+                <a:latin typeface="Georgia" pitchFamily="34" charset="0"/>
+                <a:ea typeface="Georgia" pitchFamily="34" charset="-122"/>
+                <a:cs typeface="Georgia" pitchFamily="34" charset="-120"/>
+              </a:rPr>
+              <a:t>Not 'Stanford beats ECGFounder'</a:t>
+            </a:r>
+            <a:endParaRPr lang="en-US" sz="1600" dirty="0"/>
+          </a:p>
+        </p:txBody>
+      </p:sp>
+      <p:sp>
+        <p:nvSpPr>
+          <p:cNvPr id="19" name="Text 17"/>
+          <p:cNvSpPr/>
+          <p:nvPr/>
+        </p:nvSpPr>
+        <p:spPr>
+          <a:xfrm>
+            <a:off x="868680" y="4709160"/>
+            <a:ext cx="10515600" cy="1188720"/>
+          </a:xfrm>
+          <a:prstGeom prst="rect">
+            <a:avLst/>
+          </a:prstGeom>
+          <a:noFill/>
+          <a:ln/>
+        </p:spPr>
+        <p:txBody>
+          <a:bodyPr wrap="square" lIns="0" tIns="0" rIns="0" bIns="0" rtlCol="0" anchor="ctr"/>
+          <a:lstStyle/>
+          <a:p>
+            <a:pPr indent="0" marL="0">
+              <a:lnSpc>
+                <a:spcPct val="115000"/>
+              </a:lnSpc>
+              <a:buNone/>
+            </a:pPr>
+            <a:r>
+              <a:rPr lang="en-US" sz="1250" dirty="0">
+                <a:solidFill>
+                  <a:srgbClr val="1A2233"/>
+                </a:solidFill>
+                <a:latin typeface="Calibri" pitchFamily="34" charset="0"/>
+                <a:ea typeface="Calibri" pitchFamily="34" charset="-122"/>
+                <a:cs typeface="Calibri" pitchFamily="34" charset="-120"/>
+              </a:rPr>
+              <a:t>Stanford was trained ON MIT-BIH, so ~100% on a held-out split of the same (97% SINUS) dataset is in-distribution fit. ECGFounder's numbers are zero-shot transfer to an unseen dataset. Label spaces (4 exclusive vs 150 multi-label) and granularity (per-segment vs per-record) also differ.</a:t>
+            </a:r>
+            <a:endParaRPr lang="en-US" sz="1250" dirty="0"/>
+          </a:p>
+        </p:txBody>
+      </p:sp>
+    </p:spTree>
+  </p:cSld>
+  <p:clrMapOvr>
+    <a:masterClrMapping/>
+  </p:clrMapOvr>
+</p:sld>
+</file>
+
+<file path=ppt/slides/slide8.xml><?xml version="1.0" encoding="utf-8"?>
+<p:sld xmlns:a="http://schemas.openxmlformats.org/drawingml/2006/main" xmlns:r="http://schemas.openxmlformats.org/officeDocument/2006/relationships" xmlns:p="http://schemas.openxmlformats.org/presentationml/2006/main">
+  <p:cSld name="Slide 8">
     <p:bg>
       <p:bgPr>
         <a:solidFill>
